--- a/reference_material/slides/016_Sampling_Estimation.pptx
+++ b/reference_material/slides/016_Sampling_Estimation.pptx
@@ -8,14 +8,15 @@
     <p:sldId id="266" r:id="rId2"/>
     <p:sldId id="256" r:id="rId3"/>
     <p:sldId id="257" r:id="rId4"/>
-    <p:sldId id="265" r:id="rId5"/>
-    <p:sldId id="264" r:id="rId6"/>
-    <p:sldId id="258" r:id="rId7"/>
-    <p:sldId id="259" r:id="rId8"/>
-    <p:sldId id="260" r:id="rId9"/>
-    <p:sldId id="261" r:id="rId10"/>
-    <p:sldId id="262" r:id="rId11"/>
-    <p:sldId id="263" r:id="rId12"/>
+    <p:sldId id="267" r:id="rId5"/>
+    <p:sldId id="265" r:id="rId6"/>
+    <p:sldId id="264" r:id="rId7"/>
+    <p:sldId id="258" r:id="rId8"/>
+    <p:sldId id="259" r:id="rId9"/>
+    <p:sldId id="260" r:id="rId10"/>
+    <p:sldId id="261" r:id="rId11"/>
+    <p:sldId id="262" r:id="rId12"/>
+    <p:sldId id="263" r:id="rId13"/>
   </p:sldIdLst>
   <p:sldSz cx="12192000" cy="6858000"/>
   <p:notesSz cx="6858000" cy="9144000"/>
@@ -261,7 +262,7 @@
           <a:p>
             <a:fld id="{DD771BF5-A32E-1A45-9C2B-1802D67C77D5}" type="datetimeFigureOut">
               <a:rPr lang="en-US" smtClean="0"/>
-              <a:t>10/20/22</a:t>
+              <a:t>10/6/25</a:t>
             </a:fld>
             <a:endParaRPr lang="en-US"/>
           </a:p>
@@ -472,7 +473,7 @@
           <a:p>
             <a:fld id="{DD771BF5-A32E-1A45-9C2B-1802D67C77D5}" type="datetimeFigureOut">
               <a:rPr lang="en-US" smtClean="0"/>
-              <a:t>10/20/22</a:t>
+              <a:t>10/6/25</a:t>
             </a:fld>
             <a:endParaRPr lang="en-US"/>
           </a:p>
@@ -687,7 +688,7 @@
           <a:p>
             <a:fld id="{DD771BF5-A32E-1A45-9C2B-1802D67C77D5}" type="datetimeFigureOut">
               <a:rPr lang="en-US" smtClean="0"/>
-              <a:t>10/20/22</a:t>
+              <a:t>10/6/25</a:t>
             </a:fld>
             <a:endParaRPr lang="en-US"/>
           </a:p>
@@ -888,7 +889,7 @@
           <a:p>
             <a:fld id="{DD771BF5-A32E-1A45-9C2B-1802D67C77D5}" type="datetimeFigureOut">
               <a:rPr lang="en-US" smtClean="0"/>
-              <a:t>10/20/22</a:t>
+              <a:t>10/6/25</a:t>
             </a:fld>
             <a:endParaRPr lang="en-US"/>
           </a:p>
@@ -1167,7 +1168,7 @@
           <a:p>
             <a:fld id="{DD771BF5-A32E-1A45-9C2B-1802D67C77D5}" type="datetimeFigureOut">
               <a:rPr lang="en-US" smtClean="0"/>
-              <a:t>10/20/22</a:t>
+              <a:t>10/6/25</a:t>
             </a:fld>
             <a:endParaRPr lang="en-US"/>
           </a:p>
@@ -1435,7 +1436,7 @@
           <a:p>
             <a:fld id="{DD771BF5-A32E-1A45-9C2B-1802D67C77D5}" type="datetimeFigureOut">
               <a:rPr lang="en-US" smtClean="0"/>
-              <a:t>10/20/22</a:t>
+              <a:t>10/6/25</a:t>
             </a:fld>
             <a:endParaRPr lang="en-US"/>
           </a:p>
@@ -1851,7 +1852,7 @@
           <a:p>
             <a:fld id="{DD771BF5-A32E-1A45-9C2B-1802D67C77D5}" type="datetimeFigureOut">
               <a:rPr lang="en-US" smtClean="0"/>
-              <a:t>10/20/22</a:t>
+              <a:t>10/6/25</a:t>
             </a:fld>
             <a:endParaRPr lang="en-US"/>
           </a:p>
@@ -2000,7 +2001,7 @@
           <a:p>
             <a:fld id="{DD771BF5-A32E-1A45-9C2B-1802D67C77D5}" type="datetimeFigureOut">
               <a:rPr lang="en-US" smtClean="0"/>
-              <a:t>10/20/22</a:t>
+              <a:t>10/6/25</a:t>
             </a:fld>
             <a:endParaRPr lang="en-US"/>
           </a:p>
@@ -2126,7 +2127,7 @@
           <a:p>
             <a:fld id="{DD771BF5-A32E-1A45-9C2B-1802D67C77D5}" type="datetimeFigureOut">
               <a:rPr lang="en-US" smtClean="0"/>
-              <a:t>10/20/22</a:t>
+              <a:t>10/6/25</a:t>
             </a:fld>
             <a:endParaRPr lang="en-US"/>
           </a:p>
@@ -2377,7 +2378,7 @@
           <a:p>
             <a:fld id="{DD771BF5-A32E-1A45-9C2B-1802D67C77D5}" type="datetimeFigureOut">
               <a:rPr lang="en-US" smtClean="0"/>
-              <a:t>10/20/22</a:t>
+              <a:t>10/6/25</a:t>
             </a:fld>
             <a:endParaRPr lang="en-US"/>
           </a:p>
@@ -2822,7 +2823,7 @@
           <a:p>
             <a:fld id="{DD771BF5-A32E-1A45-9C2B-1802D67C77D5}" type="datetimeFigureOut">
               <a:rPr lang="en-US" smtClean="0"/>
-              <a:t>10/20/22</a:t>
+              <a:t>10/6/25</a:t>
             </a:fld>
             <a:endParaRPr lang="en-US"/>
           </a:p>
@@ -3149,7 +3150,7 @@
           <a:p>
             <a:fld id="{DD771BF5-A32E-1A45-9C2B-1802D67C77D5}" type="datetimeFigureOut">
               <a:rPr lang="en-US" smtClean="0"/>
-              <a:t>10/20/22</a:t>
+              <a:t>10/6/25</a:t>
             </a:fld>
             <a:endParaRPr lang="en-US"/>
           </a:p>
@@ -3749,6 +3750,140 @@
           <a:chExt cx="0" cy="0"/>
         </a:xfrm>
       </p:grpSpPr>
+      <p:sp>
+        <p:nvSpPr>
+          <p:cNvPr id="2" name="Title 1">
+            <a:extLst>
+              <a:ext uri="{FF2B5EF4-FFF2-40B4-BE49-F238E27FC236}">
+                <a16:creationId xmlns:a16="http://schemas.microsoft.com/office/drawing/2014/main" id="{9896FBC0-75DD-15F9-AD6A-66963F21B71B}"/>
+              </a:ext>
+            </a:extLst>
+          </p:cNvPr>
+          <p:cNvSpPr>
+            <a:spLocks noGrp="1"/>
+          </p:cNvSpPr>
+          <p:nvPr>
+            <p:ph type="title"/>
+          </p:nvPr>
+        </p:nvSpPr>
+        <p:spPr/>
+        <p:txBody>
+          <a:bodyPr/>
+          <a:lstStyle/>
+          <a:p>
+            <a:r>
+              <a:rPr lang="en-US" dirty="0"/>
+              <a:t>Confidence Intervals </a:t>
+            </a:r>
+          </a:p>
+        </p:txBody>
+      </p:sp>
+      <p:sp>
+        <p:nvSpPr>
+          <p:cNvPr id="3" name="Content Placeholder 2">
+            <a:extLst>
+              <a:ext uri="{FF2B5EF4-FFF2-40B4-BE49-F238E27FC236}">
+                <a16:creationId xmlns:a16="http://schemas.microsoft.com/office/drawing/2014/main" id="{FB031A34-1874-F77F-41E5-05B92E77ED95}"/>
+              </a:ext>
+            </a:extLst>
+          </p:cNvPr>
+          <p:cNvSpPr>
+            <a:spLocks noGrp="1"/>
+          </p:cNvSpPr>
+          <p:nvPr>
+            <p:ph idx="1"/>
+          </p:nvPr>
+        </p:nvSpPr>
+        <p:spPr/>
+        <p:txBody>
+          <a:bodyPr>
+            <a:normAutofit fontScale="92500" lnSpcReduction="10000"/>
+          </a:bodyPr>
+          <a:lstStyle/>
+          <a:p>
+            <a:r>
+              <a:rPr lang="en-US" dirty="0"/>
+              <a:t>Confidence intervals are something that we can derive from our CDF. </a:t>
+            </a:r>
+          </a:p>
+          <a:p>
+            <a:pPr lvl="1"/>
+            <a:r>
+              <a:rPr lang="en-US" dirty="0"/>
+              <a:t>The CDF is a distribution of our predicted means. </a:t>
+            </a:r>
+          </a:p>
+          <a:p>
+            <a:pPr lvl="1"/>
+            <a:r>
+              <a:rPr lang="en-US" dirty="0"/>
+              <a:t>SE – Standard Error is the std of these means. </a:t>
+            </a:r>
+          </a:p>
+          <a:p>
+            <a:r>
+              <a:rPr lang="en-US" dirty="0"/>
+              <a:t>The CI is the range in which we can expect X% of values to fall:</a:t>
+            </a:r>
+          </a:p>
+          <a:p>
+            <a:pPr lvl="1"/>
+            <a:r>
+              <a:rPr lang="en-US" dirty="0"/>
+              <a:t>A 90% confidence interval means that 90% of the values fall between the two CI limits. </a:t>
+            </a:r>
+          </a:p>
+          <a:p>
+            <a:r>
+              <a:rPr lang="en-US" dirty="0"/>
+              <a:t>Alternative phrasing – “We are 90% confident that the value will lie within X amount of this value”. </a:t>
+            </a:r>
+          </a:p>
+          <a:p>
+            <a:pPr lvl="1"/>
+            <a:r>
+              <a:rPr lang="en-US" dirty="0"/>
+              <a:t>E.g. ”Poll is accurate to within +/- 2%, 19 times out of 20”.</a:t>
+            </a:r>
+          </a:p>
+          <a:p>
+            <a:r>
+              <a:rPr lang="en-US" dirty="0"/>
+              <a:t>Remember: those means that we generated in the trial are a distribution…</a:t>
+            </a:r>
+          </a:p>
+        </p:txBody>
+      </p:sp>
+    </p:spTree>
+    <p:extLst>
+      <p:ext uri="{BB962C8B-B14F-4D97-AF65-F5344CB8AC3E}">
+        <p14:creationId xmlns:p14="http://schemas.microsoft.com/office/powerpoint/2010/main" val="4132692562"/>
+      </p:ext>
+    </p:extLst>
+  </p:cSld>
+  <p:clrMapOvr>
+    <a:masterClrMapping/>
+  </p:clrMapOvr>
+</p:sld>
+</file>
+
+<file path=ppt/slides/slide11.xml><?xml version="1.0" encoding="utf-8"?>
+<p:sld xmlns:a="http://schemas.openxmlformats.org/drawingml/2006/main" xmlns:r="http://schemas.openxmlformats.org/officeDocument/2006/relationships" xmlns:p="http://schemas.openxmlformats.org/presentationml/2006/main">
+  <p:cSld>
+    <p:spTree>
+      <p:nvGrpSpPr>
+        <p:cNvPr id="1" name=""/>
+        <p:cNvGrpSpPr/>
+        <p:nvPr/>
+      </p:nvGrpSpPr>
+      <p:grpSpPr>
+        <a:xfrm>
+          <a:off x="0" y="0"/>
+          <a:ext cx="0" cy="0"/>
+          <a:chOff x="0" y="0"/>
+          <a:chExt cx="0" cy="0"/>
+        </a:xfrm>
+      </p:grpSpPr>
       <p:pic>
         <p:nvPicPr>
           <p:cNvPr id="5" name="Picture 4">
@@ -3792,7 +3927,7 @@
 </p:sld>
 </file>
 
-<file path=ppt/slides/slide11.xml><?xml version="1.0" encoding="utf-8"?>
+<file path=ppt/slides/slide12.xml><?xml version="1.0" encoding="utf-8"?>
 <p:sld xmlns:a="http://schemas.openxmlformats.org/drawingml/2006/main" xmlns:r="http://schemas.openxmlformats.org/officeDocument/2006/relationships" xmlns:p="http://schemas.openxmlformats.org/presentationml/2006/main">
   <p:cSld>
     <p:spTree>
@@ -4125,6 +4260,149 @@
 </file>
 
 <file path=ppt/slides/slide4.xml><?xml version="1.0" encoding="utf-8"?>
+<p:sld xmlns:a="http://schemas.openxmlformats.org/drawingml/2006/main" xmlns:r="http://schemas.openxmlformats.org/officeDocument/2006/relationships" xmlns:p="http://schemas.openxmlformats.org/presentationml/2006/main">
+  <p:cSld>
+    <p:spTree>
+      <p:nvGrpSpPr>
+        <p:cNvPr id="1" name=""/>
+        <p:cNvGrpSpPr/>
+        <p:nvPr/>
+      </p:nvGrpSpPr>
+      <p:grpSpPr>
+        <a:xfrm>
+          <a:off x="0" y="0"/>
+          <a:ext cx="0" cy="0"/>
+          <a:chOff x="0" y="0"/>
+          <a:chExt cx="0" cy="0"/>
+        </a:xfrm>
+      </p:grpSpPr>
+      <p:sp>
+        <p:nvSpPr>
+          <p:cNvPr id="2" name="Title 1">
+            <a:extLst>
+              <a:ext uri="{FF2B5EF4-FFF2-40B4-BE49-F238E27FC236}">
+                <a16:creationId xmlns:a16="http://schemas.microsoft.com/office/drawing/2014/main" id="{C2BD65B1-822E-410F-63F4-3DF1E407FA09}"/>
+              </a:ext>
+            </a:extLst>
+          </p:cNvPr>
+          <p:cNvSpPr>
+            <a:spLocks noGrp="1"/>
+          </p:cNvSpPr>
+          <p:nvPr>
+            <p:ph type="title"/>
+          </p:nvPr>
+        </p:nvSpPr>
+        <p:spPr/>
+        <p:txBody>
+          <a:bodyPr/>
+          <a:lstStyle/>
+          <a:p>
+            <a:r>
+              <a:rPr lang="en-US" dirty="0"/>
+              <a:t>Matching Analytical Distributions</a:t>
+            </a:r>
+          </a:p>
+        </p:txBody>
+      </p:sp>
+      <p:sp>
+        <p:nvSpPr>
+          <p:cNvPr id="3" name="Content Placeholder 2">
+            <a:extLst>
+              <a:ext uri="{FF2B5EF4-FFF2-40B4-BE49-F238E27FC236}">
+                <a16:creationId xmlns:a16="http://schemas.microsoft.com/office/drawing/2014/main" id="{9F4CE85A-BD59-58E7-3526-AB0697D5172C}"/>
+              </a:ext>
+            </a:extLst>
+          </p:cNvPr>
+          <p:cNvSpPr>
+            <a:spLocks noGrp="1"/>
+          </p:cNvSpPr>
+          <p:nvPr>
+            <p:ph idx="1"/>
+          </p:nvPr>
+        </p:nvSpPr>
+        <p:spPr>
+          <a:xfrm>
+            <a:off x="1451579" y="2015732"/>
+            <a:ext cx="9603275" cy="4037749"/>
+          </a:xfrm>
+        </p:spPr>
+        <p:txBody>
+          <a:bodyPr/>
+          <a:lstStyle/>
+          <a:p>
+            <a:r>
+              <a:rPr lang="en-US" dirty="0"/>
+              <a:t>Our main goal with analytical distributions has been to match one to data. </a:t>
+            </a:r>
+          </a:p>
+          <a:p>
+            <a:pPr lvl="1"/>
+            <a:r>
+              <a:rPr lang="en-US" dirty="0"/>
+              <a:t>May need some transformation like log. </a:t>
+            </a:r>
+          </a:p>
+          <a:p>
+            <a:pPr lvl="1"/>
+            <a:r>
+              <a:rPr lang="en-US" dirty="0"/>
+              <a:t>Calculate the parameters from the empirical data. </a:t>
+            </a:r>
+          </a:p>
+          <a:p>
+            <a:pPr lvl="1"/>
+            <a:r>
+              <a:rPr lang="en-US" dirty="0"/>
+              <a:t>Create a model that follows empirical as closely as possible. </a:t>
+            </a:r>
+          </a:p>
+          <a:p>
+            <a:r>
+              <a:rPr lang="en-US" dirty="0"/>
+              <a:t>We can use this model to generalize about the population. </a:t>
+            </a:r>
+          </a:p>
+          <a:p>
+            <a:pPr lvl="1"/>
+            <a:r>
+              <a:rPr lang="en-US" dirty="0"/>
+              <a:t>E.g. how many people wear size 9 or earn over $92,000.</a:t>
+            </a:r>
+          </a:p>
+          <a:p>
+            <a:r>
+              <a:rPr lang="en-US" dirty="0"/>
+              <a:t>How do we quantify the quality of that estimate? </a:t>
+            </a:r>
+          </a:p>
+          <a:p>
+            <a:pPr lvl="1"/>
+            <a:r>
+              <a:rPr lang="en-US" dirty="0"/>
+              <a:t>We can always make an analytical model, but </a:t>
+            </a:r>
+            <a:r>
+              <a:rPr lang="en-US"/>
+              <a:t>how good is it? </a:t>
+            </a:r>
+            <a:endParaRPr lang="en-US" dirty="0"/>
+          </a:p>
+        </p:txBody>
+      </p:sp>
+    </p:spTree>
+    <p:extLst>
+      <p:ext uri="{BB962C8B-B14F-4D97-AF65-F5344CB8AC3E}">
+        <p14:creationId xmlns:p14="http://schemas.microsoft.com/office/powerpoint/2010/main" val="4087548683"/>
+      </p:ext>
+    </p:extLst>
+  </p:cSld>
+  <p:clrMapOvr>
+    <a:masterClrMapping/>
+  </p:clrMapOvr>
+</p:sld>
+</file>
+
+<file path=ppt/slides/slide5.xml><?xml version="1.0" encoding="utf-8"?>
 <p:sld xmlns:a="http://schemas.openxmlformats.org/drawingml/2006/main" xmlns:r="http://schemas.openxmlformats.org/officeDocument/2006/relationships" xmlns:p="http://schemas.openxmlformats.org/presentationml/2006/main">
   <p:cSld>
     <p:bg>
@@ -4416,7 +4694,7 @@
               </a:lnSpc>
             </a:pPr>
             <a:r>
-              <a:rPr lang="en-US" sz="1500" dirty="0"/>
+              <a:rPr lang="en-US" sz="1600" dirty="0"/>
               <a:t>If we are attempting to estimate the height of people:</a:t>
             </a:r>
           </a:p>
@@ -4427,7 +4705,7 @@
               </a:lnSpc>
             </a:pPr>
             <a:r>
-              <a:rPr lang="en-US" sz="1500" dirty="0"/>
+              <a:rPr lang="en-US" sz="1600" dirty="0"/>
               <a:t>If our sample is the full population, we can calculate it directly – 0 difference. </a:t>
             </a:r>
           </a:p>
@@ -4438,7 +4716,7 @@
               </a:lnSpc>
             </a:pPr>
             <a:r>
-              <a:rPr lang="en-US" sz="1500" dirty="0"/>
+              <a:rPr lang="en-US" sz="1600" dirty="0"/>
               <a:t>If our sample is just one person, that person could be any height – Danny DeVito or Yao Ming. </a:t>
             </a:r>
           </a:p>
@@ -4449,7 +4727,7 @@
               </a:lnSpc>
             </a:pPr>
             <a:r>
-              <a:rPr lang="en-US" sz="1500" dirty="0"/>
+              <a:rPr lang="en-US" sz="1600" dirty="0"/>
               <a:t>As the sample size grows, the randomness of getting a non-representative sample becomes less likely. </a:t>
             </a:r>
           </a:p>
@@ -4460,14 +4738,9 @@
               </a:lnSpc>
             </a:pPr>
             <a:r>
-              <a:rPr lang="en-US" sz="1800" dirty="0"/>
-              <a:t>The larger the sample size, the more reliably it matches the population, in general</a:t>
-            </a:r>
-            <a:r>
-              <a:rPr lang="en-US" sz="1800"/>
-              <a:t>. </a:t>
-            </a:r>
-            <a:endParaRPr lang="en-US" sz="1800" dirty="0"/>
+              <a:rPr lang="en-US" dirty="0"/>
+              <a:t>The larger the sample size, the more reliably it matches the population, in general. </a:t>
+            </a:r>
           </a:p>
         </p:txBody>
       </p:sp>
@@ -4628,159 +4901,6 @@
 </p:sld>
 </file>
 
-<file path=ppt/slides/slide5.xml><?xml version="1.0" encoding="utf-8"?>
-<p:sld xmlns:a="http://schemas.openxmlformats.org/drawingml/2006/main" xmlns:r="http://schemas.openxmlformats.org/officeDocument/2006/relationships" xmlns:p="http://schemas.openxmlformats.org/presentationml/2006/main">
-  <p:cSld>
-    <p:spTree>
-      <p:nvGrpSpPr>
-        <p:cNvPr id="1" name=""/>
-        <p:cNvGrpSpPr/>
-        <p:nvPr/>
-      </p:nvGrpSpPr>
-      <p:grpSpPr>
-        <a:xfrm>
-          <a:off x="0" y="0"/>
-          <a:ext cx="0" cy="0"/>
-          <a:chOff x="0" y="0"/>
-          <a:chExt cx="0" cy="0"/>
-        </a:xfrm>
-      </p:grpSpPr>
-      <p:sp>
-        <p:nvSpPr>
-          <p:cNvPr id="2" name="Title 1">
-            <a:extLst>
-              <a:ext uri="{FF2B5EF4-FFF2-40B4-BE49-F238E27FC236}">
-                <a16:creationId xmlns:a16="http://schemas.microsoft.com/office/drawing/2014/main" id="{5BBBCB09-330E-67CB-A7D1-AEAA682A7378}"/>
-              </a:ext>
-            </a:extLst>
-          </p:cNvPr>
-          <p:cNvSpPr>
-            <a:spLocks noGrp="1"/>
-          </p:cNvSpPr>
-          <p:nvPr>
-            <p:ph type="title"/>
-          </p:nvPr>
-        </p:nvSpPr>
-        <p:spPr/>
-        <p:txBody>
-          <a:bodyPr/>
-          <a:lstStyle/>
-          <a:p>
-            <a:r>
-              <a:rPr lang="en-US" dirty="0"/>
-              <a:t>Error Types</a:t>
-            </a:r>
-          </a:p>
-        </p:txBody>
-      </p:sp>
-      <p:sp>
-        <p:nvSpPr>
-          <p:cNvPr id="3" name="Content Placeholder 2">
-            <a:extLst>
-              <a:ext uri="{FF2B5EF4-FFF2-40B4-BE49-F238E27FC236}">
-                <a16:creationId xmlns:a16="http://schemas.microsoft.com/office/drawing/2014/main" id="{84DE798D-CC78-5128-6D64-8338981E6D7C}"/>
-              </a:ext>
-            </a:extLst>
-          </p:cNvPr>
-          <p:cNvSpPr>
-            <a:spLocks noGrp="1"/>
-          </p:cNvSpPr>
-          <p:nvPr>
-            <p:ph idx="1"/>
-          </p:nvPr>
-        </p:nvSpPr>
-        <p:spPr>
-          <a:xfrm>
-            <a:off x="1451579" y="1853754"/>
-            <a:ext cx="9603275" cy="4199727"/>
-          </a:xfrm>
-        </p:spPr>
-        <p:txBody>
-          <a:bodyPr>
-            <a:normAutofit fontScale="92500" lnSpcReduction="10000"/>
-          </a:bodyPr>
-          <a:lstStyle/>
-          <a:p>
-            <a:r>
-              <a:rPr lang="en-US" dirty="0"/>
-              <a:t>Sampling error:</a:t>
-            </a:r>
-          </a:p>
-          <a:p>
-            <a:pPr lvl="1"/>
-            <a:r>
-              <a:rPr lang="en-US" dirty="0"/>
-              <a:t>We are taking a sample of a population. It should be random and the stats for the sample should match the distribution, but there’s always some error. </a:t>
-            </a:r>
-          </a:p>
-          <a:p>
-            <a:pPr lvl="1"/>
-            <a:r>
-              <a:rPr lang="en-US" dirty="0"/>
-              <a:t>E.g. if you randomly sample heights, and you randomly get three 7ft people, that’s bad luck. </a:t>
-            </a:r>
-          </a:p>
-          <a:p>
-            <a:r>
-              <a:rPr lang="en-US" dirty="0"/>
-              <a:t>Sampling bias:</a:t>
-            </a:r>
-          </a:p>
-          <a:p>
-            <a:pPr lvl="1"/>
-            <a:r>
-              <a:rPr lang="en-US" dirty="0"/>
-              <a:t>Is the sample that we are taking representative of the population?</a:t>
-            </a:r>
-          </a:p>
-          <a:p>
-            <a:pPr lvl="1"/>
-            <a:r>
-              <a:rPr lang="en-US" dirty="0"/>
-              <a:t>Easiest to think of with polling – landlines may not represent the whole population. </a:t>
-            </a:r>
-          </a:p>
-          <a:p>
-            <a:r>
-              <a:rPr lang="en-US" dirty="0"/>
-              <a:t>Measurement error:</a:t>
-            </a:r>
-          </a:p>
-          <a:p>
-            <a:pPr lvl="1"/>
-            <a:r>
-              <a:rPr lang="en-US" dirty="0"/>
-              <a:t>How “off” is the actual measurement of the data? </a:t>
-            </a:r>
-          </a:p>
-          <a:p>
-            <a:pPr lvl="1"/>
-            <a:r>
-              <a:rPr lang="en-US" dirty="0"/>
-              <a:t>E.g. when measuring heights, a ruler has some error.</a:t>
-            </a:r>
-          </a:p>
-          <a:p>
-            <a:r>
-              <a:rPr lang="en-US" dirty="0"/>
-              <a:t>We can’t address the last two – they happen before we get the data. </a:t>
-            </a:r>
-          </a:p>
-        </p:txBody>
-      </p:sp>
-    </p:spTree>
-    <p:extLst>
-      <p:ext uri="{BB962C8B-B14F-4D97-AF65-F5344CB8AC3E}">
-        <p14:creationId xmlns:p14="http://schemas.microsoft.com/office/powerpoint/2010/main" val="1976797275"/>
-      </p:ext>
-    </p:extLst>
-  </p:cSld>
-  <p:clrMapOvr>
-    <a:masterClrMapping/>
-  </p:clrMapOvr>
-</p:sld>
-</file>
-
 <file path=ppt/slides/slide6.xml><?xml version="1.0" encoding="utf-8"?>
 <p:sld xmlns:a="http://schemas.openxmlformats.org/drawingml/2006/main" xmlns:r="http://schemas.openxmlformats.org/officeDocument/2006/relationships" xmlns:p="http://schemas.openxmlformats.org/presentationml/2006/main">
   <p:cSld>
@@ -4803,7 +4923,7 @@
           <p:cNvPr id="2" name="Title 1">
             <a:extLst>
               <a:ext uri="{FF2B5EF4-FFF2-40B4-BE49-F238E27FC236}">
-                <a16:creationId xmlns:a16="http://schemas.microsoft.com/office/drawing/2014/main" id="{5A95FECA-0DE7-E666-AB37-57E9018B6DFC}"/>
+                <a16:creationId xmlns:a16="http://schemas.microsoft.com/office/drawing/2014/main" id="{5BBBCB09-330E-67CB-A7D1-AEAA682A7378}"/>
               </a:ext>
             </a:extLst>
           </p:cNvPr>
@@ -4821,7 +4941,7 @@
           <a:p>
             <a:r>
               <a:rPr lang="en-US" dirty="0"/>
-              <a:t>Estimation</a:t>
+              <a:t>Error Types</a:t>
             </a:r>
           </a:p>
         </p:txBody>
@@ -4831,7 +4951,7 @@
           <p:cNvPr id="3" name="Content Placeholder 2">
             <a:extLst>
               <a:ext uri="{FF2B5EF4-FFF2-40B4-BE49-F238E27FC236}">
-                <a16:creationId xmlns:a16="http://schemas.microsoft.com/office/drawing/2014/main" id="{B215A6CA-60D9-2612-A200-6FAA0E9D7B6C}"/>
+                <a16:creationId xmlns:a16="http://schemas.microsoft.com/office/drawing/2014/main" id="{84DE798D-CC78-5128-6D64-8338981E6D7C}"/>
               </a:ext>
             </a:extLst>
           </p:cNvPr>
@@ -4844,72 +4964,79 @@
         </p:nvSpPr>
         <p:spPr>
           <a:xfrm>
-            <a:off x="1451579" y="2015732"/>
-            <a:ext cx="9603275" cy="4037749"/>
+            <a:off x="1451579" y="1853754"/>
+            <a:ext cx="9603275" cy="4199727"/>
           </a:xfrm>
         </p:spPr>
         <p:txBody>
           <a:bodyPr>
-            <a:normAutofit/>
+            <a:normAutofit fontScale="92500" lnSpcReduction="10000"/>
           </a:bodyPr>
           <a:lstStyle/>
           <a:p>
             <a:r>
               <a:rPr lang="en-US" dirty="0"/>
-              <a:t>We can use a sample to draw inferences about the population as a whole:</a:t>
+              <a:t>Sampling error:</a:t>
             </a:r>
           </a:p>
           <a:p>
             <a:pPr lvl="1"/>
             <a:r>
               <a:rPr lang="en-US" dirty="0"/>
-              <a:t>This is what statisticians do with a census or pollsters with polls (soon-</a:t>
-            </a:r>
-            <a:r>
-              <a:rPr lang="en-US" dirty="0" err="1"/>
-              <a:t>ish</a:t>
-            </a:r>
-            <a:r>
-              <a:rPr lang="en-US" dirty="0"/>
-              <a:t>). </a:t>
+              <a:t>We are taking a sample of a population. It should be random and the stats for the sample should match the distribution, but there’s always some error. </a:t>
             </a:r>
           </a:p>
           <a:p>
             <a:pPr lvl="1"/>
             <a:r>
               <a:rPr lang="en-US" dirty="0"/>
-              <a:t>This is called inferential statistics – using stats to predict. ML grows from this. </a:t>
+              <a:t>E.g. if you randomly sample heights, and you randomly get three 7ft people, that’s bad luck. </a:t>
+            </a:r>
+          </a:p>
+          <a:p>
+            <a:r>
+              <a:rPr lang="en-US" dirty="0"/>
+              <a:t>Sampling bias:</a:t>
             </a:r>
           </a:p>
           <a:p>
             <a:pPr lvl="1"/>
-            <a:endParaRPr lang="en-US" dirty="0"/>
-          </a:p>
-          <a:p>
-            <a:r>
-              <a:rPr lang="en-US" dirty="0"/>
-              <a:t>The process is:</a:t>
+            <a:r>
+              <a:rPr lang="en-US" dirty="0"/>
+              <a:t>Is the sample that we are taking representative of the population?</a:t>
             </a:r>
           </a:p>
           <a:p>
             <a:pPr lvl="1"/>
             <a:r>
               <a:rPr lang="en-US" dirty="0"/>
-              <a:t>Match our sample to an analytical distribution. </a:t>
+              <a:t>Easiest to think of with polling – landlines may not represent the whole population. </a:t>
+            </a:r>
+          </a:p>
+          <a:p>
+            <a:r>
+              <a:rPr lang="en-US" dirty="0"/>
+              <a:t>Measurement error:</a:t>
             </a:r>
           </a:p>
           <a:p>
             <a:pPr lvl="1"/>
             <a:r>
               <a:rPr lang="en-US" dirty="0"/>
-              <a:t>Generate random values that fit that distribution. </a:t>
+              <a:t>How “off” is the actual measurement of the data? </a:t>
             </a:r>
           </a:p>
           <a:p>
             <a:pPr lvl="1"/>
             <a:r>
               <a:rPr lang="en-US" dirty="0"/>
-              <a:t>Use the aggregates of those trails along with error measures to draw inferences about the population. </a:t>
+              <a:t>E.g. when measuring heights, a ruler has some error.</a:t>
+            </a:r>
+          </a:p>
+          <a:p>
+            <a:r>
+              <a:rPr lang="en-US" dirty="0"/>
+              <a:t>We can’t address the last two – they happen before we get the data. </a:t>
             </a:r>
           </a:p>
         </p:txBody>
@@ -4917,7 +5044,7 @@
     </p:spTree>
     <p:extLst>
       <p:ext uri="{BB962C8B-B14F-4D97-AF65-F5344CB8AC3E}">
-        <p14:creationId xmlns:p14="http://schemas.microsoft.com/office/powerpoint/2010/main" val="896942143"/>
+        <p14:creationId xmlns:p14="http://schemas.microsoft.com/office/powerpoint/2010/main" val="1976797275"/>
       </p:ext>
     </p:extLst>
   </p:cSld>
@@ -4949,7 +5076,7 @@
           <p:cNvPr id="2" name="Title 1">
             <a:extLst>
               <a:ext uri="{FF2B5EF4-FFF2-40B4-BE49-F238E27FC236}">
-                <a16:creationId xmlns:a16="http://schemas.microsoft.com/office/drawing/2014/main" id="{500CB30F-8FC5-BA2F-DDAE-26A52B671961}"/>
+                <a16:creationId xmlns:a16="http://schemas.microsoft.com/office/drawing/2014/main" id="{5A95FECA-0DE7-E666-AB37-57E9018B6DFC}"/>
               </a:ext>
             </a:extLst>
           </p:cNvPr>
@@ -4967,7 +5094,7 @@
           <a:p>
             <a:r>
               <a:rPr lang="en-US" dirty="0"/>
-              <a:t>Estimators</a:t>
+              <a:t>Estimation</a:t>
             </a:r>
           </a:p>
         </p:txBody>
@@ -4977,7 +5104,7 @@
           <p:cNvPr id="3" name="Content Placeholder 2">
             <a:extLst>
               <a:ext uri="{FF2B5EF4-FFF2-40B4-BE49-F238E27FC236}">
-                <a16:creationId xmlns:a16="http://schemas.microsoft.com/office/drawing/2014/main" id="{8099297A-60F8-D213-DA79-218C928CEC26}"/>
+                <a16:creationId xmlns:a16="http://schemas.microsoft.com/office/drawing/2014/main" id="{B215A6CA-60D9-2612-A200-6FAA0E9D7B6C}"/>
               </a:ext>
             </a:extLst>
           </p:cNvPr>
@@ -4995,45 +5122,75 @@
           </a:xfrm>
         </p:spPr>
         <p:txBody>
-          <a:bodyPr/>
-          <a:lstStyle/>
-          <a:p>
-            <a:r>
-              <a:rPr lang="en-US" dirty="0"/>
-              <a:t>Estimators are a bigger thing in math-y stats than data analytics-y stats. </a:t>
-            </a:r>
-          </a:p>
-          <a:p>
-            <a:r>
-              <a:rPr lang="en-US" dirty="0"/>
-              <a:t>The estimator is basically the thing we use from the sample to estimate the population. </a:t>
-            </a:r>
-          </a:p>
-          <a:p>
-            <a:r>
-              <a:rPr lang="en-US" dirty="0"/>
-              <a:t>For normal distribution type of things, it’ll be the mean. </a:t>
-            </a:r>
-          </a:p>
-          <a:p>
-            <a:endParaRPr lang="en-US" dirty="0"/>
-          </a:p>
-          <a:p>
-            <a:r>
-              <a:rPr lang="en-US" dirty="0"/>
-              <a:t>In layman's terms, our estimators are what we use to create the analytical distributions from the empirical data. We want those to not introduce any error themselves. </a:t>
+          <a:bodyPr>
+            <a:normAutofit/>
+          </a:bodyPr>
+          <a:lstStyle/>
+          <a:p>
+            <a:r>
+              <a:rPr lang="en-US" dirty="0"/>
+              <a:t>We can use a sample to draw inferences about the population as a whole:</a:t>
+            </a:r>
+          </a:p>
+          <a:p>
+            <a:pPr lvl="1"/>
+            <a:r>
+              <a:rPr lang="en-US" dirty="0"/>
+              <a:t>This is what statisticians do with a census or pollsters with polls (soon-</a:t>
+            </a:r>
+            <a:r>
+              <a:rPr lang="en-US" dirty="0" err="1"/>
+              <a:t>ish</a:t>
+            </a:r>
+            <a:r>
+              <a:rPr lang="en-US" dirty="0"/>
+              <a:t>). </a:t>
+            </a:r>
+          </a:p>
+          <a:p>
+            <a:pPr lvl="1"/>
+            <a:r>
+              <a:rPr lang="en-US" dirty="0"/>
+              <a:t>This is called inferential statistics – using stats to predict. ML grows from this. </a:t>
             </a:r>
           </a:p>
           <a:p>
             <a:pPr lvl="1"/>
             <a:endParaRPr lang="en-US" dirty="0"/>
+          </a:p>
+          <a:p>
+            <a:r>
+              <a:rPr lang="en-US" dirty="0"/>
+              <a:t>The process is:</a:t>
+            </a:r>
+          </a:p>
+          <a:p>
+            <a:pPr lvl="1"/>
+            <a:r>
+              <a:rPr lang="en-US" dirty="0"/>
+              <a:t>Match our sample to an analytical distribution. </a:t>
+            </a:r>
+          </a:p>
+          <a:p>
+            <a:pPr lvl="1"/>
+            <a:r>
+              <a:rPr lang="en-US" dirty="0"/>
+              <a:t>Generate random values that fit that distribution. </a:t>
+            </a:r>
+          </a:p>
+          <a:p>
+            <a:pPr lvl="1"/>
+            <a:r>
+              <a:rPr lang="en-US" dirty="0"/>
+              <a:t>Use the aggregates of those trails along with error measures to draw inferences about the population. </a:t>
+            </a:r>
           </a:p>
         </p:txBody>
       </p:sp>
     </p:spTree>
     <p:extLst>
       <p:ext uri="{BB962C8B-B14F-4D97-AF65-F5344CB8AC3E}">
-        <p14:creationId xmlns:p14="http://schemas.microsoft.com/office/powerpoint/2010/main" val="2382552355"/>
+        <p14:creationId xmlns:p14="http://schemas.microsoft.com/office/powerpoint/2010/main" val="896942143"/>
       </p:ext>
     </p:extLst>
   </p:cSld>
@@ -5065,7 +5222,7 @@
           <p:cNvPr id="2" name="Title 1">
             <a:extLst>
               <a:ext uri="{FF2B5EF4-FFF2-40B4-BE49-F238E27FC236}">
-                <a16:creationId xmlns:a16="http://schemas.microsoft.com/office/drawing/2014/main" id="{520D80B7-4916-A592-E090-DF428874532D}"/>
+                <a16:creationId xmlns:a16="http://schemas.microsoft.com/office/drawing/2014/main" id="{500CB30F-8FC5-BA2F-DDAE-26A52B671961}"/>
               </a:ext>
             </a:extLst>
           </p:cNvPr>
@@ -5083,7 +5240,7 @@
           <a:p>
             <a:r>
               <a:rPr lang="en-US" dirty="0"/>
-              <a:t>Trials</a:t>
+              <a:t>Estimators</a:t>
             </a:r>
           </a:p>
         </p:txBody>
@@ -5093,7 +5250,7 @@
           <p:cNvPr id="3" name="Content Placeholder 2">
             <a:extLst>
               <a:ext uri="{FF2B5EF4-FFF2-40B4-BE49-F238E27FC236}">
-                <a16:creationId xmlns:a16="http://schemas.microsoft.com/office/drawing/2014/main" id="{7C90C60B-00BE-4416-FDD0-956323852785}"/>
+                <a16:creationId xmlns:a16="http://schemas.microsoft.com/office/drawing/2014/main" id="{8099297A-60F8-D213-DA79-218C928CEC26}"/>
               </a:ext>
             </a:extLst>
           </p:cNvPr>
@@ -5106,8 +5263,8 @@
         </p:nvSpPr>
         <p:spPr>
           <a:xfrm>
-            <a:off x="1451579" y="1853754"/>
-            <a:ext cx="9603275" cy="4335173"/>
+            <a:off x="1451579" y="2015732"/>
+            <a:ext cx="9603275" cy="4037749"/>
           </a:xfrm>
         </p:spPr>
         <p:txBody>
@@ -5116,56 +5273,32 @@
           <a:p>
             <a:r>
               <a:rPr lang="en-US" dirty="0"/>
-              <a:t>Once we have a matching distribution, we can make predictions via running trials. </a:t>
-            </a:r>
-          </a:p>
-          <a:p>
-            <a:r>
-              <a:rPr lang="en-US" dirty="0"/>
-              <a:t>Each trial has a few steps:</a:t>
+              <a:t>Estimators are a bigger thing in math-y stats than data analytics-y stats. </a:t>
+            </a:r>
+          </a:p>
+          <a:p>
+            <a:r>
+              <a:rPr lang="en-US" dirty="0"/>
+              <a:t>The estimator is basically the thing we use from the sample to estimate the population. </a:t>
+            </a:r>
+          </a:p>
+          <a:p>
+            <a:r>
+              <a:rPr lang="en-US" dirty="0"/>
+              <a:t>For normal distribution type of things, it’ll be the mean. </a:t>
+            </a:r>
+          </a:p>
+          <a:p>
+            <a:endParaRPr lang="en-US" dirty="0"/>
+          </a:p>
+          <a:p>
+            <a:r>
+              <a:rPr lang="en-US" dirty="0"/>
+              <a:t>In layman's terms, our estimators are what we use to create the analytical distributions from the empirical data. We want those to not introduce any error themselves. </a:t>
             </a:r>
           </a:p>
           <a:p>
             <a:pPr lvl="1"/>
-            <a:r>
-              <a:rPr lang="en-US" dirty="0"/>
-              <a:t>Create an analytical distribution from the estimator(s). </a:t>
-            </a:r>
-          </a:p>
-          <a:p>
-            <a:pPr lvl="1"/>
-            <a:r>
-              <a:rPr lang="en-US" dirty="0"/>
-              <a:t>Generate a bunch of values from that distribution. </a:t>
-            </a:r>
-          </a:p>
-          <a:p>
-            <a:pPr lvl="1"/>
-            <a:r>
-              <a:rPr lang="en-US" dirty="0"/>
-              <a:t>Calculate the (usually) mean of those generated values. </a:t>
-            </a:r>
-          </a:p>
-          <a:p>
-            <a:pPr lvl="1"/>
-            <a:r>
-              <a:rPr lang="en-US" dirty="0"/>
-              <a:t>Create a CDF of all of the means. </a:t>
-            </a:r>
-          </a:p>
-          <a:p>
-            <a:r>
-              <a:rPr lang="en-US" dirty="0"/>
-              <a:t>In effect, we are predicting what we expect the mean to be, based on the values from the empirical data, then making a distribution of those means. </a:t>
-            </a:r>
-          </a:p>
-          <a:p>
-            <a:r>
-              <a:rPr lang="en-US" dirty="0"/>
-              <a:t>Our estimate is the mean of those means – but how accurate is it…</a:t>
-            </a:r>
-          </a:p>
-          <a:p>
             <a:endParaRPr lang="en-US" dirty="0"/>
           </a:p>
         </p:txBody>
@@ -5173,7 +5306,7 @@
     </p:spTree>
     <p:extLst>
       <p:ext uri="{BB962C8B-B14F-4D97-AF65-F5344CB8AC3E}">
-        <p14:creationId xmlns:p14="http://schemas.microsoft.com/office/powerpoint/2010/main" val="671170779"/>
+        <p14:creationId xmlns:p14="http://schemas.microsoft.com/office/powerpoint/2010/main" val="2382552355"/>
       </p:ext>
     </p:extLst>
   </p:cSld>
@@ -5205,7 +5338,7 @@
           <p:cNvPr id="2" name="Title 1">
             <a:extLst>
               <a:ext uri="{FF2B5EF4-FFF2-40B4-BE49-F238E27FC236}">
-                <a16:creationId xmlns:a16="http://schemas.microsoft.com/office/drawing/2014/main" id="{9896FBC0-75DD-15F9-AD6A-66963F21B71B}"/>
+                <a16:creationId xmlns:a16="http://schemas.microsoft.com/office/drawing/2014/main" id="{520D80B7-4916-A592-E090-DF428874532D}"/>
               </a:ext>
             </a:extLst>
           </p:cNvPr>
@@ -5223,7 +5356,7 @@
           <a:p>
             <a:r>
               <a:rPr lang="en-US" dirty="0"/>
-              <a:t>Confidence Intervals </a:t>
+              <a:t>Trials</a:t>
             </a:r>
           </a:p>
         </p:txBody>
@@ -5233,7 +5366,7 @@
           <p:cNvPr id="3" name="Content Placeholder 2">
             <a:extLst>
               <a:ext uri="{FF2B5EF4-FFF2-40B4-BE49-F238E27FC236}">
-                <a16:creationId xmlns:a16="http://schemas.microsoft.com/office/drawing/2014/main" id="{FB031A34-1874-F77F-41E5-05B92E77ED95}"/>
+                <a16:creationId xmlns:a16="http://schemas.microsoft.com/office/drawing/2014/main" id="{7C90C60B-00BE-4416-FDD0-956323852785}"/>
               </a:ext>
             </a:extLst>
           </p:cNvPr>
@@ -5244,70 +5377,76 @@
             <p:ph idx="1"/>
           </p:nvPr>
         </p:nvSpPr>
-        <p:spPr/>
-        <p:txBody>
-          <a:bodyPr>
-            <a:normAutofit fontScale="92500" lnSpcReduction="10000"/>
-          </a:bodyPr>
-          <a:lstStyle/>
-          <a:p>
-            <a:r>
-              <a:rPr lang="en-US" dirty="0"/>
-              <a:t>Confidence intervals are something that we can derive from our CDF. </a:t>
+        <p:spPr>
+          <a:xfrm>
+            <a:off x="1451579" y="1853754"/>
+            <a:ext cx="9603275" cy="4335173"/>
+          </a:xfrm>
+        </p:spPr>
+        <p:txBody>
+          <a:bodyPr/>
+          <a:lstStyle/>
+          <a:p>
+            <a:r>
+              <a:rPr lang="en-US" dirty="0"/>
+              <a:t>Once we have a matching distribution, we can make predictions via running trials. </a:t>
+            </a:r>
+          </a:p>
+          <a:p>
+            <a:r>
+              <a:rPr lang="en-US" dirty="0"/>
+              <a:t>Each trial has a few steps:</a:t>
             </a:r>
           </a:p>
           <a:p>
             <a:pPr lvl="1"/>
             <a:r>
               <a:rPr lang="en-US" dirty="0"/>
-              <a:t>The CDF is a distribution of our predicted means. </a:t>
+              <a:t>Create an analytical distribution from the estimator(s). </a:t>
             </a:r>
           </a:p>
           <a:p>
             <a:pPr lvl="1"/>
             <a:r>
               <a:rPr lang="en-US" dirty="0"/>
-              <a:t>SE – Standard Error is the std of these means. </a:t>
-            </a:r>
-          </a:p>
-          <a:p>
-            <a:r>
-              <a:rPr lang="en-US" dirty="0"/>
-              <a:t>The CI is the range in which we can expect X% of values to fall:</a:t>
+              <a:t>Generate a bunch of values from that distribution. </a:t>
             </a:r>
           </a:p>
           <a:p>
             <a:pPr lvl="1"/>
             <a:r>
               <a:rPr lang="en-US" dirty="0"/>
-              <a:t>A 90% confidence interval means that 90% of the values fall between the two CI limits. </a:t>
-            </a:r>
-          </a:p>
-          <a:p>
-            <a:r>
-              <a:rPr lang="en-US" dirty="0"/>
-              <a:t>Alternative phrasing – “We are 90% confident that the value will lie within X amount of this value”. </a:t>
+              <a:t>Calculate the (usually) mean of those generated values. </a:t>
             </a:r>
           </a:p>
           <a:p>
             <a:pPr lvl="1"/>
             <a:r>
               <a:rPr lang="en-US" dirty="0"/>
-              <a:t>E.g. ”Poll is accurate to within +/- 2%, 19 times out of 20”.</a:t>
-            </a:r>
-          </a:p>
-          <a:p>
-            <a:r>
-              <a:rPr lang="en-US" dirty="0"/>
-              <a:t>Remember: those means that we generated in the trial are a distribution…</a:t>
-            </a:r>
+              <a:t>Create a CDF of all of the means. </a:t>
+            </a:r>
+          </a:p>
+          <a:p>
+            <a:r>
+              <a:rPr lang="en-US" dirty="0"/>
+              <a:t>In effect, we are predicting what we expect the mean to be, based on the values from the empirical data, then making a distribution of those means. </a:t>
+            </a:r>
+          </a:p>
+          <a:p>
+            <a:r>
+              <a:rPr lang="en-US" dirty="0"/>
+              <a:t>Our estimate is the mean of those means – but how accurate is it…</a:t>
+            </a:r>
+          </a:p>
+          <a:p>
+            <a:endParaRPr lang="en-US" dirty="0"/>
           </a:p>
         </p:txBody>
       </p:sp>
     </p:spTree>
     <p:extLst>
       <p:ext uri="{BB962C8B-B14F-4D97-AF65-F5344CB8AC3E}">
-        <p14:creationId xmlns:p14="http://schemas.microsoft.com/office/powerpoint/2010/main" val="4132692562"/>
+        <p14:creationId xmlns:p14="http://schemas.microsoft.com/office/powerpoint/2010/main" val="671170779"/>
       </p:ext>
     </p:extLst>
   </p:cSld>

--- a/reference_material/slides/016_Sampling_Estimation.pptx
+++ b/reference_material/slides/016_Sampling_Estimation.pptx
@@ -5,18 +5,38 @@
     <p:sldMasterId id="2147483660" r:id="rId1"/>
   </p:sldMasterIdLst>
   <p:sldIdLst>
-    <p:sldId id="266" r:id="rId2"/>
-    <p:sldId id="256" r:id="rId3"/>
-    <p:sldId id="257" r:id="rId4"/>
-    <p:sldId id="267" r:id="rId5"/>
-    <p:sldId id="265" r:id="rId6"/>
-    <p:sldId id="264" r:id="rId7"/>
-    <p:sldId id="258" r:id="rId8"/>
-    <p:sldId id="259" r:id="rId9"/>
-    <p:sldId id="260" r:id="rId10"/>
-    <p:sldId id="261" r:id="rId11"/>
-    <p:sldId id="262" r:id="rId12"/>
-    <p:sldId id="263" r:id="rId13"/>
+    <p:sldId id="268" r:id="rId2"/>
+    <p:sldId id="269" r:id="rId3"/>
+    <p:sldId id="266" r:id="rId4"/>
+    <p:sldId id="256" r:id="rId5"/>
+    <p:sldId id="257" r:id="rId6"/>
+    <p:sldId id="283" r:id="rId7"/>
+    <p:sldId id="267" r:id="rId8"/>
+    <p:sldId id="265" r:id="rId9"/>
+    <p:sldId id="264" r:id="rId10"/>
+    <p:sldId id="276" r:id="rId11"/>
+    <p:sldId id="277" r:id="rId12"/>
+    <p:sldId id="258" r:id="rId13"/>
+    <p:sldId id="259" r:id="rId14"/>
+    <p:sldId id="278" r:id="rId15"/>
+    <p:sldId id="279" r:id="rId16"/>
+    <p:sldId id="281" r:id="rId17"/>
+    <p:sldId id="280" r:id="rId18"/>
+    <p:sldId id="260" r:id="rId19"/>
+    <p:sldId id="270" r:id="rId20"/>
+    <p:sldId id="284" r:id="rId21"/>
+    <p:sldId id="285" r:id="rId22"/>
+    <p:sldId id="271" r:id="rId23"/>
+    <p:sldId id="261" r:id="rId24"/>
+    <p:sldId id="272" r:id="rId25"/>
+    <p:sldId id="262" r:id="rId26"/>
+    <p:sldId id="263" r:id="rId27"/>
+    <p:sldId id="273" r:id="rId28"/>
+    <p:sldId id="274" r:id="rId29"/>
+    <p:sldId id="282" r:id="rId30"/>
+    <p:sldId id="286" r:id="rId31"/>
+    <p:sldId id="287" r:id="rId32"/>
+    <p:sldId id="275" r:id="rId33"/>
   </p:sldIdLst>
   <p:sldSz cx="12192000" cy="6858000"/>
   <p:notesSz cx="6858000" cy="9144000"/>
@@ -3638,10 +3658,10 @@
       </p:grpSpPr>
       <p:sp>
         <p:nvSpPr>
-          <p:cNvPr id="2" name="Title 1">
+          <p:cNvPr id="6" name="Title 5">
             <a:extLst>
               <a:ext uri="{FF2B5EF4-FFF2-40B4-BE49-F238E27FC236}">
-                <a16:creationId xmlns:a16="http://schemas.microsoft.com/office/drawing/2014/main" id="{90815388-214D-1823-95C6-B755F8E12B31}"/>
+                <a16:creationId xmlns:a16="http://schemas.microsoft.com/office/drawing/2014/main" id="{B6D69360-4419-789A-A678-CD1817664027}"/>
               </a:ext>
             </a:extLst>
           </p:cNvPr>
@@ -3659,17 +3679,17 @@
           <a:p>
             <a:r>
               <a:rPr lang="en-US" dirty="0"/>
-              <a:t>Housekeeping</a:t>
-            </a:r>
-          </a:p>
-        </p:txBody>
-      </p:sp>
-      <p:sp>
-        <p:nvSpPr>
-          <p:cNvPr id="3" name="Content Placeholder 2">
+              <a:t>Analytical Distributions and You</a:t>
+            </a:r>
+          </a:p>
+        </p:txBody>
+      </p:sp>
+      <p:sp>
+        <p:nvSpPr>
+          <p:cNvPr id="7" name="Content Placeholder 6">
             <a:extLst>
               <a:ext uri="{FF2B5EF4-FFF2-40B4-BE49-F238E27FC236}">
-                <a16:creationId xmlns:a16="http://schemas.microsoft.com/office/drawing/2014/main" id="{D5780454-DD05-6B13-FD2D-0DA7C85BCAF3}"/>
+                <a16:creationId xmlns:a16="http://schemas.microsoft.com/office/drawing/2014/main" id="{DDABA2CC-B1D5-33BD-2F20-BBE7EEDB1638}"/>
               </a:ext>
             </a:extLst>
           </p:cNvPr>
@@ -3680,50 +3700,71 @@
             <p:ph idx="1"/>
           </p:nvPr>
         </p:nvSpPr>
-        <p:spPr/>
-        <p:txBody>
-          <a:bodyPr/>
-          <a:lstStyle/>
-          <a:p>
-            <a:r>
-              <a:rPr lang="en-US" dirty="0"/>
-              <a:t>Today:</a:t>
-            </a:r>
-          </a:p>
-          <a:p>
-            <a:pPr lvl="1"/>
-            <a:r>
-              <a:rPr lang="en-US" dirty="0"/>
-              <a:t>Notebook (012A) – I reordered a few things, so the numbers are different. </a:t>
-            </a:r>
-          </a:p>
-          <a:p>
-            <a:pPr lvl="1"/>
-            <a:r>
-              <a:rPr lang="en-US" dirty="0"/>
-              <a:t>Estimating populations from samples. </a:t>
-            </a:r>
-          </a:p>
-          <a:p>
-            <a:pPr lvl="1"/>
-            <a:r>
-              <a:rPr lang="en-US" dirty="0"/>
-              <a:t>Intro to inferential statistics. </a:t>
-            </a:r>
-          </a:p>
-          <a:p>
-            <a:pPr lvl="1"/>
-            <a:r>
-              <a:rPr lang="en-US" dirty="0"/>
-              <a:t>Types of errors from samples. </a:t>
-            </a:r>
+        <p:spPr>
+          <a:xfrm>
+            <a:off x="1451579" y="2015732"/>
+            <a:ext cx="9603275" cy="4037749"/>
+          </a:xfrm>
+        </p:spPr>
+        <p:txBody>
+          <a:bodyPr/>
+          <a:lstStyle/>
+          <a:p>
+            <a:r>
+              <a:rPr lang="en-US" dirty="0"/>
+              <a:t>We can use an analytical distribution to generalize. </a:t>
+            </a:r>
+          </a:p>
+          <a:p>
+            <a:r>
+              <a:rPr lang="en-US" dirty="0"/>
+              <a:t>From the book:</a:t>
+            </a:r>
+          </a:p>
+          <a:p>
+            <a:pPr lvl="1"/>
+            <a:r>
+              <a:rPr lang="en-US" dirty="0"/>
+              <a:t>Suppose we are measuring the weight of gorillas. </a:t>
+            </a:r>
+          </a:p>
+          <a:p>
+            <a:pPr lvl="1"/>
+            <a:r>
+              <a:rPr lang="en-US" dirty="0"/>
+              <a:t>We have a small sample of 9 (its expensive and hard to measure them). </a:t>
+            </a:r>
+          </a:p>
+          <a:p>
+            <a:pPr lvl="1"/>
+            <a:r>
+              <a:rPr lang="en-US" dirty="0"/>
+              <a:t>What if we got big gorillas randomly? Or small ones. </a:t>
+            </a:r>
+          </a:p>
+          <a:p>
+            <a:r>
+              <a:rPr lang="en-US" dirty="0"/>
+              <a:t>We don’t know the true mean and standard deviation for the population. </a:t>
+            </a:r>
+          </a:p>
+          <a:p>
+            <a:pPr lvl="1"/>
+            <a:r>
+              <a:rPr lang="en-US" dirty="0"/>
+              <a:t>We have estimates, captured from the sample. </a:t>
+            </a:r>
+          </a:p>
+          <a:p>
+            <a:pPr lvl="1"/>
+            <a:endParaRPr lang="en-US" dirty="0"/>
           </a:p>
         </p:txBody>
       </p:sp>
     </p:spTree>
     <p:extLst>
       <p:ext uri="{BB962C8B-B14F-4D97-AF65-F5344CB8AC3E}">
-        <p14:creationId xmlns:p14="http://schemas.microsoft.com/office/powerpoint/2010/main" val="1184903680"/>
+        <p14:creationId xmlns:p14="http://schemas.microsoft.com/office/powerpoint/2010/main" val="1909194062"/>
       </p:ext>
     </p:extLst>
   </p:cSld>
@@ -3755,6 +3796,2092 @@
           <p:cNvPr id="2" name="Title 1">
             <a:extLst>
               <a:ext uri="{FF2B5EF4-FFF2-40B4-BE49-F238E27FC236}">
+                <a16:creationId xmlns:a16="http://schemas.microsoft.com/office/drawing/2014/main" id="{2DEE27B1-EB75-7B01-8698-2EDCEBC7099D}"/>
+              </a:ext>
+            </a:extLst>
+          </p:cNvPr>
+          <p:cNvSpPr>
+            <a:spLocks noGrp="1"/>
+          </p:cNvSpPr>
+          <p:nvPr>
+            <p:ph type="title"/>
+          </p:nvPr>
+        </p:nvSpPr>
+        <p:spPr/>
+        <p:txBody>
+          <a:bodyPr/>
+          <a:lstStyle/>
+          <a:p>
+            <a:r>
+              <a:rPr lang="en-US" dirty="0"/>
+              <a:t>Sampling error</a:t>
+            </a:r>
+          </a:p>
+        </p:txBody>
+      </p:sp>
+      <p:sp>
+        <p:nvSpPr>
+          <p:cNvPr id="3" name="Content Placeholder 2">
+            <a:extLst>
+              <a:ext uri="{FF2B5EF4-FFF2-40B4-BE49-F238E27FC236}">
+                <a16:creationId xmlns:a16="http://schemas.microsoft.com/office/drawing/2014/main" id="{E1BA4FD4-1FD7-87DA-E1F0-A16EEDA877EC}"/>
+              </a:ext>
+            </a:extLst>
+          </p:cNvPr>
+          <p:cNvSpPr>
+            <a:spLocks noGrp="1"/>
+          </p:cNvSpPr>
+          <p:nvPr>
+            <p:ph idx="1"/>
+          </p:nvPr>
+        </p:nvSpPr>
+        <p:spPr>
+          <a:xfrm>
+            <a:off x="1451579" y="2015732"/>
+            <a:ext cx="9603275" cy="4037749"/>
+          </a:xfrm>
+        </p:spPr>
+        <p:txBody>
+          <a:bodyPr/>
+          <a:lstStyle/>
+          <a:p>
+            <a:r>
+              <a:rPr lang="en-US" dirty="0"/>
+              <a:t>Any time we deal with sampling and estimation, we introduce errors. </a:t>
+            </a:r>
+          </a:p>
+          <a:p>
+            <a:pPr lvl="1"/>
+            <a:r>
+              <a:rPr lang="en-US" dirty="0"/>
+              <a:t>We can’t measure perfectly, our random selection isn’t perfectly representative, </a:t>
+            </a:r>
+            <a:r>
+              <a:rPr lang="en-US" dirty="0" err="1"/>
+              <a:t>etc</a:t>
+            </a:r>
+            <a:r>
+              <a:rPr lang="en-US" dirty="0"/>
+              <a:t>…</a:t>
+            </a:r>
+          </a:p>
+          <a:p>
+            <a:pPr lvl="1"/>
+            <a:r>
+              <a:rPr lang="en-US" dirty="0"/>
+              <a:t>These errors can stem from these sources. </a:t>
+            </a:r>
+          </a:p>
+          <a:p>
+            <a:r>
+              <a:rPr lang="en-US" dirty="0"/>
+              <a:t>Our estimations are better with less error. </a:t>
+            </a:r>
+          </a:p>
+          <a:p>
+            <a:pPr lvl="1"/>
+            <a:r>
+              <a:rPr lang="en-US" dirty="0"/>
+              <a:t>We can’t mitigate or measure measurement error at our level. </a:t>
+            </a:r>
+          </a:p>
+          <a:p>
+            <a:pPr lvl="1"/>
+            <a:r>
+              <a:rPr lang="en-US" dirty="0"/>
+              <a:t>We can estimate error from sampling. </a:t>
+            </a:r>
+          </a:p>
+        </p:txBody>
+      </p:sp>
+    </p:spTree>
+    <p:extLst>
+      <p:ext uri="{BB962C8B-B14F-4D97-AF65-F5344CB8AC3E}">
+        <p14:creationId xmlns:p14="http://schemas.microsoft.com/office/powerpoint/2010/main" val="1304994676"/>
+      </p:ext>
+    </p:extLst>
+  </p:cSld>
+  <p:clrMapOvr>
+    <a:masterClrMapping/>
+  </p:clrMapOvr>
+</p:sld>
+</file>
+
+<file path=ppt/slides/slide11.xml><?xml version="1.0" encoding="utf-8"?>
+<p:sld xmlns:a="http://schemas.openxmlformats.org/drawingml/2006/main" xmlns:r="http://schemas.openxmlformats.org/officeDocument/2006/relationships" xmlns:p="http://schemas.openxmlformats.org/presentationml/2006/main">
+  <p:cSld>
+    <p:spTree>
+      <p:nvGrpSpPr>
+        <p:cNvPr id="1" name=""/>
+        <p:cNvGrpSpPr/>
+        <p:nvPr/>
+      </p:nvGrpSpPr>
+      <p:grpSpPr>
+        <a:xfrm>
+          <a:off x="0" y="0"/>
+          <a:ext cx="0" cy="0"/>
+          <a:chOff x="0" y="0"/>
+          <a:chExt cx="0" cy="0"/>
+        </a:xfrm>
+      </p:grpSpPr>
+      <p:sp>
+        <p:nvSpPr>
+          <p:cNvPr id="2" name="Title 1">
+            <a:extLst>
+              <a:ext uri="{FF2B5EF4-FFF2-40B4-BE49-F238E27FC236}">
+                <a16:creationId xmlns:a16="http://schemas.microsoft.com/office/drawing/2014/main" id="{D06150CB-159C-FC4A-39D8-3AA73160396A}"/>
+              </a:ext>
+            </a:extLst>
+          </p:cNvPr>
+          <p:cNvSpPr>
+            <a:spLocks noGrp="1"/>
+          </p:cNvSpPr>
+          <p:nvPr>
+            <p:ph type="title"/>
+          </p:nvPr>
+        </p:nvSpPr>
+        <p:spPr/>
+        <p:txBody>
+          <a:bodyPr/>
+          <a:lstStyle/>
+          <a:p>
+            <a:r>
+              <a:rPr lang="en-US" dirty="0"/>
+              <a:t>Finally, inferential Statistics!</a:t>
+            </a:r>
+          </a:p>
+        </p:txBody>
+      </p:sp>
+      <p:sp>
+        <p:nvSpPr>
+          <p:cNvPr id="3" name="Content Placeholder 2">
+            <a:extLst>
+              <a:ext uri="{FF2B5EF4-FFF2-40B4-BE49-F238E27FC236}">
+                <a16:creationId xmlns:a16="http://schemas.microsoft.com/office/drawing/2014/main" id="{7B8108AE-CC9D-FF8E-6E10-A1CA040DE1E8}"/>
+              </a:ext>
+            </a:extLst>
+          </p:cNvPr>
+          <p:cNvSpPr>
+            <a:spLocks noGrp="1"/>
+          </p:cNvSpPr>
+          <p:nvPr>
+            <p:ph idx="1"/>
+          </p:nvPr>
+        </p:nvSpPr>
+        <p:spPr>
+          <a:xfrm>
+            <a:off x="1451579" y="1932496"/>
+            <a:ext cx="9603275" cy="3533850"/>
+          </a:xfrm>
+        </p:spPr>
+        <p:txBody>
+          <a:bodyPr/>
+          <a:lstStyle/>
+          <a:p>
+            <a:r>
+              <a:rPr lang="en-US" dirty="0"/>
+              <a:t>Our sample tells us something. </a:t>
+            </a:r>
+          </a:p>
+          <a:p>
+            <a:r>
+              <a:rPr lang="en-US" dirty="0"/>
+              <a:t>We use that something to generate a model of expectation. </a:t>
+            </a:r>
+          </a:p>
+          <a:p>
+            <a:pPr lvl="1"/>
+            <a:r>
+              <a:rPr lang="en-US" dirty="0"/>
+              <a:t>I.e. if we generate new data it will follow that pattern. </a:t>
+            </a:r>
+          </a:p>
+          <a:p>
+            <a:r>
+              <a:rPr lang="en-US" dirty="0"/>
+              <a:t>We measure our confidence in those expectations. </a:t>
+            </a:r>
+          </a:p>
+        </p:txBody>
+      </p:sp>
+    </p:spTree>
+    <p:extLst>
+      <p:ext uri="{BB962C8B-B14F-4D97-AF65-F5344CB8AC3E}">
+        <p14:creationId xmlns:p14="http://schemas.microsoft.com/office/powerpoint/2010/main" val="3172312666"/>
+      </p:ext>
+    </p:extLst>
+  </p:cSld>
+  <p:clrMapOvr>
+    <a:masterClrMapping/>
+  </p:clrMapOvr>
+</p:sld>
+</file>
+
+<file path=ppt/slides/slide12.xml><?xml version="1.0" encoding="utf-8"?>
+<p:sld xmlns:a="http://schemas.openxmlformats.org/drawingml/2006/main" xmlns:r="http://schemas.openxmlformats.org/officeDocument/2006/relationships" xmlns:p="http://schemas.openxmlformats.org/presentationml/2006/main">
+  <p:cSld>
+    <p:spTree>
+      <p:nvGrpSpPr>
+        <p:cNvPr id="1" name=""/>
+        <p:cNvGrpSpPr/>
+        <p:nvPr/>
+      </p:nvGrpSpPr>
+      <p:grpSpPr>
+        <a:xfrm>
+          <a:off x="0" y="0"/>
+          <a:ext cx="0" cy="0"/>
+          <a:chOff x="0" y="0"/>
+          <a:chExt cx="0" cy="0"/>
+        </a:xfrm>
+      </p:grpSpPr>
+      <p:sp>
+        <p:nvSpPr>
+          <p:cNvPr id="2" name="Title 1">
+            <a:extLst>
+              <a:ext uri="{FF2B5EF4-FFF2-40B4-BE49-F238E27FC236}">
+                <a16:creationId xmlns:a16="http://schemas.microsoft.com/office/drawing/2014/main" id="{5A95FECA-0DE7-E666-AB37-57E9018B6DFC}"/>
+              </a:ext>
+            </a:extLst>
+          </p:cNvPr>
+          <p:cNvSpPr>
+            <a:spLocks noGrp="1"/>
+          </p:cNvSpPr>
+          <p:nvPr>
+            <p:ph type="title"/>
+          </p:nvPr>
+        </p:nvSpPr>
+        <p:spPr/>
+        <p:txBody>
+          <a:bodyPr/>
+          <a:lstStyle/>
+          <a:p>
+            <a:r>
+              <a:rPr lang="en-US" dirty="0"/>
+              <a:t>Estimation</a:t>
+            </a:r>
+          </a:p>
+        </p:txBody>
+      </p:sp>
+      <p:sp>
+        <p:nvSpPr>
+          <p:cNvPr id="3" name="Content Placeholder 2">
+            <a:extLst>
+              <a:ext uri="{FF2B5EF4-FFF2-40B4-BE49-F238E27FC236}">
+                <a16:creationId xmlns:a16="http://schemas.microsoft.com/office/drawing/2014/main" id="{B215A6CA-60D9-2612-A200-6FAA0E9D7B6C}"/>
+              </a:ext>
+            </a:extLst>
+          </p:cNvPr>
+          <p:cNvSpPr>
+            <a:spLocks noGrp="1"/>
+          </p:cNvSpPr>
+          <p:nvPr>
+            <p:ph idx="1"/>
+          </p:nvPr>
+        </p:nvSpPr>
+        <p:spPr>
+          <a:xfrm>
+            <a:off x="1451579" y="2015732"/>
+            <a:ext cx="9603275" cy="4037749"/>
+          </a:xfrm>
+        </p:spPr>
+        <p:txBody>
+          <a:bodyPr>
+            <a:normAutofit/>
+          </a:bodyPr>
+          <a:lstStyle/>
+          <a:p>
+            <a:r>
+              <a:rPr lang="en-US" dirty="0"/>
+              <a:t>We can use a sample to draw inferences about the population as a whole:</a:t>
+            </a:r>
+          </a:p>
+          <a:p>
+            <a:pPr lvl="1"/>
+            <a:r>
+              <a:rPr lang="en-US" dirty="0"/>
+              <a:t>This is what statisticians do with a census or pollsters with polls (soon-</a:t>
+            </a:r>
+            <a:r>
+              <a:rPr lang="en-US" dirty="0" err="1"/>
+              <a:t>ish</a:t>
+            </a:r>
+            <a:r>
+              <a:rPr lang="en-US" dirty="0"/>
+              <a:t>). </a:t>
+            </a:r>
+          </a:p>
+          <a:p>
+            <a:pPr lvl="1"/>
+            <a:r>
+              <a:rPr lang="en-US" dirty="0"/>
+              <a:t>This is called inferential statistics – using stats to predict. ML grows from this. </a:t>
+            </a:r>
+          </a:p>
+          <a:p>
+            <a:r>
+              <a:rPr lang="en-US" dirty="0"/>
+              <a:t>The process is:</a:t>
+            </a:r>
+          </a:p>
+          <a:p>
+            <a:pPr lvl="1"/>
+            <a:r>
+              <a:rPr lang="en-US" dirty="0"/>
+              <a:t>Match our sample to an analytical distribution. </a:t>
+            </a:r>
+          </a:p>
+          <a:p>
+            <a:pPr lvl="1"/>
+            <a:r>
+              <a:rPr lang="en-US" dirty="0"/>
+              <a:t>Generate random values that fit that distribution in many trials. </a:t>
+            </a:r>
+          </a:p>
+          <a:p>
+            <a:pPr lvl="1"/>
+            <a:r>
+              <a:rPr lang="en-US" dirty="0"/>
+              <a:t>Use the aggregates of those trails along with error measures to draw inferences about the population. </a:t>
+            </a:r>
+          </a:p>
+        </p:txBody>
+      </p:sp>
+    </p:spTree>
+    <p:extLst>
+      <p:ext uri="{BB962C8B-B14F-4D97-AF65-F5344CB8AC3E}">
+        <p14:creationId xmlns:p14="http://schemas.microsoft.com/office/powerpoint/2010/main" val="896942143"/>
+      </p:ext>
+    </p:extLst>
+  </p:cSld>
+  <p:clrMapOvr>
+    <a:masterClrMapping/>
+  </p:clrMapOvr>
+</p:sld>
+</file>
+
+<file path=ppt/slides/slide13.xml><?xml version="1.0" encoding="utf-8"?>
+<p:sld xmlns:a="http://schemas.openxmlformats.org/drawingml/2006/main" xmlns:r="http://schemas.openxmlformats.org/officeDocument/2006/relationships" xmlns:p="http://schemas.openxmlformats.org/presentationml/2006/main">
+  <p:cSld>
+    <p:spTree>
+      <p:nvGrpSpPr>
+        <p:cNvPr id="1" name=""/>
+        <p:cNvGrpSpPr/>
+        <p:nvPr/>
+      </p:nvGrpSpPr>
+      <p:grpSpPr>
+        <a:xfrm>
+          <a:off x="0" y="0"/>
+          <a:ext cx="0" cy="0"/>
+          <a:chOff x="0" y="0"/>
+          <a:chExt cx="0" cy="0"/>
+        </a:xfrm>
+      </p:grpSpPr>
+      <p:sp>
+        <p:nvSpPr>
+          <p:cNvPr id="2" name="Title 1">
+            <a:extLst>
+              <a:ext uri="{FF2B5EF4-FFF2-40B4-BE49-F238E27FC236}">
+                <a16:creationId xmlns:a16="http://schemas.microsoft.com/office/drawing/2014/main" id="{500CB30F-8FC5-BA2F-DDAE-26A52B671961}"/>
+              </a:ext>
+            </a:extLst>
+          </p:cNvPr>
+          <p:cNvSpPr>
+            <a:spLocks noGrp="1"/>
+          </p:cNvSpPr>
+          <p:nvPr>
+            <p:ph type="title"/>
+          </p:nvPr>
+        </p:nvSpPr>
+        <p:spPr/>
+        <p:txBody>
+          <a:bodyPr/>
+          <a:lstStyle/>
+          <a:p>
+            <a:r>
+              <a:rPr lang="en-US" dirty="0"/>
+              <a:t>Estimators</a:t>
+            </a:r>
+          </a:p>
+        </p:txBody>
+      </p:sp>
+      <p:sp>
+        <p:nvSpPr>
+          <p:cNvPr id="3" name="Content Placeholder 2">
+            <a:extLst>
+              <a:ext uri="{FF2B5EF4-FFF2-40B4-BE49-F238E27FC236}">
+                <a16:creationId xmlns:a16="http://schemas.microsoft.com/office/drawing/2014/main" id="{8099297A-60F8-D213-DA79-218C928CEC26}"/>
+              </a:ext>
+            </a:extLst>
+          </p:cNvPr>
+          <p:cNvSpPr>
+            <a:spLocks noGrp="1"/>
+          </p:cNvSpPr>
+          <p:nvPr>
+            <p:ph idx="1"/>
+          </p:nvPr>
+        </p:nvSpPr>
+        <p:spPr>
+          <a:xfrm>
+            <a:off x="1451579" y="1932496"/>
+            <a:ext cx="9603275" cy="4120986"/>
+          </a:xfrm>
+        </p:spPr>
+        <p:txBody>
+          <a:bodyPr/>
+          <a:lstStyle/>
+          <a:p>
+            <a:r>
+              <a:rPr lang="en-US" dirty="0"/>
+              <a:t>Estimators are what we capture from a sample to make a model. </a:t>
+            </a:r>
+          </a:p>
+          <a:p>
+            <a:r>
+              <a:rPr lang="en-US" dirty="0"/>
+              <a:t>Estimators are a bigger thing in math-y stats than data analytics-y stats. </a:t>
+            </a:r>
+          </a:p>
+          <a:p>
+            <a:r>
+              <a:rPr lang="en-US" dirty="0"/>
+              <a:t>The estimator is basically the thing we use from the sample to estimate the population. </a:t>
+            </a:r>
+          </a:p>
+          <a:p>
+            <a:r>
+              <a:rPr lang="en-US" dirty="0"/>
+              <a:t>For normal distribution type of things, it’ll be the mean and standard deviation. </a:t>
+            </a:r>
+          </a:p>
+          <a:p>
+            <a:endParaRPr lang="en-US" dirty="0"/>
+          </a:p>
+          <a:p>
+            <a:r>
+              <a:rPr lang="en-US" dirty="0"/>
+              <a:t>In layman's terms, our estimators are what we use to create the analytical distributions from the empirical data. We want those to not introduce any error themselves. </a:t>
+            </a:r>
+          </a:p>
+          <a:p>
+            <a:pPr lvl="1"/>
+            <a:endParaRPr lang="en-US" dirty="0"/>
+          </a:p>
+        </p:txBody>
+      </p:sp>
+    </p:spTree>
+    <p:extLst>
+      <p:ext uri="{BB962C8B-B14F-4D97-AF65-F5344CB8AC3E}">
+        <p14:creationId xmlns:p14="http://schemas.microsoft.com/office/powerpoint/2010/main" val="2382552355"/>
+      </p:ext>
+    </p:extLst>
+  </p:cSld>
+  <p:clrMapOvr>
+    <a:masterClrMapping/>
+  </p:clrMapOvr>
+</p:sld>
+</file>
+
+<file path=ppt/slides/slide14.xml><?xml version="1.0" encoding="utf-8"?>
+<p:sld xmlns:a="http://schemas.openxmlformats.org/drawingml/2006/main" xmlns:r="http://schemas.openxmlformats.org/officeDocument/2006/relationships" xmlns:p="http://schemas.openxmlformats.org/presentationml/2006/main">
+  <p:cSld>
+    <p:spTree>
+      <p:nvGrpSpPr>
+        <p:cNvPr id="1" name=""/>
+        <p:cNvGrpSpPr/>
+        <p:nvPr/>
+      </p:nvGrpSpPr>
+      <p:grpSpPr>
+        <a:xfrm>
+          <a:off x="0" y="0"/>
+          <a:ext cx="0" cy="0"/>
+          <a:chOff x="0" y="0"/>
+          <a:chExt cx="0" cy="0"/>
+        </a:xfrm>
+      </p:grpSpPr>
+      <p:sp>
+        <p:nvSpPr>
+          <p:cNvPr id="2" name="Title 1">
+            <a:extLst>
+              <a:ext uri="{FF2B5EF4-FFF2-40B4-BE49-F238E27FC236}">
+                <a16:creationId xmlns:a16="http://schemas.microsoft.com/office/drawing/2014/main" id="{14667568-C0E5-5A5D-4C7A-884A2C2D6226}"/>
+              </a:ext>
+            </a:extLst>
+          </p:cNvPr>
+          <p:cNvSpPr>
+            <a:spLocks noGrp="1"/>
+          </p:cNvSpPr>
+          <p:nvPr>
+            <p:ph type="title"/>
+          </p:nvPr>
+        </p:nvSpPr>
+        <p:spPr/>
+        <p:txBody>
+          <a:bodyPr/>
+          <a:lstStyle/>
+          <a:p>
+            <a:r>
+              <a:rPr lang="en-US" dirty="0"/>
+              <a:t>Simple Estimator Error</a:t>
+            </a:r>
+          </a:p>
+        </p:txBody>
+      </p:sp>
+      <p:sp>
+        <p:nvSpPr>
+          <p:cNvPr id="3" name="Content Placeholder 2">
+            <a:extLst>
+              <a:ext uri="{FF2B5EF4-FFF2-40B4-BE49-F238E27FC236}">
+                <a16:creationId xmlns:a16="http://schemas.microsoft.com/office/drawing/2014/main" id="{13042435-9091-2374-AA83-37F38C8910F8}"/>
+              </a:ext>
+            </a:extLst>
+          </p:cNvPr>
+          <p:cNvSpPr>
+            <a:spLocks noGrp="1"/>
+          </p:cNvSpPr>
+          <p:nvPr>
+            <p:ph idx="1"/>
+          </p:nvPr>
+        </p:nvSpPr>
+        <p:spPr>
+          <a:xfrm>
+            <a:off x="1451579" y="1853754"/>
+            <a:ext cx="9603275" cy="4199727"/>
+          </a:xfrm>
+        </p:spPr>
+        <p:txBody>
+          <a:bodyPr/>
+          <a:lstStyle/>
+          <a:p>
+            <a:r>
+              <a:rPr lang="en-US" dirty="0"/>
+              <a:t>We want estimators that are unbiased – or don’t introduce error. </a:t>
+            </a:r>
+          </a:p>
+          <a:p>
+            <a:pPr lvl="1"/>
+            <a:r>
+              <a:rPr lang="en-US" dirty="0"/>
+              <a:t>There is error in our generalization, but these don’t add to it. </a:t>
+            </a:r>
+          </a:p>
+          <a:p>
+            <a:r>
+              <a:rPr lang="en-US" dirty="0"/>
+              <a:t>For example, mean in a normal distribution. </a:t>
+            </a:r>
+          </a:p>
+          <a:p>
+            <a:pPr lvl="1"/>
+            <a:r>
+              <a:rPr lang="en-US" dirty="0"/>
+              <a:t>The mean is an estimator used to create the analytical distribution. </a:t>
+            </a:r>
+          </a:p>
+          <a:p>
+            <a:pPr lvl="1"/>
+            <a:r>
+              <a:rPr lang="en-US" dirty="0"/>
+              <a:t>If you generate </a:t>
+            </a:r>
+            <a:r>
+              <a:rPr lang="en-US" dirty="0" err="1"/>
+              <a:t>dist</a:t>
+            </a:r>
+            <a:r>
+              <a:rPr lang="en-US" dirty="0"/>
+              <a:t> data, we expect the mean of each new sample to have similar mean. </a:t>
+            </a:r>
+          </a:p>
+          <a:p>
+            <a:pPr lvl="1"/>
+            <a:r>
+              <a:rPr lang="en-US" dirty="0"/>
+              <a:t>Some will be a bit larger, some a bit smaller, but most very close. </a:t>
+            </a:r>
+          </a:p>
+          <a:p>
+            <a:pPr lvl="1"/>
+            <a:r>
+              <a:rPr lang="en-US" dirty="0"/>
+              <a:t>The estimator is not introducing error – the average mean of sample matches empirical. </a:t>
+            </a:r>
+          </a:p>
+          <a:p>
+            <a:r>
+              <a:rPr lang="en-US" dirty="0"/>
+              <a:t>In biased estimators, we see a drift – new random samples aren’t centered. </a:t>
+            </a:r>
+          </a:p>
+        </p:txBody>
+      </p:sp>
+    </p:spTree>
+    <p:extLst>
+      <p:ext uri="{BB962C8B-B14F-4D97-AF65-F5344CB8AC3E}">
+        <p14:creationId xmlns:p14="http://schemas.microsoft.com/office/powerpoint/2010/main" val="2171499067"/>
+      </p:ext>
+    </p:extLst>
+  </p:cSld>
+  <p:clrMapOvr>
+    <a:masterClrMapping/>
+  </p:clrMapOvr>
+</p:sld>
+</file>
+
+<file path=ppt/slides/slide15.xml><?xml version="1.0" encoding="utf-8"?>
+<p:sld xmlns:a="http://schemas.openxmlformats.org/drawingml/2006/main" xmlns:r="http://schemas.openxmlformats.org/officeDocument/2006/relationships" xmlns:p="http://schemas.openxmlformats.org/presentationml/2006/main">
+  <p:cSld>
+    <p:spTree>
+      <p:nvGrpSpPr>
+        <p:cNvPr id="1" name=""/>
+        <p:cNvGrpSpPr/>
+        <p:nvPr/>
+      </p:nvGrpSpPr>
+      <p:grpSpPr>
+        <a:xfrm>
+          <a:off x="0" y="0"/>
+          <a:ext cx="0" cy="0"/>
+          <a:chOff x="0" y="0"/>
+          <a:chExt cx="0" cy="0"/>
+        </a:xfrm>
+      </p:grpSpPr>
+      <p:sp>
+        <p:nvSpPr>
+          <p:cNvPr id="2" name="Title 1">
+            <a:extLst>
+              <a:ext uri="{FF2B5EF4-FFF2-40B4-BE49-F238E27FC236}">
+                <a16:creationId xmlns:a16="http://schemas.microsoft.com/office/drawing/2014/main" id="{99BECD01-B64A-926A-2F7B-D78AB198B8F6}"/>
+              </a:ext>
+            </a:extLst>
+          </p:cNvPr>
+          <p:cNvSpPr>
+            <a:spLocks noGrp="1"/>
+          </p:cNvSpPr>
+          <p:nvPr>
+            <p:ph type="title"/>
+          </p:nvPr>
+        </p:nvSpPr>
+        <p:spPr/>
+        <p:txBody>
+          <a:bodyPr/>
+          <a:lstStyle/>
+          <a:p>
+            <a:r>
+              <a:rPr lang="en-US" dirty="0"/>
+              <a:t>Avoiding Bias</a:t>
+            </a:r>
+          </a:p>
+        </p:txBody>
+      </p:sp>
+      <p:sp>
+        <p:nvSpPr>
+          <p:cNvPr id="3" name="Content Placeholder 2">
+            <a:extLst>
+              <a:ext uri="{FF2B5EF4-FFF2-40B4-BE49-F238E27FC236}">
+                <a16:creationId xmlns:a16="http://schemas.microsoft.com/office/drawing/2014/main" id="{294FCE91-DE9B-9F98-BF49-16A23C3CF64D}"/>
+              </a:ext>
+            </a:extLst>
+          </p:cNvPr>
+          <p:cNvSpPr>
+            <a:spLocks noGrp="1"/>
+          </p:cNvSpPr>
+          <p:nvPr>
+            <p:ph idx="1"/>
+          </p:nvPr>
+        </p:nvSpPr>
+        <p:spPr>
+          <a:xfrm>
+            <a:off x="7531099" y="1853754"/>
+            <a:ext cx="4581071" cy="4147903"/>
+          </a:xfrm>
+        </p:spPr>
+        <p:txBody>
+          <a:bodyPr/>
+          <a:lstStyle/>
+          <a:p>
+            <a:r>
+              <a:rPr lang="en-US" dirty="0"/>
+              <a:t>If an estimator is biased, the samples won’t match empirical. </a:t>
+            </a:r>
+          </a:p>
+          <a:p>
+            <a:pPr lvl="1"/>
+            <a:r>
+              <a:rPr lang="en-US" dirty="0"/>
+              <a:t>Get systemic errors higher or lower. </a:t>
+            </a:r>
+          </a:p>
+          <a:p>
+            <a:r>
+              <a:rPr lang="en-US" dirty="0"/>
+              <a:t>We don’t really need to know the details of this much. </a:t>
+            </a:r>
+          </a:p>
+          <a:p>
+            <a:pPr lvl="1"/>
+            <a:r>
+              <a:rPr lang="en-US" dirty="0"/>
+              <a:t>In stat-y predictions this is more important. </a:t>
+            </a:r>
+          </a:p>
+          <a:p>
+            <a:pPr lvl="1"/>
+            <a:r>
+              <a:rPr lang="en-US" dirty="0"/>
+              <a:t>With DS tools, we can avoid. </a:t>
+            </a:r>
+          </a:p>
+        </p:txBody>
+      </p:sp>
+      <p:pic>
+        <p:nvPicPr>
+          <p:cNvPr id="4098" name="Picture 2" descr="Unbiasedness - Statistics for Data Science &amp; Analytics - Made Easy 2025">
+            <a:extLst>
+              <a:ext uri="{FF2B5EF4-FFF2-40B4-BE49-F238E27FC236}">
+                <a16:creationId xmlns:a16="http://schemas.microsoft.com/office/drawing/2014/main" id="{C508EE0F-D34C-8546-3CE8-D10034A3E3D0}"/>
+              </a:ext>
+            </a:extLst>
+          </p:cNvPr>
+          <p:cNvPicPr>
+            <a:picLocks noChangeAspect="1" noChangeArrowheads="1"/>
+          </p:cNvPicPr>
+          <p:nvPr/>
+        </p:nvPicPr>
+        <p:blipFill>
+          <a:blip r:embed="rId2">
+            <a:extLst>
+              <a:ext uri="{28A0092B-C50C-407E-A947-70E740481C1C}">
+                <a14:useLocalDpi xmlns:a14="http://schemas.microsoft.com/office/drawing/2010/main" val="0"/>
+              </a:ext>
+            </a:extLst>
+          </a:blip>
+          <a:srcRect/>
+          <a:stretch>
+            <a:fillRect/>
+          </a:stretch>
+        </p:blipFill>
+        <p:spPr bwMode="auto">
+          <a:xfrm>
+            <a:off x="0" y="2122714"/>
+            <a:ext cx="7531100" cy="3048000"/>
+          </a:xfrm>
+          <a:prstGeom prst="rect">
+            <a:avLst/>
+          </a:prstGeom>
+          <a:noFill/>
+          <a:extLst>
+            <a:ext uri="{909E8E84-426E-40DD-AFC4-6F175D3DCCD1}">
+              <a14:hiddenFill xmlns:a14="http://schemas.microsoft.com/office/drawing/2010/main">
+                <a:solidFill>
+                  <a:srgbClr val="FFFFFF"/>
+                </a:solidFill>
+              </a14:hiddenFill>
+            </a:ext>
+          </a:extLst>
+        </p:spPr>
+      </p:pic>
+    </p:spTree>
+    <p:extLst>
+      <p:ext uri="{BB962C8B-B14F-4D97-AF65-F5344CB8AC3E}">
+        <p14:creationId xmlns:p14="http://schemas.microsoft.com/office/powerpoint/2010/main" val="3450958043"/>
+      </p:ext>
+    </p:extLst>
+  </p:cSld>
+  <p:clrMapOvr>
+    <a:masterClrMapping/>
+  </p:clrMapOvr>
+</p:sld>
+</file>
+
+<file path=ppt/slides/slide16.xml><?xml version="1.0" encoding="utf-8"?>
+<p:sld xmlns:a="http://schemas.openxmlformats.org/drawingml/2006/main" xmlns:r="http://schemas.openxmlformats.org/officeDocument/2006/relationships" xmlns:p="http://schemas.openxmlformats.org/presentationml/2006/main">
+  <p:cSld>
+    <p:spTree>
+      <p:nvGrpSpPr>
+        <p:cNvPr id="1" name=""/>
+        <p:cNvGrpSpPr/>
+        <p:nvPr/>
+      </p:nvGrpSpPr>
+      <p:grpSpPr>
+        <a:xfrm>
+          <a:off x="0" y="0"/>
+          <a:ext cx="0" cy="0"/>
+          <a:chOff x="0" y="0"/>
+          <a:chExt cx="0" cy="0"/>
+        </a:xfrm>
+      </p:grpSpPr>
+      <p:sp>
+        <p:nvSpPr>
+          <p:cNvPr id="2" name="Title 1">
+            <a:extLst>
+              <a:ext uri="{FF2B5EF4-FFF2-40B4-BE49-F238E27FC236}">
+                <a16:creationId xmlns:a16="http://schemas.microsoft.com/office/drawing/2014/main" id="{9E68711B-B191-B1E6-28D0-48EF9703FCCC}"/>
+              </a:ext>
+            </a:extLst>
+          </p:cNvPr>
+          <p:cNvSpPr>
+            <a:spLocks noGrp="1"/>
+          </p:cNvSpPr>
+          <p:nvPr>
+            <p:ph type="title"/>
+          </p:nvPr>
+        </p:nvSpPr>
+        <p:spPr/>
+        <p:txBody>
+          <a:bodyPr/>
+          <a:lstStyle/>
+          <a:p>
+            <a:r>
+              <a:rPr lang="en-US" dirty="0"/>
+              <a:t>Odd Estimators</a:t>
+            </a:r>
+          </a:p>
+        </p:txBody>
+      </p:sp>
+      <p:sp>
+        <p:nvSpPr>
+          <p:cNvPr id="3" name="Content Placeholder 2">
+            <a:extLst>
+              <a:ext uri="{FF2B5EF4-FFF2-40B4-BE49-F238E27FC236}">
+                <a16:creationId xmlns:a16="http://schemas.microsoft.com/office/drawing/2014/main" id="{D18FEE9F-4DD2-9B15-D3AB-6EF8F0DCBF01}"/>
+              </a:ext>
+            </a:extLst>
+          </p:cNvPr>
+          <p:cNvSpPr>
+            <a:spLocks noGrp="1"/>
+          </p:cNvSpPr>
+          <p:nvPr>
+            <p:ph idx="1"/>
+          </p:nvPr>
+        </p:nvSpPr>
+        <p:spPr>
+          <a:xfrm>
+            <a:off x="1451579" y="1973943"/>
+            <a:ext cx="9603275" cy="4027713"/>
+          </a:xfrm>
+        </p:spPr>
+        <p:txBody>
+          <a:bodyPr/>
+          <a:lstStyle/>
+          <a:p>
+            <a:r>
+              <a:rPr lang="en-US" dirty="0"/>
+              <a:t>For the most part, our estimators are just mean and standard deviation. </a:t>
+            </a:r>
+          </a:p>
+          <a:p>
+            <a:r>
+              <a:rPr lang="en-US" dirty="0"/>
+              <a:t>There are scenarios where other estimators are used. </a:t>
+            </a:r>
+          </a:p>
+          <a:p>
+            <a:pPr lvl="1"/>
+            <a:r>
+              <a:rPr lang="en-US" dirty="0"/>
+              <a:t>In outlier/skew data, median may make a better estimator. </a:t>
+            </a:r>
+          </a:p>
+          <a:p>
+            <a:pPr lvl="1"/>
+            <a:r>
+              <a:rPr lang="en-US" dirty="0"/>
+              <a:t>Specific scenarios – there are baseball ones, but I don’t know the details. </a:t>
+            </a:r>
+          </a:p>
+          <a:p>
+            <a:pPr lvl="1"/>
+            <a:r>
+              <a:rPr lang="en-US" dirty="0"/>
+              <a:t>Standard deviation – see book. </a:t>
+            </a:r>
+          </a:p>
+          <a:p>
+            <a:r>
+              <a:rPr lang="en-US" dirty="0"/>
+              <a:t>All models are wrong! All we care about are accurate predictions! </a:t>
+            </a:r>
+          </a:p>
+        </p:txBody>
+      </p:sp>
+    </p:spTree>
+    <p:extLst>
+      <p:ext uri="{BB962C8B-B14F-4D97-AF65-F5344CB8AC3E}">
+        <p14:creationId xmlns:p14="http://schemas.microsoft.com/office/powerpoint/2010/main" val="3413050038"/>
+      </p:ext>
+    </p:extLst>
+  </p:cSld>
+  <p:clrMapOvr>
+    <a:masterClrMapping/>
+  </p:clrMapOvr>
+</p:sld>
+</file>
+
+<file path=ppt/slides/slide17.xml><?xml version="1.0" encoding="utf-8"?>
+<p:sld xmlns:a="http://schemas.openxmlformats.org/drawingml/2006/main" xmlns:r="http://schemas.openxmlformats.org/officeDocument/2006/relationships" xmlns:p="http://schemas.openxmlformats.org/presentationml/2006/main">
+  <p:cSld>
+    <p:spTree>
+      <p:nvGrpSpPr>
+        <p:cNvPr id="1" name=""/>
+        <p:cNvGrpSpPr/>
+        <p:nvPr/>
+      </p:nvGrpSpPr>
+      <p:grpSpPr>
+        <a:xfrm>
+          <a:off x="0" y="0"/>
+          <a:ext cx="0" cy="0"/>
+          <a:chOff x="0" y="0"/>
+          <a:chExt cx="0" cy="0"/>
+        </a:xfrm>
+      </p:grpSpPr>
+      <p:sp>
+        <p:nvSpPr>
+          <p:cNvPr id="2" name="Title 1">
+            <a:extLst>
+              <a:ext uri="{FF2B5EF4-FFF2-40B4-BE49-F238E27FC236}">
+                <a16:creationId xmlns:a16="http://schemas.microsoft.com/office/drawing/2014/main" id="{42E6F632-66DB-FE96-F423-241473DEBDD8}"/>
+              </a:ext>
+            </a:extLst>
+          </p:cNvPr>
+          <p:cNvSpPr>
+            <a:spLocks noGrp="1"/>
+          </p:cNvSpPr>
+          <p:nvPr>
+            <p:ph type="title"/>
+          </p:nvPr>
+        </p:nvSpPr>
+        <p:spPr/>
+        <p:txBody>
+          <a:bodyPr/>
+          <a:lstStyle/>
+          <a:p>
+            <a:r>
+              <a:rPr lang="en-US" dirty="0"/>
+              <a:t>Making predictions – Trial Runs</a:t>
+            </a:r>
+          </a:p>
+        </p:txBody>
+      </p:sp>
+      <p:sp>
+        <p:nvSpPr>
+          <p:cNvPr id="3" name="Content Placeholder 2">
+            <a:extLst>
+              <a:ext uri="{FF2B5EF4-FFF2-40B4-BE49-F238E27FC236}">
+                <a16:creationId xmlns:a16="http://schemas.microsoft.com/office/drawing/2014/main" id="{6BFF96C8-5B50-8CA9-84ED-D71DF0ACD919}"/>
+              </a:ext>
+            </a:extLst>
+          </p:cNvPr>
+          <p:cNvSpPr>
+            <a:spLocks noGrp="1"/>
+          </p:cNvSpPr>
+          <p:nvPr>
+            <p:ph idx="1"/>
+          </p:nvPr>
+        </p:nvSpPr>
+        <p:spPr/>
+        <p:txBody>
+          <a:bodyPr/>
+          <a:lstStyle/>
+          <a:p>
+            <a:endParaRPr lang="en-US"/>
+          </a:p>
+        </p:txBody>
+      </p:sp>
+    </p:spTree>
+    <p:extLst>
+      <p:ext uri="{BB962C8B-B14F-4D97-AF65-F5344CB8AC3E}">
+        <p14:creationId xmlns:p14="http://schemas.microsoft.com/office/powerpoint/2010/main" val="3109955301"/>
+      </p:ext>
+    </p:extLst>
+  </p:cSld>
+  <p:clrMapOvr>
+    <a:masterClrMapping/>
+  </p:clrMapOvr>
+</p:sld>
+</file>
+
+<file path=ppt/slides/slide18.xml><?xml version="1.0" encoding="utf-8"?>
+<p:sld xmlns:a="http://schemas.openxmlformats.org/drawingml/2006/main" xmlns:r="http://schemas.openxmlformats.org/officeDocument/2006/relationships" xmlns:p="http://schemas.openxmlformats.org/presentationml/2006/main">
+  <p:cSld>
+    <p:spTree>
+      <p:nvGrpSpPr>
+        <p:cNvPr id="1" name=""/>
+        <p:cNvGrpSpPr/>
+        <p:nvPr/>
+      </p:nvGrpSpPr>
+      <p:grpSpPr>
+        <a:xfrm>
+          <a:off x="0" y="0"/>
+          <a:ext cx="0" cy="0"/>
+          <a:chOff x="0" y="0"/>
+          <a:chExt cx="0" cy="0"/>
+        </a:xfrm>
+      </p:grpSpPr>
+      <p:sp>
+        <p:nvSpPr>
+          <p:cNvPr id="2" name="Title 1">
+            <a:extLst>
+              <a:ext uri="{FF2B5EF4-FFF2-40B4-BE49-F238E27FC236}">
+                <a16:creationId xmlns:a16="http://schemas.microsoft.com/office/drawing/2014/main" id="{520D80B7-4916-A592-E090-DF428874532D}"/>
+              </a:ext>
+            </a:extLst>
+          </p:cNvPr>
+          <p:cNvSpPr>
+            <a:spLocks noGrp="1"/>
+          </p:cNvSpPr>
+          <p:nvPr>
+            <p:ph type="title"/>
+          </p:nvPr>
+        </p:nvSpPr>
+        <p:spPr/>
+        <p:txBody>
+          <a:bodyPr/>
+          <a:lstStyle/>
+          <a:p>
+            <a:r>
+              <a:rPr lang="en-US" dirty="0"/>
+              <a:t>Trials</a:t>
+            </a:r>
+          </a:p>
+        </p:txBody>
+      </p:sp>
+      <p:sp>
+        <p:nvSpPr>
+          <p:cNvPr id="3" name="Content Placeholder 2">
+            <a:extLst>
+              <a:ext uri="{FF2B5EF4-FFF2-40B4-BE49-F238E27FC236}">
+                <a16:creationId xmlns:a16="http://schemas.microsoft.com/office/drawing/2014/main" id="{7C90C60B-00BE-4416-FDD0-956323852785}"/>
+              </a:ext>
+            </a:extLst>
+          </p:cNvPr>
+          <p:cNvSpPr>
+            <a:spLocks noGrp="1"/>
+          </p:cNvSpPr>
+          <p:nvPr>
+            <p:ph idx="1"/>
+          </p:nvPr>
+        </p:nvSpPr>
+        <p:spPr>
+          <a:xfrm>
+            <a:off x="1451579" y="1853754"/>
+            <a:ext cx="9603275" cy="4335173"/>
+          </a:xfrm>
+        </p:spPr>
+        <p:txBody>
+          <a:bodyPr/>
+          <a:lstStyle/>
+          <a:p>
+            <a:r>
+              <a:rPr lang="en-US" dirty="0"/>
+              <a:t>Once we have a matching distribution, we can make predictions via running trials. </a:t>
+            </a:r>
+          </a:p>
+          <a:p>
+            <a:r>
+              <a:rPr lang="en-US" dirty="0"/>
+              <a:t>Each trial has a few steps:</a:t>
+            </a:r>
+          </a:p>
+          <a:p>
+            <a:pPr lvl="1"/>
+            <a:r>
+              <a:rPr lang="en-US" dirty="0"/>
+              <a:t>Create an analytical distribution from the estimator(s). </a:t>
+            </a:r>
+          </a:p>
+          <a:p>
+            <a:pPr lvl="1"/>
+            <a:r>
+              <a:rPr lang="en-US" dirty="0"/>
+              <a:t>Generate a bunch of values from that distribution. </a:t>
+            </a:r>
+          </a:p>
+          <a:p>
+            <a:pPr lvl="1"/>
+            <a:r>
+              <a:rPr lang="en-US" dirty="0"/>
+              <a:t>Calculate the (usually) mean of those generated values. </a:t>
+            </a:r>
+          </a:p>
+          <a:p>
+            <a:pPr lvl="1"/>
+            <a:r>
+              <a:rPr lang="en-US" dirty="0"/>
+              <a:t>Create a CDF of all of the means. </a:t>
+            </a:r>
+          </a:p>
+          <a:p>
+            <a:r>
+              <a:rPr lang="en-US" dirty="0"/>
+              <a:t>In effect, we are predicting what we expect the mean to be, based on the values from the empirical data, then making a distribution of those means. </a:t>
+            </a:r>
+          </a:p>
+          <a:p>
+            <a:r>
+              <a:rPr lang="en-US" dirty="0"/>
+              <a:t>Our estimate is the mean of those means – but how accurate is it…</a:t>
+            </a:r>
+          </a:p>
+          <a:p>
+            <a:endParaRPr lang="en-US" dirty="0"/>
+          </a:p>
+        </p:txBody>
+      </p:sp>
+    </p:spTree>
+    <p:extLst>
+      <p:ext uri="{BB962C8B-B14F-4D97-AF65-F5344CB8AC3E}">
+        <p14:creationId xmlns:p14="http://schemas.microsoft.com/office/powerpoint/2010/main" val="671170779"/>
+      </p:ext>
+    </p:extLst>
+  </p:cSld>
+  <p:clrMapOvr>
+    <a:masterClrMapping/>
+  </p:clrMapOvr>
+</p:sld>
+</file>
+
+<file path=ppt/slides/slide19.xml><?xml version="1.0" encoding="utf-8"?>
+<p:sld xmlns:a="http://schemas.openxmlformats.org/drawingml/2006/main" xmlns:r="http://schemas.openxmlformats.org/officeDocument/2006/relationships" xmlns:p="http://schemas.openxmlformats.org/presentationml/2006/main">
+  <p:cSld>
+    <p:spTree>
+      <p:nvGrpSpPr>
+        <p:cNvPr id="1" name=""/>
+        <p:cNvGrpSpPr/>
+        <p:nvPr/>
+      </p:nvGrpSpPr>
+      <p:grpSpPr>
+        <a:xfrm>
+          <a:off x="0" y="0"/>
+          <a:ext cx="0" cy="0"/>
+          <a:chOff x="0" y="0"/>
+          <a:chExt cx="0" cy="0"/>
+        </a:xfrm>
+      </p:grpSpPr>
+      <p:sp>
+        <p:nvSpPr>
+          <p:cNvPr id="2" name="Title 1">
+            <a:extLst>
+              <a:ext uri="{FF2B5EF4-FFF2-40B4-BE49-F238E27FC236}">
+                <a16:creationId xmlns:a16="http://schemas.microsoft.com/office/drawing/2014/main" id="{72E5AB18-4D6B-AC80-AF2F-89AAB41E2EBE}"/>
+              </a:ext>
+            </a:extLst>
+          </p:cNvPr>
+          <p:cNvSpPr>
+            <a:spLocks noGrp="1"/>
+          </p:cNvSpPr>
+          <p:nvPr>
+            <p:ph type="title"/>
+          </p:nvPr>
+        </p:nvSpPr>
+        <p:spPr/>
+        <p:txBody>
+          <a:bodyPr/>
+          <a:lstStyle/>
+          <a:p>
+            <a:r>
+              <a:rPr lang="en-US" dirty="0"/>
+              <a:t>Example - Heights</a:t>
+            </a:r>
+          </a:p>
+        </p:txBody>
+      </p:sp>
+      <p:sp>
+        <p:nvSpPr>
+          <p:cNvPr id="3" name="Content Placeholder 2">
+            <a:extLst>
+              <a:ext uri="{FF2B5EF4-FFF2-40B4-BE49-F238E27FC236}">
+                <a16:creationId xmlns:a16="http://schemas.microsoft.com/office/drawing/2014/main" id="{CE0DA599-88F9-ABCC-164C-CE88C9628BA3}"/>
+              </a:ext>
+            </a:extLst>
+          </p:cNvPr>
+          <p:cNvSpPr>
+            <a:spLocks noGrp="1"/>
+          </p:cNvSpPr>
+          <p:nvPr>
+            <p:ph idx="1"/>
+          </p:nvPr>
+        </p:nvSpPr>
+        <p:spPr>
+          <a:xfrm>
+            <a:off x="1451579" y="1853754"/>
+            <a:ext cx="9603275" cy="4199727"/>
+          </a:xfrm>
+        </p:spPr>
+        <p:txBody>
+          <a:bodyPr/>
+          <a:lstStyle/>
+          <a:p>
+            <a:pPr marL="457200" indent="-457200">
+              <a:buFont typeface="+mj-lt"/>
+              <a:buAutoNum type="arabicPeriod"/>
+            </a:pPr>
+            <a:r>
+              <a:rPr lang="en-US" dirty="0"/>
+              <a:t>Capture sample of size N and calculate estimators (mean and std most likely). </a:t>
+            </a:r>
+          </a:p>
+          <a:p>
+            <a:pPr marL="457200" indent="-457200">
+              <a:buFont typeface="+mj-lt"/>
+              <a:buAutoNum type="arabicPeriod"/>
+            </a:pPr>
+            <a:r>
+              <a:rPr lang="en-US" dirty="0"/>
+              <a:t>Create analytical distribution using sample estimators. </a:t>
+            </a:r>
+          </a:p>
+          <a:p>
+            <a:pPr marL="457200" indent="-457200">
+              <a:buFont typeface="+mj-lt"/>
+              <a:buAutoNum type="arabicPeriod"/>
+            </a:pPr>
+            <a:r>
+              <a:rPr lang="en-US" dirty="0"/>
+              <a:t>Generate many (like 1000+) new distributions of size N from the analytical one. </a:t>
+            </a:r>
+          </a:p>
+          <a:p>
+            <a:pPr marL="914400" lvl="1" indent="-457200">
+              <a:buFont typeface="+mj-lt"/>
+              <a:buAutoNum type="arabicPeriod"/>
+            </a:pPr>
+            <a:r>
+              <a:rPr lang="en-US" dirty="0"/>
+              <a:t>Each should be </a:t>
+            </a:r>
+            <a:r>
+              <a:rPr lang="en-US" i="1" dirty="0"/>
+              <a:t>mostly</a:t>
+            </a:r>
+            <a:r>
+              <a:rPr lang="en-US" dirty="0"/>
+              <a:t> identical to the empirical data, but not perfectly. </a:t>
+            </a:r>
+          </a:p>
+          <a:p>
+            <a:pPr marL="457200" indent="-457200">
+              <a:buFont typeface="+mj-lt"/>
+              <a:buAutoNum type="arabicPeriod"/>
+            </a:pPr>
+            <a:r>
+              <a:rPr lang="en-US" dirty="0"/>
+              <a:t>For each of those new </a:t>
+            </a:r>
+            <a:r>
+              <a:rPr lang="en-US" dirty="0" err="1"/>
+              <a:t>dists</a:t>
+            </a:r>
+            <a:r>
+              <a:rPr lang="en-US" dirty="0"/>
+              <a:t>, calculate the mean. </a:t>
+            </a:r>
+          </a:p>
+          <a:p>
+            <a:pPr marL="457200" indent="-457200">
+              <a:buFont typeface="+mj-lt"/>
+              <a:buAutoNum type="arabicPeriod"/>
+            </a:pPr>
+            <a:r>
+              <a:rPr lang="en-US" dirty="0"/>
+              <a:t>Plot the distribution of the new means. (Note: diff from </a:t>
+            </a:r>
+            <a:r>
+              <a:rPr lang="en-US" dirty="0" err="1"/>
+              <a:t>orig</a:t>
+            </a:r>
+            <a:r>
+              <a:rPr lang="en-US" dirty="0"/>
+              <a:t> values)</a:t>
+            </a:r>
+          </a:p>
+          <a:p>
+            <a:pPr marL="914400" lvl="1" indent="-457200">
+              <a:buFont typeface="+mj-lt"/>
+              <a:buAutoNum type="arabicPeriod"/>
+            </a:pPr>
+            <a:r>
+              <a:rPr lang="en-US" dirty="0"/>
+              <a:t>If they vary little, the prediction is more trustworthy. </a:t>
+            </a:r>
+          </a:p>
+          <a:p>
+            <a:pPr marL="914400" lvl="1" indent="-457200">
+              <a:buFont typeface="+mj-lt"/>
+              <a:buAutoNum type="arabicPeriod"/>
+            </a:pPr>
+            <a:r>
+              <a:rPr lang="en-US" dirty="0"/>
+              <a:t>If they vary widely, the prediction is less trustworthy. </a:t>
+            </a:r>
+          </a:p>
+          <a:p>
+            <a:pPr marL="457200" indent="-457200">
+              <a:buFont typeface="+mj-lt"/>
+              <a:buAutoNum type="arabicPeriod"/>
+            </a:pPr>
+            <a:r>
+              <a:rPr lang="en-US" dirty="0"/>
+              <a:t>If the fit is good, each sample drawn from </a:t>
+            </a:r>
+            <a:r>
+              <a:rPr lang="en-US" dirty="0" err="1"/>
+              <a:t>dist</a:t>
+            </a:r>
+            <a:r>
+              <a:rPr lang="en-US" dirty="0"/>
+              <a:t> should match the population. </a:t>
+            </a:r>
+          </a:p>
+        </p:txBody>
+      </p:sp>
+    </p:spTree>
+    <p:extLst>
+      <p:ext uri="{BB962C8B-B14F-4D97-AF65-F5344CB8AC3E}">
+        <p14:creationId xmlns:p14="http://schemas.microsoft.com/office/powerpoint/2010/main" val="1710872867"/>
+      </p:ext>
+    </p:extLst>
+  </p:cSld>
+  <p:clrMapOvr>
+    <a:masterClrMapping/>
+  </p:clrMapOvr>
+</p:sld>
+</file>
+
+<file path=ppt/slides/slide2.xml><?xml version="1.0" encoding="utf-8"?>
+<p:sld xmlns:a="http://schemas.openxmlformats.org/drawingml/2006/main" xmlns:r="http://schemas.openxmlformats.org/officeDocument/2006/relationships" xmlns:p="http://schemas.openxmlformats.org/presentationml/2006/main">
+  <p:cSld>
+    <p:spTree>
+      <p:nvGrpSpPr>
+        <p:cNvPr id="1" name=""/>
+        <p:cNvGrpSpPr/>
+        <p:nvPr/>
+      </p:nvGrpSpPr>
+      <p:grpSpPr>
+        <a:xfrm>
+          <a:off x="0" y="0"/>
+          <a:ext cx="0" cy="0"/>
+          <a:chOff x="0" y="0"/>
+          <a:chExt cx="0" cy="0"/>
+        </a:xfrm>
+      </p:grpSpPr>
+      <p:sp>
+        <p:nvSpPr>
+          <p:cNvPr id="2" name="Title 1">
+            <a:extLst>
+              <a:ext uri="{FF2B5EF4-FFF2-40B4-BE49-F238E27FC236}">
+                <a16:creationId xmlns:a16="http://schemas.microsoft.com/office/drawing/2014/main" id="{E251B0B4-4C3F-A39D-0FA9-79C144102D86}"/>
+              </a:ext>
+            </a:extLst>
+          </p:cNvPr>
+          <p:cNvSpPr>
+            <a:spLocks noGrp="1"/>
+          </p:cNvSpPr>
+          <p:nvPr>
+            <p:ph type="title"/>
+          </p:nvPr>
+        </p:nvSpPr>
+        <p:spPr/>
+        <p:txBody>
+          <a:bodyPr/>
+          <a:lstStyle/>
+          <a:p>
+            <a:r>
+              <a:rPr lang="en-US" dirty="0"/>
+              <a:t>Sampling Distributions</a:t>
+            </a:r>
+          </a:p>
+        </p:txBody>
+      </p:sp>
+      <p:sp>
+        <p:nvSpPr>
+          <p:cNvPr id="3" name="Content Placeholder 2">
+            <a:extLst>
+              <a:ext uri="{FF2B5EF4-FFF2-40B4-BE49-F238E27FC236}">
+                <a16:creationId xmlns:a16="http://schemas.microsoft.com/office/drawing/2014/main" id="{5E5C3168-DD69-64AC-C589-1327F94DAFC8}"/>
+              </a:ext>
+            </a:extLst>
+          </p:cNvPr>
+          <p:cNvSpPr>
+            <a:spLocks noGrp="1"/>
+          </p:cNvSpPr>
+          <p:nvPr>
+            <p:ph idx="1"/>
+          </p:nvPr>
+        </p:nvSpPr>
+        <p:spPr>
+          <a:xfrm>
+            <a:off x="1451579" y="2015732"/>
+            <a:ext cx="9603275" cy="4037749"/>
+          </a:xfrm>
+        </p:spPr>
+        <p:txBody>
+          <a:bodyPr/>
+          <a:lstStyle/>
+          <a:p>
+            <a:r>
+              <a:rPr lang="en-US" dirty="0"/>
+              <a:t>How can we evaluate quality of the estimations? </a:t>
+            </a:r>
+          </a:p>
+          <a:p>
+            <a:r>
+              <a:rPr lang="en-US" dirty="0"/>
+              <a:t>Play a game – the estimation game. </a:t>
+            </a:r>
+          </a:p>
+          <a:p>
+            <a:pPr lvl="1"/>
+            <a:r>
+              <a:rPr lang="en-US" dirty="0"/>
+              <a:t>Generate a ‘new’ distribution from the analytical one. </a:t>
+            </a:r>
+          </a:p>
+          <a:p>
+            <a:pPr lvl="1"/>
+            <a:r>
+              <a:rPr lang="en-US" dirty="0"/>
+              <a:t>Measure its stats. </a:t>
+            </a:r>
+          </a:p>
+          <a:p>
+            <a:pPr lvl="1"/>
+            <a:r>
+              <a:rPr lang="en-US" dirty="0"/>
+              <a:t>Repeat and collect (means). </a:t>
+            </a:r>
+          </a:p>
+          <a:p>
+            <a:r>
+              <a:rPr lang="en-US" dirty="0"/>
+              <a:t>If the sample is bad (small, large std) we get widely varied results. </a:t>
+            </a:r>
+          </a:p>
+        </p:txBody>
+      </p:sp>
+    </p:spTree>
+    <p:extLst>
+      <p:ext uri="{BB962C8B-B14F-4D97-AF65-F5344CB8AC3E}">
+        <p14:creationId xmlns:p14="http://schemas.microsoft.com/office/powerpoint/2010/main" val="1267737319"/>
+      </p:ext>
+    </p:extLst>
+  </p:cSld>
+  <p:clrMapOvr>
+    <a:masterClrMapping/>
+  </p:clrMapOvr>
+</p:sld>
+</file>
+
+<file path=ppt/slides/slide20.xml><?xml version="1.0" encoding="utf-8"?>
+<p:sld xmlns:a="http://schemas.openxmlformats.org/drawingml/2006/main" xmlns:r="http://schemas.openxmlformats.org/officeDocument/2006/relationships" xmlns:p="http://schemas.openxmlformats.org/presentationml/2006/main">
+  <p:cSld>
+    <p:spTree>
+      <p:nvGrpSpPr>
+        <p:cNvPr id="1" name=""/>
+        <p:cNvGrpSpPr/>
+        <p:nvPr/>
+      </p:nvGrpSpPr>
+      <p:grpSpPr>
+        <a:xfrm>
+          <a:off x="0" y="0"/>
+          <a:ext cx="0" cy="0"/>
+          <a:chOff x="0" y="0"/>
+          <a:chExt cx="0" cy="0"/>
+        </a:xfrm>
+      </p:grpSpPr>
+      <p:sp>
+        <p:nvSpPr>
+          <p:cNvPr id="2" name="Title 1">
+            <a:extLst>
+              <a:ext uri="{FF2B5EF4-FFF2-40B4-BE49-F238E27FC236}">
+                <a16:creationId xmlns:a16="http://schemas.microsoft.com/office/drawing/2014/main" id="{2F0F6EB8-C1DE-C5F9-2A61-4E9EDB824807}"/>
+              </a:ext>
+            </a:extLst>
+          </p:cNvPr>
+          <p:cNvSpPr>
+            <a:spLocks noGrp="1"/>
+          </p:cNvSpPr>
+          <p:nvPr>
+            <p:ph type="title"/>
+          </p:nvPr>
+        </p:nvSpPr>
+        <p:spPr>
+          <a:xfrm>
+            <a:off x="621793" y="804519"/>
+            <a:ext cx="4413503" cy="1049235"/>
+          </a:xfrm>
+        </p:spPr>
+        <p:txBody>
+          <a:bodyPr/>
+          <a:lstStyle/>
+          <a:p>
+            <a:r>
+              <a:rPr lang="en-US" dirty="0"/>
+              <a:t>Many, many, trials</a:t>
+            </a:r>
+          </a:p>
+        </p:txBody>
+      </p:sp>
+      <p:sp>
+        <p:nvSpPr>
+          <p:cNvPr id="3" name="Content Placeholder 2">
+            <a:extLst>
+              <a:ext uri="{FF2B5EF4-FFF2-40B4-BE49-F238E27FC236}">
+                <a16:creationId xmlns:a16="http://schemas.microsoft.com/office/drawing/2014/main" id="{BD25A8E0-3AB9-349B-857B-09953D6D8144}"/>
+              </a:ext>
+            </a:extLst>
+          </p:cNvPr>
+          <p:cNvSpPr>
+            <a:spLocks noGrp="1"/>
+          </p:cNvSpPr>
+          <p:nvPr>
+            <p:ph idx="1"/>
+          </p:nvPr>
+        </p:nvSpPr>
+        <p:spPr>
+          <a:xfrm>
+            <a:off x="0" y="2015732"/>
+            <a:ext cx="5801506" cy="3953268"/>
+          </a:xfrm>
+        </p:spPr>
+        <p:txBody>
+          <a:bodyPr>
+            <a:normAutofit lnSpcReduction="10000"/>
+          </a:bodyPr>
+          <a:lstStyle/>
+          <a:p>
+            <a:r>
+              <a:rPr lang="en-US" dirty="0"/>
+              <a:t>Our model defines how new data will fall. </a:t>
+            </a:r>
+          </a:p>
+          <a:p>
+            <a:r>
+              <a:rPr lang="en-US" dirty="0"/>
+              <a:t>Each trial generates one set of that data. </a:t>
+            </a:r>
+          </a:p>
+          <a:p>
+            <a:r>
+              <a:rPr lang="en-US" dirty="0"/>
+              <a:t>Our predicted mean will have values:</a:t>
+            </a:r>
+          </a:p>
+          <a:p>
+            <a:pPr lvl="1"/>
+            <a:r>
+              <a:rPr lang="en-US" dirty="0"/>
+              <a:t>Varying a little bit from the sample mean.</a:t>
+            </a:r>
+          </a:p>
+          <a:p>
+            <a:pPr lvl="1"/>
+            <a:r>
+              <a:rPr lang="en-US" dirty="0"/>
+              <a:t>Normal, with mean at center. </a:t>
+            </a:r>
+          </a:p>
+          <a:p>
+            <a:r>
+              <a:rPr lang="en-US" dirty="0"/>
+              <a:t>Our predicted population mean is avg. </a:t>
+            </a:r>
+          </a:p>
+          <a:p>
+            <a:pPr lvl="1"/>
+            <a:r>
+              <a:rPr lang="en-US" dirty="0"/>
+              <a:t>Assuming no bias. </a:t>
+            </a:r>
+          </a:p>
+          <a:p>
+            <a:r>
+              <a:rPr lang="en-US" dirty="0"/>
+              <a:t>Our ‘confidence’ is greater the less variance. </a:t>
+            </a:r>
+          </a:p>
+          <a:p>
+            <a:pPr lvl="1"/>
+            <a:r>
+              <a:rPr lang="en-US" dirty="0"/>
+              <a:t>I.e. if all generated means are the same, high conf.</a:t>
+            </a:r>
+          </a:p>
+        </p:txBody>
+      </p:sp>
+      <p:pic>
+        <p:nvPicPr>
+          <p:cNvPr id="5122" name="Picture 2" descr="Estimation in Statistics - GeeksforGeeks">
+            <a:extLst>
+              <a:ext uri="{FF2B5EF4-FFF2-40B4-BE49-F238E27FC236}">
+                <a16:creationId xmlns:a16="http://schemas.microsoft.com/office/drawing/2014/main" id="{C066A7DA-63AA-4D09-0058-AF75A3855CB1}"/>
+              </a:ext>
+            </a:extLst>
+          </p:cNvPr>
+          <p:cNvPicPr>
+            <a:picLocks noChangeAspect="1" noChangeArrowheads="1"/>
+          </p:cNvPicPr>
+          <p:nvPr/>
+        </p:nvPicPr>
+        <p:blipFill rotWithShape="1">
+          <a:blip r:embed="rId2">
+            <a:extLst>
+              <a:ext uri="{28A0092B-C50C-407E-A947-70E740481C1C}">
+                <a14:useLocalDpi xmlns:a14="http://schemas.microsoft.com/office/drawing/2010/main" val="0"/>
+              </a:ext>
+            </a:extLst>
+          </a:blip>
+          <a:srcRect l="12680" r="16880"/>
+          <a:stretch>
+            <a:fillRect/>
+          </a:stretch>
+        </p:blipFill>
+        <p:spPr bwMode="auto">
+          <a:xfrm>
+            <a:off x="5801506" y="1432874"/>
+            <a:ext cx="6390494" cy="4536126"/>
+          </a:xfrm>
+          <a:prstGeom prst="rect">
+            <a:avLst/>
+          </a:prstGeom>
+          <a:noFill/>
+          <a:extLst>
+            <a:ext uri="{909E8E84-426E-40DD-AFC4-6F175D3DCCD1}">
+              <a14:hiddenFill xmlns:a14="http://schemas.microsoft.com/office/drawing/2010/main">
+                <a:solidFill>
+                  <a:srgbClr val="FFFFFF"/>
+                </a:solidFill>
+              </a14:hiddenFill>
+            </a:ext>
+          </a:extLst>
+        </p:spPr>
+      </p:pic>
+    </p:spTree>
+    <p:extLst>
+      <p:ext uri="{BB962C8B-B14F-4D97-AF65-F5344CB8AC3E}">
+        <p14:creationId xmlns:p14="http://schemas.microsoft.com/office/powerpoint/2010/main" val="3566939842"/>
+      </p:ext>
+    </p:extLst>
+  </p:cSld>
+  <p:clrMapOvr>
+    <a:masterClrMapping/>
+  </p:clrMapOvr>
+</p:sld>
+</file>
+
+<file path=ppt/slides/slide21.xml><?xml version="1.0" encoding="utf-8"?>
+<p:sld xmlns:a="http://schemas.openxmlformats.org/drawingml/2006/main" xmlns:r="http://schemas.openxmlformats.org/officeDocument/2006/relationships" xmlns:p="http://schemas.openxmlformats.org/presentationml/2006/main">
+  <p:cSld>
+    <p:spTree>
+      <p:nvGrpSpPr>
+        <p:cNvPr id="1" name=""/>
+        <p:cNvGrpSpPr/>
+        <p:nvPr/>
+      </p:nvGrpSpPr>
+      <p:grpSpPr>
+        <a:xfrm>
+          <a:off x="0" y="0"/>
+          <a:ext cx="0" cy="0"/>
+          <a:chOff x="0" y="0"/>
+          <a:chExt cx="0" cy="0"/>
+        </a:xfrm>
+      </p:grpSpPr>
+      <p:sp>
+        <p:nvSpPr>
+          <p:cNvPr id="2" name="Title 1">
+            <a:extLst>
+              <a:ext uri="{FF2B5EF4-FFF2-40B4-BE49-F238E27FC236}">
+                <a16:creationId xmlns:a16="http://schemas.microsoft.com/office/drawing/2014/main" id="{65034167-22E6-AE98-34FB-24B3F518ED11}"/>
+              </a:ext>
+            </a:extLst>
+          </p:cNvPr>
+          <p:cNvSpPr>
+            <a:spLocks noGrp="1"/>
+          </p:cNvSpPr>
+          <p:nvPr>
+            <p:ph type="title"/>
+          </p:nvPr>
+        </p:nvSpPr>
+        <p:spPr/>
+        <p:txBody>
+          <a:bodyPr/>
+          <a:lstStyle/>
+          <a:p>
+            <a:r>
+              <a:rPr lang="en-US" dirty="0"/>
+              <a:t>Detour/preview - Central Limit Theorem</a:t>
+            </a:r>
+          </a:p>
+        </p:txBody>
+      </p:sp>
+      <p:sp>
+        <p:nvSpPr>
+          <p:cNvPr id="3" name="Content Placeholder 2">
+            <a:extLst>
+              <a:ext uri="{FF2B5EF4-FFF2-40B4-BE49-F238E27FC236}">
+                <a16:creationId xmlns:a16="http://schemas.microsoft.com/office/drawing/2014/main" id="{07450E18-FE75-08E0-2C0E-C98989C331C9}"/>
+              </a:ext>
+            </a:extLst>
+          </p:cNvPr>
+          <p:cNvSpPr>
+            <a:spLocks noGrp="1"/>
+          </p:cNvSpPr>
+          <p:nvPr>
+            <p:ph idx="1"/>
+          </p:nvPr>
+        </p:nvSpPr>
+        <p:spPr>
+          <a:xfrm>
+            <a:off x="109330" y="1853754"/>
+            <a:ext cx="7245628" cy="4199727"/>
+          </a:xfrm>
+        </p:spPr>
+        <p:txBody>
+          <a:bodyPr>
+            <a:normAutofit/>
+          </a:bodyPr>
+          <a:lstStyle/>
+          <a:p>
+            <a:r>
+              <a:rPr lang="en-US" dirty="0"/>
+              <a:t>As a note, this is an example of the central limit theorem. </a:t>
+            </a:r>
+          </a:p>
+          <a:p>
+            <a:pPr lvl="1"/>
+            <a:r>
+              <a:rPr lang="en-US" dirty="0"/>
+              <a:t>The distribution of sample means is normal. </a:t>
+            </a:r>
+          </a:p>
+          <a:p>
+            <a:pPr lvl="1"/>
+            <a:r>
+              <a:rPr lang="en-US" dirty="0"/>
+              <a:t>I.e. if we take a bunch of samples from a population, the means of each sample is normal. </a:t>
+            </a:r>
+          </a:p>
+          <a:p>
+            <a:r>
+              <a:rPr lang="en-US" dirty="0"/>
+              <a:t>The original data doesn’t need to be normal for this to be true. </a:t>
+            </a:r>
+          </a:p>
+          <a:p>
+            <a:r>
+              <a:rPr lang="en-US" dirty="0"/>
+              <a:t>Really important in math-y stats – parametric tools can be used. </a:t>
+            </a:r>
+          </a:p>
+          <a:p>
+            <a:pPr lvl="1"/>
+            <a:r>
+              <a:rPr lang="en-US" dirty="0"/>
+              <a:t>Things like confidence intervals can rely on normal properties. </a:t>
+            </a:r>
+          </a:p>
+        </p:txBody>
+      </p:sp>
+      <p:pic>
+        <p:nvPicPr>
+          <p:cNvPr id="6146" name="Picture 2" descr="Central limit theorem - Wikipedia">
+            <a:extLst>
+              <a:ext uri="{FF2B5EF4-FFF2-40B4-BE49-F238E27FC236}">
+                <a16:creationId xmlns:a16="http://schemas.microsoft.com/office/drawing/2014/main" id="{411C5A8C-F791-460B-DA56-058F641FA959}"/>
+              </a:ext>
+            </a:extLst>
+          </p:cNvPr>
+          <p:cNvPicPr>
+            <a:picLocks noChangeAspect="1" noChangeArrowheads="1"/>
+          </p:cNvPicPr>
+          <p:nvPr/>
+        </p:nvPicPr>
+        <p:blipFill>
+          <a:blip r:embed="rId2">
+            <a:extLst>
+              <a:ext uri="{28A0092B-C50C-407E-A947-70E740481C1C}">
+                <a14:useLocalDpi xmlns:a14="http://schemas.microsoft.com/office/drawing/2010/main" val="0"/>
+              </a:ext>
+            </a:extLst>
+          </a:blip>
+          <a:srcRect/>
+          <a:stretch>
+            <a:fillRect/>
+          </a:stretch>
+        </p:blipFill>
+        <p:spPr bwMode="auto">
+          <a:xfrm>
+            <a:off x="7578587" y="2765011"/>
+            <a:ext cx="4191000" cy="1765300"/>
+          </a:xfrm>
+          <a:prstGeom prst="rect">
+            <a:avLst/>
+          </a:prstGeom>
+          <a:noFill/>
+          <a:extLst>
+            <a:ext uri="{909E8E84-426E-40DD-AFC4-6F175D3DCCD1}">
+              <a14:hiddenFill xmlns:a14="http://schemas.microsoft.com/office/drawing/2010/main">
+                <a:solidFill>
+                  <a:srgbClr val="FFFFFF"/>
+                </a:solidFill>
+              </a14:hiddenFill>
+            </a:ext>
+          </a:extLst>
+        </p:spPr>
+      </p:pic>
+    </p:spTree>
+    <p:extLst>
+      <p:ext uri="{BB962C8B-B14F-4D97-AF65-F5344CB8AC3E}">
+        <p14:creationId xmlns:p14="http://schemas.microsoft.com/office/powerpoint/2010/main" val="3740426116"/>
+      </p:ext>
+    </p:extLst>
+  </p:cSld>
+  <p:clrMapOvr>
+    <a:masterClrMapping/>
+  </p:clrMapOvr>
+</p:sld>
+</file>
+
+<file path=ppt/slides/slide22.xml><?xml version="1.0" encoding="utf-8"?>
+<p:sld xmlns:a="http://schemas.openxmlformats.org/drawingml/2006/main" xmlns:r="http://schemas.openxmlformats.org/officeDocument/2006/relationships" xmlns:p="http://schemas.openxmlformats.org/presentationml/2006/main">
+  <p:cSld>
+    <p:spTree>
+      <p:nvGrpSpPr>
+        <p:cNvPr id="1" name=""/>
+        <p:cNvGrpSpPr/>
+        <p:nvPr/>
+      </p:nvGrpSpPr>
+      <p:grpSpPr>
+        <a:xfrm>
+          <a:off x="0" y="0"/>
+          <a:ext cx="0" cy="0"/>
+          <a:chOff x="0" y="0"/>
+          <a:chExt cx="0" cy="0"/>
+        </a:xfrm>
+      </p:grpSpPr>
+      <p:sp>
+        <p:nvSpPr>
+          <p:cNvPr id="2" name="Title 1">
+            <a:extLst>
+              <a:ext uri="{FF2B5EF4-FFF2-40B4-BE49-F238E27FC236}">
+                <a16:creationId xmlns:a16="http://schemas.microsoft.com/office/drawing/2014/main" id="{1CF6B065-7093-C8E9-D70B-70C1B14BF61C}"/>
+              </a:ext>
+            </a:extLst>
+          </p:cNvPr>
+          <p:cNvSpPr>
+            <a:spLocks noGrp="1"/>
+          </p:cNvSpPr>
+          <p:nvPr>
+            <p:ph type="title"/>
+          </p:nvPr>
+        </p:nvSpPr>
+        <p:spPr/>
+        <p:txBody>
+          <a:bodyPr/>
+          <a:lstStyle/>
+          <a:p>
+            <a:r>
+              <a:rPr lang="en-US" dirty="0"/>
+              <a:t>Quantifying – Standard Error</a:t>
+            </a:r>
+          </a:p>
+        </p:txBody>
+      </p:sp>
+      <p:sp>
+        <p:nvSpPr>
+          <p:cNvPr id="3" name="Content Placeholder 2">
+            <a:extLst>
+              <a:ext uri="{FF2B5EF4-FFF2-40B4-BE49-F238E27FC236}">
+                <a16:creationId xmlns:a16="http://schemas.microsoft.com/office/drawing/2014/main" id="{352BB196-436D-0A48-B7F5-E9354A1B196E}"/>
+              </a:ext>
+            </a:extLst>
+          </p:cNvPr>
+          <p:cNvSpPr>
+            <a:spLocks noGrp="1"/>
+          </p:cNvSpPr>
+          <p:nvPr>
+            <p:ph idx="1"/>
+          </p:nvPr>
+        </p:nvSpPr>
+        <p:spPr>
+          <a:xfrm>
+            <a:off x="6349523" y="2202688"/>
+            <a:ext cx="5842477" cy="3850793"/>
+          </a:xfrm>
+        </p:spPr>
+        <p:txBody>
+          <a:bodyPr/>
+          <a:lstStyle/>
+          <a:p>
+            <a:r>
+              <a:rPr lang="en-US" dirty="0"/>
+              <a:t>The distribution of the new means shows how similar new samples are. </a:t>
+            </a:r>
+          </a:p>
+          <a:p>
+            <a:r>
+              <a:rPr lang="en-US" dirty="0"/>
+              <a:t>Hopefully most sample means are similar. </a:t>
+            </a:r>
+          </a:p>
+          <a:p>
+            <a:pPr lvl="1"/>
+            <a:r>
+              <a:rPr lang="en-US" dirty="0"/>
+              <a:t>In theory, they would be the same in a perfect world.</a:t>
+            </a:r>
+          </a:p>
+          <a:p>
+            <a:r>
+              <a:rPr lang="en-US" dirty="0"/>
+              <a:t>This is the standard deviation of the new means. </a:t>
+            </a:r>
+          </a:p>
+          <a:p>
+            <a:pPr lvl="1"/>
+            <a:r>
+              <a:rPr lang="en-US" dirty="0"/>
+              <a:t>I.e. how much do the new samples vary on average. </a:t>
+            </a:r>
+          </a:p>
+          <a:p>
+            <a:r>
+              <a:rPr lang="en-US" dirty="0"/>
+              <a:t>SE = ~if we predict the population mean, how much do predictions vary.  </a:t>
+            </a:r>
+          </a:p>
+          <a:p>
+            <a:endParaRPr lang="en-US" dirty="0"/>
+          </a:p>
+        </p:txBody>
+      </p:sp>
+      <p:pic>
+        <p:nvPicPr>
+          <p:cNvPr id="1026" name="Picture 2" descr="Standard Error vs Standard Deviation: Finding the Difference - SixSigma.us">
+            <a:extLst>
+              <a:ext uri="{FF2B5EF4-FFF2-40B4-BE49-F238E27FC236}">
+                <a16:creationId xmlns:a16="http://schemas.microsoft.com/office/drawing/2014/main" id="{0EE7686B-46E8-A4D3-5F2E-4F1D5B27E9F2}"/>
+              </a:ext>
+            </a:extLst>
+          </p:cNvPr>
+          <p:cNvPicPr>
+            <a:picLocks noChangeAspect="1" noChangeArrowheads="1"/>
+          </p:cNvPicPr>
+          <p:nvPr/>
+        </p:nvPicPr>
+        <p:blipFill rotWithShape="1">
+          <a:blip r:embed="rId2">
+            <a:extLst>
+              <a:ext uri="{28A0092B-C50C-407E-A947-70E740481C1C}">
+                <a14:useLocalDpi xmlns:a14="http://schemas.microsoft.com/office/drawing/2010/main" val="0"/>
+              </a:ext>
+            </a:extLst>
+          </a:blip>
+          <a:srcRect t="11731" b="7733"/>
+          <a:stretch>
+            <a:fillRect/>
+          </a:stretch>
+        </p:blipFill>
+        <p:spPr bwMode="auto">
+          <a:xfrm>
+            <a:off x="0" y="1853754"/>
+            <a:ext cx="6349523" cy="4492752"/>
+          </a:xfrm>
+          <a:prstGeom prst="rect">
+            <a:avLst/>
+          </a:prstGeom>
+          <a:noFill/>
+          <a:extLst>
+            <a:ext uri="{909E8E84-426E-40DD-AFC4-6F175D3DCCD1}">
+              <a14:hiddenFill xmlns:a14="http://schemas.microsoft.com/office/drawing/2010/main">
+                <a:solidFill>
+                  <a:srgbClr val="FFFFFF"/>
+                </a:solidFill>
+              </a14:hiddenFill>
+            </a:ext>
+          </a:extLst>
+        </p:spPr>
+      </p:pic>
+      <p:pic>
+        <p:nvPicPr>
+          <p:cNvPr id="1028" name="Picture 4" descr="Example sampling distributions with the standard error of the mean.">
+            <a:extLst>
+              <a:ext uri="{FF2B5EF4-FFF2-40B4-BE49-F238E27FC236}">
+                <a16:creationId xmlns:a16="http://schemas.microsoft.com/office/drawing/2014/main" id="{A045E408-2B68-C34E-BC42-5F9FA10CD62C}"/>
+              </a:ext>
+            </a:extLst>
+          </p:cNvPr>
+          <p:cNvPicPr>
+            <a:picLocks noChangeAspect="1" noChangeArrowheads="1"/>
+          </p:cNvPicPr>
+          <p:nvPr/>
+        </p:nvPicPr>
+        <p:blipFill>
+          <a:blip r:embed="rId3">
+            <a:extLst>
+              <a:ext uri="{28A0092B-C50C-407E-A947-70E740481C1C}">
+                <a14:useLocalDpi xmlns:a14="http://schemas.microsoft.com/office/drawing/2010/main" val="0"/>
+              </a:ext>
+            </a:extLst>
+          </a:blip>
+          <a:srcRect/>
+          <a:stretch>
+            <a:fillRect/>
+          </a:stretch>
+        </p:blipFill>
+        <p:spPr bwMode="auto">
+          <a:xfrm>
+            <a:off x="8887968" y="0"/>
+            <a:ext cx="3304032" cy="2202688"/>
+          </a:xfrm>
+          <a:prstGeom prst="rect">
+            <a:avLst/>
+          </a:prstGeom>
+          <a:noFill/>
+          <a:extLst>
+            <a:ext uri="{909E8E84-426E-40DD-AFC4-6F175D3DCCD1}">
+              <a14:hiddenFill xmlns:a14="http://schemas.microsoft.com/office/drawing/2010/main">
+                <a:solidFill>
+                  <a:srgbClr val="FFFFFF"/>
+                </a:solidFill>
+              </a14:hiddenFill>
+            </a:ext>
+          </a:extLst>
+        </p:spPr>
+      </p:pic>
+    </p:spTree>
+    <p:extLst>
+      <p:ext uri="{BB962C8B-B14F-4D97-AF65-F5344CB8AC3E}">
+        <p14:creationId xmlns:p14="http://schemas.microsoft.com/office/powerpoint/2010/main" val="1274060171"/>
+      </p:ext>
+    </p:extLst>
+  </p:cSld>
+  <p:clrMapOvr>
+    <a:masterClrMapping/>
+  </p:clrMapOvr>
+</p:sld>
+</file>
+
+<file path=ppt/slides/slide23.xml><?xml version="1.0" encoding="utf-8"?>
+<p:sld xmlns:a="http://schemas.openxmlformats.org/drawingml/2006/main" xmlns:r="http://schemas.openxmlformats.org/officeDocument/2006/relationships" xmlns:p="http://schemas.openxmlformats.org/presentationml/2006/main">
+  <p:cSld>
+    <p:spTree>
+      <p:nvGrpSpPr>
+        <p:cNvPr id="1" name=""/>
+        <p:cNvGrpSpPr/>
+        <p:nvPr/>
+      </p:nvGrpSpPr>
+      <p:grpSpPr>
+        <a:xfrm>
+          <a:off x="0" y="0"/>
+          <a:ext cx="0" cy="0"/>
+          <a:chOff x="0" y="0"/>
+          <a:chExt cx="0" cy="0"/>
+        </a:xfrm>
+      </p:grpSpPr>
+      <p:sp>
+        <p:nvSpPr>
+          <p:cNvPr id="2" name="Title 1">
+            <a:extLst>
+              <a:ext uri="{FF2B5EF4-FFF2-40B4-BE49-F238E27FC236}">
                 <a16:creationId xmlns:a16="http://schemas.microsoft.com/office/drawing/2014/main" id="{9896FBC0-75DD-15F9-AD6A-66963F21B71B}"/>
               </a:ext>
             </a:extLst>
@@ -3794,16 +5921,34 @@
             <p:ph idx="1"/>
           </p:nvPr>
         </p:nvSpPr>
-        <p:spPr/>
+        <p:spPr>
+          <a:xfrm>
+            <a:off x="901149" y="2027583"/>
+            <a:ext cx="10153706" cy="4025897"/>
+          </a:xfrm>
+        </p:spPr>
         <p:txBody>
           <a:bodyPr>
-            <a:normAutofit fontScale="92500" lnSpcReduction="10000"/>
+            <a:normAutofit/>
           </a:bodyPr>
           <a:lstStyle/>
           <a:p>
             <a:r>
               <a:rPr lang="en-US" dirty="0"/>
-              <a:t>Confidence intervals are something that we can derive from our CDF. </a:t>
+              <a:t>The CI is the range in which we can expect X% of values to fall:</a:t>
+            </a:r>
+          </a:p>
+          <a:p>
+            <a:pPr lvl="1"/>
+            <a:r>
+              <a:rPr lang="en-US" dirty="0"/>
+              <a:t>A 90% confidence interval means that 90% of the values fall between the two CI limits. </a:t>
+            </a:r>
+          </a:p>
+          <a:p>
+            <a:r>
+              <a:rPr lang="en-US" dirty="0"/>
+              <a:t>Confidence intervals are something that we can derive from our predictions and CDF. </a:t>
             </a:r>
           </a:p>
           <a:p>
@@ -3817,26 +5962,21 @@
             <a:pPr lvl="1"/>
             <a:r>
               <a:rPr lang="en-US" dirty="0"/>
-              <a:t>SE – Standard Error is the std of these means. </a:t>
-            </a:r>
-          </a:p>
-          <a:p>
-            <a:r>
-              <a:rPr lang="en-US" dirty="0"/>
-              <a:t>The CI is the range in which we can expect X% of values to fall:</a:t>
-            </a:r>
-          </a:p>
-          <a:p>
-            <a:pPr lvl="1"/>
-            <a:r>
-              <a:rPr lang="en-US" dirty="0"/>
-              <a:t>A 90% confidence interval means that 90% of the values fall between the two CI limits. </a:t>
-            </a:r>
-          </a:p>
-          <a:p>
-            <a:r>
-              <a:rPr lang="en-US" dirty="0"/>
-              <a:t>Alternative phrasing – “We are 90% confident that the value will lie within X amount of this value”. </a:t>
+              <a:t>Can use the </a:t>
+            </a:r>
+            <a:r>
+              <a:rPr lang="en-US" dirty="0" err="1"/>
+              <a:t>cdf</a:t>
+            </a:r>
+            <a:r>
+              <a:rPr lang="en-US" dirty="0"/>
+              <a:t>/percentile calculations to get details. </a:t>
+            </a:r>
+          </a:p>
+          <a:p>
+            <a:r>
+              <a:rPr lang="en-US" dirty="0"/>
+              <a:t>A.k.a. – “We are 90% confident that the value will lie within X amount of this value”. </a:t>
             </a:r>
           </a:p>
           <a:p>
@@ -3847,6 +5987,13 @@
             </a:r>
           </a:p>
           <a:p>
+            <a:pPr lvl="1"/>
+            <a:r>
+              <a:rPr lang="en-US" dirty="0"/>
+              <a:t>Could also be a range – 90% between 18 and 22.5 - same meaning. </a:t>
+            </a:r>
+          </a:p>
+          <a:p>
             <a:r>
               <a:rPr lang="en-US" dirty="0"/>
               <a:t>Remember: those means that we generated in the trial are a distribution…</a:t>
@@ -3854,6 +6001,53 @@
           </a:p>
         </p:txBody>
       </p:sp>
+      <p:pic>
+        <p:nvPicPr>
+          <p:cNvPr id="8194" name="Picture 2" descr="Chapter 10 Confidence Intervals | Introduction to Statistics and Data  Science">
+            <a:extLst>
+              <a:ext uri="{FF2B5EF4-FFF2-40B4-BE49-F238E27FC236}">
+                <a16:creationId xmlns:a16="http://schemas.microsoft.com/office/drawing/2014/main" id="{A02C8C93-60BD-51FD-581B-B07868E59F0D}"/>
+              </a:ext>
+            </a:extLst>
+          </p:cNvPr>
+          <p:cNvPicPr>
+            <a:picLocks noChangeAspect="1" noChangeArrowheads="1"/>
+          </p:cNvPicPr>
+          <p:nvPr/>
+        </p:nvPicPr>
+        <p:blipFill>
+          <a:blip r:embed="rId2">
+            <a:extLst>
+              <a:ext uri="{28A0092B-C50C-407E-A947-70E740481C1C}">
+                <a14:useLocalDpi xmlns:a14="http://schemas.microsoft.com/office/drawing/2010/main" val="0"/>
+              </a:ext>
+            </a:extLst>
+          </a:blip>
+          <a:srcRect/>
+          <a:stretch>
+            <a:fillRect/>
+          </a:stretch>
+        </p:blipFill>
+        <p:spPr bwMode="auto">
+          <a:xfrm>
+            <a:off x="7913204" y="0"/>
+            <a:ext cx="4278796" cy="2445026"/>
+          </a:xfrm>
+          <a:prstGeom prst="rect">
+            <a:avLst/>
+          </a:prstGeom>
+          <a:noFill/>
+          <a:extLst>
+            <a:ext uri="{909E8E84-426E-40DD-AFC4-6F175D3DCCD1}">
+              <a14:hiddenFill xmlns:a14="http://schemas.microsoft.com/office/drawing/2010/main">
+                <a:solidFill>
+                  <a:srgbClr val="FFFFFF"/>
+                </a:solidFill>
+              </a14:hiddenFill>
+            </a:ext>
+          </a:extLst>
+        </p:spPr>
+      </p:pic>
     </p:spTree>
     <p:extLst>
       <p:ext uri="{BB962C8B-B14F-4D97-AF65-F5344CB8AC3E}">
@@ -3867,7 +6061,171 @@
 </p:sld>
 </file>
 
-<file path=ppt/slides/slide11.xml><?xml version="1.0" encoding="utf-8"?>
+<file path=ppt/slides/slide24.xml><?xml version="1.0" encoding="utf-8"?>
+<p:sld xmlns:a="http://schemas.openxmlformats.org/drawingml/2006/main" xmlns:r="http://schemas.openxmlformats.org/officeDocument/2006/relationships" xmlns:p="http://schemas.openxmlformats.org/presentationml/2006/main" show="0">
+  <p:cSld>
+    <p:spTree>
+      <p:nvGrpSpPr>
+        <p:cNvPr id="1" name=""/>
+        <p:cNvGrpSpPr/>
+        <p:nvPr/>
+      </p:nvGrpSpPr>
+      <p:grpSpPr>
+        <a:xfrm>
+          <a:off x="0" y="0"/>
+          <a:ext cx="0" cy="0"/>
+          <a:chOff x="0" y="0"/>
+          <a:chExt cx="0" cy="0"/>
+        </a:xfrm>
+      </p:grpSpPr>
+      <p:sp>
+        <p:nvSpPr>
+          <p:cNvPr id="2" name="Title 1">
+            <a:extLst>
+              <a:ext uri="{FF2B5EF4-FFF2-40B4-BE49-F238E27FC236}">
+                <a16:creationId xmlns:a16="http://schemas.microsoft.com/office/drawing/2014/main" id="{A5C6F207-5343-1E72-B6A6-7720B5456D09}"/>
+              </a:ext>
+            </a:extLst>
+          </p:cNvPr>
+          <p:cNvSpPr>
+            <a:spLocks noGrp="1"/>
+          </p:cNvSpPr>
+          <p:nvPr>
+            <p:ph type="title"/>
+          </p:nvPr>
+        </p:nvSpPr>
+        <p:spPr/>
+        <p:txBody>
+          <a:bodyPr/>
+          <a:lstStyle/>
+          <a:p>
+            <a:r>
+              <a:rPr lang="en-US" dirty="0"/>
+              <a:t>Improving</a:t>
+            </a:r>
+          </a:p>
+        </p:txBody>
+      </p:sp>
+      <p:sp>
+        <p:nvSpPr>
+          <p:cNvPr id="3" name="Content Placeholder 2">
+            <a:extLst>
+              <a:ext uri="{FF2B5EF4-FFF2-40B4-BE49-F238E27FC236}">
+                <a16:creationId xmlns:a16="http://schemas.microsoft.com/office/drawing/2014/main" id="{498F87B7-2835-AC99-C93C-C7BDF231000F}"/>
+              </a:ext>
+            </a:extLst>
+          </p:cNvPr>
+          <p:cNvSpPr>
+            <a:spLocks noGrp="1"/>
+          </p:cNvSpPr>
+          <p:nvPr>
+            <p:ph idx="1"/>
+          </p:nvPr>
+        </p:nvSpPr>
+        <p:spPr>
+          <a:xfrm>
+            <a:off x="1451579" y="2015732"/>
+            <a:ext cx="4559077" cy="3450613"/>
+          </a:xfrm>
+        </p:spPr>
+        <p:txBody>
+          <a:bodyPr/>
+          <a:lstStyle/>
+          <a:p>
+            <a:r>
+              <a:rPr lang="en-US" dirty="0"/>
+              <a:t>Each error source can be addressed.</a:t>
+            </a:r>
+          </a:p>
+          <a:p>
+            <a:r>
+              <a:rPr lang="en-US" dirty="0"/>
+              <a:t>Sample error:</a:t>
+            </a:r>
+          </a:p>
+          <a:p>
+            <a:pPr lvl="1"/>
+            <a:r>
+              <a:rPr lang="en-US" dirty="0"/>
+              <a:t>Bigger and more representative. </a:t>
+            </a:r>
+          </a:p>
+          <a:p>
+            <a:r>
+              <a:rPr lang="en-US" dirty="0"/>
+              <a:t>Measurement error:</a:t>
+            </a:r>
+          </a:p>
+          <a:p>
+            <a:pPr lvl="1"/>
+            <a:r>
+              <a:rPr lang="en-US" dirty="0"/>
+              <a:t>Better tools/process. </a:t>
+            </a:r>
+          </a:p>
+        </p:txBody>
+      </p:sp>
+      <p:pic>
+        <p:nvPicPr>
+          <p:cNvPr id="2050" name="Picture 2" descr="What Is Standard Error? Statistics Calculation and Overview | Outlier">
+            <a:extLst>
+              <a:ext uri="{FF2B5EF4-FFF2-40B4-BE49-F238E27FC236}">
+                <a16:creationId xmlns:a16="http://schemas.microsoft.com/office/drawing/2014/main" id="{1B4A7896-FCDA-521A-BFA0-F6312503978E}"/>
+              </a:ext>
+            </a:extLst>
+          </p:cNvPr>
+          <p:cNvPicPr>
+            <a:picLocks noChangeAspect="1" noChangeArrowheads="1"/>
+          </p:cNvPicPr>
+          <p:nvPr/>
+        </p:nvPicPr>
+        <p:blipFill rotWithShape="1">
+          <a:blip r:embed="rId2">
+            <a:extLst>
+              <a:ext uri="{28A0092B-C50C-407E-A947-70E740481C1C}">
+                <a14:useLocalDpi xmlns:a14="http://schemas.microsoft.com/office/drawing/2010/main" val="0"/>
+              </a:ext>
+            </a:extLst>
+          </a:blip>
+          <a:srcRect l="12210" t="6519" r="13997"/>
+          <a:stretch>
+            <a:fillRect/>
+          </a:stretch>
+        </p:blipFill>
+        <p:spPr bwMode="auto">
+          <a:xfrm>
+            <a:off x="6010656" y="1031366"/>
+            <a:ext cx="5995174" cy="5419344"/>
+          </a:xfrm>
+          <a:prstGeom prst="rect">
+            <a:avLst/>
+          </a:prstGeom>
+          <a:noFill/>
+          <a:extLst>
+            <a:ext uri="{909E8E84-426E-40DD-AFC4-6F175D3DCCD1}">
+              <a14:hiddenFill xmlns:a14="http://schemas.microsoft.com/office/drawing/2010/main">
+                <a:solidFill>
+                  <a:srgbClr val="FFFFFF"/>
+                </a:solidFill>
+              </a14:hiddenFill>
+            </a:ext>
+          </a:extLst>
+        </p:spPr>
+      </p:pic>
+    </p:spTree>
+    <p:extLst>
+      <p:ext uri="{BB962C8B-B14F-4D97-AF65-F5344CB8AC3E}">
+        <p14:creationId xmlns:p14="http://schemas.microsoft.com/office/powerpoint/2010/main" val="1933952382"/>
+      </p:ext>
+    </p:extLst>
+  </p:cSld>
+  <p:clrMapOvr>
+    <a:masterClrMapping/>
+  </p:clrMapOvr>
+</p:sld>
+</file>
+
+<file path=ppt/slides/slide25.xml><?xml version="1.0" encoding="utf-8"?>
 <p:sld xmlns:a="http://schemas.openxmlformats.org/drawingml/2006/main" xmlns:r="http://schemas.openxmlformats.org/officeDocument/2006/relationships" xmlns:p="http://schemas.openxmlformats.org/presentationml/2006/main">
   <p:cSld>
     <p:spTree>
@@ -3927,7 +6285,7 @@
 </p:sld>
 </file>
 
-<file path=ppt/slides/slide12.xml><?xml version="1.0" encoding="utf-8"?>
+<file path=ppt/slides/slide26.xml><?xml version="1.0" encoding="utf-8"?>
 <p:sld xmlns:a="http://schemas.openxmlformats.org/drawingml/2006/main" xmlns:r="http://schemas.openxmlformats.org/officeDocument/2006/relationships" xmlns:p="http://schemas.openxmlformats.org/presentationml/2006/main">
   <p:cSld>
     <p:spTree>
@@ -3990,13 +6348,35 @@
         </p:nvSpPr>
         <p:spPr>
           <a:xfrm>
-            <a:off x="1451579" y="2015732"/>
-            <a:ext cx="9729039" cy="3450613"/>
+            <a:off x="1451579" y="1853754"/>
+            <a:ext cx="9729039" cy="4199727"/>
           </a:xfrm>
         </p:spPr>
         <p:txBody>
-          <a:bodyPr/>
-          <a:lstStyle/>
+          <a:bodyPr>
+            <a:normAutofit/>
+          </a:bodyPr>
+          <a:lstStyle/>
+          <a:p>
+            <a:r>
+              <a:rPr lang="en-US" dirty="0"/>
+              <a:t>We did two types of estimation:</a:t>
+            </a:r>
+          </a:p>
+          <a:p>
+            <a:pPr lvl="1"/>
+            <a:r>
+              <a:rPr lang="en-US" dirty="0"/>
+              <a:t>Point estimation – predict a value, like the mean. </a:t>
+            </a:r>
+          </a:p>
+          <a:p>
+            <a:pPr lvl="1"/>
+            <a:r>
+              <a:rPr lang="en-US" dirty="0"/>
+              <a:t>Interval estimation – predict a range, like the confidence interval. </a:t>
+            </a:r>
+          </a:p>
           <a:p>
             <a:r>
               <a:rPr lang="en-US" dirty="0"/>
@@ -4013,7 +6393,7 @@
             <a:pPr lvl="1"/>
             <a:r>
               <a:rPr lang="en-US" dirty="0"/>
-              <a:t>We’ll look at estimation from discreet distributions, like we’d see in election polling, a bit later on. </a:t>
+              <a:t>We’ll look at estimation from discreet distributions, like election polling, a bit later on. </a:t>
             </a:r>
           </a:p>
           <a:p>
@@ -4037,7 +6417,7 @@
 </p:sld>
 </file>
 
-<file path=ppt/slides/slide2.xml><?xml version="1.0" encoding="utf-8"?>
+<file path=ppt/slides/slide27.xml><?xml version="1.0" encoding="utf-8"?>
 <p:sld xmlns:a="http://schemas.openxmlformats.org/drawingml/2006/main" xmlns:r="http://schemas.openxmlformats.org/officeDocument/2006/relationships" xmlns:p="http://schemas.openxmlformats.org/presentationml/2006/main">
   <p:cSld>
     <p:spTree>
@@ -4059,7 +6439,7 @@
           <p:cNvPr id="2" name="Title 1">
             <a:extLst>
               <a:ext uri="{FF2B5EF4-FFF2-40B4-BE49-F238E27FC236}">
-                <a16:creationId xmlns:a16="http://schemas.microsoft.com/office/drawing/2014/main" id="{E96098EB-A250-A874-A3B8-BC5C20DA40EA}"/>
+                <a16:creationId xmlns:a16="http://schemas.microsoft.com/office/drawing/2014/main" id="{53C9C203-8EA9-7410-B8BA-9D9CB018ECB0}"/>
               </a:ext>
             </a:extLst>
           </p:cNvPr>
@@ -4067,7 +6447,7 @@
             <a:spLocks noGrp="1"/>
           </p:cNvSpPr>
           <p:nvPr>
-            <p:ph type="ctrTitle"/>
+            <p:ph type="title"/>
           </p:nvPr>
         </p:nvSpPr>
         <p:spPr/>
@@ -4075,19 +6455,16 @@
           <a:bodyPr/>
           <a:lstStyle/>
           <a:p>
-            <a:r>
-              <a:rPr lang="en-US" dirty="0"/>
-              <a:t>Sampling and Estimation</a:t>
-            </a:r>
-          </a:p>
-        </p:txBody>
-      </p:sp>
-      <p:sp>
-        <p:nvSpPr>
-          <p:cNvPr id="3" name="Subtitle 2">
+            <a:endParaRPr lang="en-US"/>
+          </a:p>
+        </p:txBody>
+      </p:sp>
+      <p:sp>
+        <p:nvSpPr>
+          <p:cNvPr id="3" name="Content Placeholder 2">
             <a:extLst>
               <a:ext uri="{FF2B5EF4-FFF2-40B4-BE49-F238E27FC236}">
-                <a16:creationId xmlns:a16="http://schemas.microsoft.com/office/drawing/2014/main" id="{4C9C422E-46E4-BD06-A346-ECE3FC96640D}"/>
+                <a16:creationId xmlns:a16="http://schemas.microsoft.com/office/drawing/2014/main" id="{7684DE7B-31AB-063F-8BC5-23E4889972D6}"/>
               </a:ext>
             </a:extLst>
           </p:cNvPr>
@@ -4095,7 +6472,7 @@
             <a:spLocks noGrp="1"/>
           </p:cNvSpPr>
           <p:nvPr>
-            <p:ph type="subTitle" idx="1"/>
+            <p:ph idx="1"/>
           </p:nvPr>
         </p:nvSpPr>
         <p:spPr/>
@@ -4107,10 +6484,381 @@
           </a:p>
         </p:txBody>
       </p:sp>
+      <p:pic>
+        <p:nvPicPr>
+          <p:cNvPr id="3076" name="Picture 4" descr="Can't find the CLT? Fundamental Statistics for Machine Learning: Part 1 |  by Abhishek Divekar | Medium">
+            <a:extLst>
+              <a:ext uri="{FF2B5EF4-FFF2-40B4-BE49-F238E27FC236}">
+                <a16:creationId xmlns:a16="http://schemas.microsoft.com/office/drawing/2014/main" id="{B0F902A8-0C2E-0F8C-1A06-AA40FDFF5048}"/>
+              </a:ext>
+            </a:extLst>
+          </p:cNvPr>
+          <p:cNvPicPr>
+            <a:picLocks noChangeAspect="1" noChangeArrowheads="1"/>
+          </p:cNvPicPr>
+          <p:nvPr/>
+        </p:nvPicPr>
+        <p:blipFill>
+          <a:blip r:embed="rId2">
+            <a:extLst>
+              <a:ext uri="{28A0092B-C50C-407E-A947-70E740481C1C}">
+                <a14:useLocalDpi xmlns:a14="http://schemas.microsoft.com/office/drawing/2010/main" val="0"/>
+              </a:ext>
+            </a:extLst>
+          </a:blip>
+          <a:srcRect/>
+          <a:stretch>
+            <a:fillRect/>
+          </a:stretch>
+        </p:blipFill>
+        <p:spPr bwMode="auto">
+          <a:xfrm>
+            <a:off x="1774825" y="0"/>
+            <a:ext cx="8642350" cy="6858000"/>
+          </a:xfrm>
+          <a:prstGeom prst="rect">
+            <a:avLst/>
+          </a:prstGeom>
+          <a:noFill/>
+          <a:extLst>
+            <a:ext uri="{909E8E84-426E-40DD-AFC4-6F175D3DCCD1}">
+              <a14:hiddenFill xmlns:a14="http://schemas.microsoft.com/office/drawing/2010/main">
+                <a:solidFill>
+                  <a:srgbClr val="FFFFFF"/>
+                </a:solidFill>
+              </a14:hiddenFill>
+            </a:ext>
+          </a:extLst>
+        </p:spPr>
+      </p:pic>
     </p:spTree>
     <p:extLst>
       <p:ext uri="{BB962C8B-B14F-4D97-AF65-F5344CB8AC3E}">
-        <p14:creationId xmlns:p14="http://schemas.microsoft.com/office/powerpoint/2010/main" val="3617321956"/>
+        <p14:creationId xmlns:p14="http://schemas.microsoft.com/office/powerpoint/2010/main" val="3637465867"/>
+      </p:ext>
+    </p:extLst>
+  </p:cSld>
+  <p:clrMapOvr>
+    <a:masterClrMapping/>
+  </p:clrMapOvr>
+</p:sld>
+</file>
+
+<file path=ppt/slides/slide28.xml><?xml version="1.0" encoding="utf-8"?>
+<p:sld xmlns:a="http://schemas.openxmlformats.org/drawingml/2006/main" xmlns:r="http://schemas.openxmlformats.org/officeDocument/2006/relationships" xmlns:p="http://schemas.openxmlformats.org/presentationml/2006/main" show="0">
+  <p:cSld>
+    <p:spTree>
+      <p:nvGrpSpPr>
+        <p:cNvPr id="1" name=""/>
+        <p:cNvGrpSpPr/>
+        <p:nvPr/>
+      </p:nvGrpSpPr>
+      <p:grpSpPr>
+        <a:xfrm>
+          <a:off x="0" y="0"/>
+          <a:ext cx="0" cy="0"/>
+          <a:chOff x="0" y="0"/>
+          <a:chExt cx="0" cy="0"/>
+        </a:xfrm>
+      </p:grpSpPr>
+      <p:sp>
+        <p:nvSpPr>
+          <p:cNvPr id="2" name="Title 1">
+            <a:extLst>
+              <a:ext uri="{FF2B5EF4-FFF2-40B4-BE49-F238E27FC236}">
+                <a16:creationId xmlns:a16="http://schemas.microsoft.com/office/drawing/2014/main" id="{00689425-5AA5-D960-23F5-0EC9EA7AE2D4}"/>
+              </a:ext>
+            </a:extLst>
+          </p:cNvPr>
+          <p:cNvSpPr>
+            <a:spLocks noGrp="1"/>
+          </p:cNvSpPr>
+          <p:nvPr>
+            <p:ph type="title"/>
+          </p:nvPr>
+        </p:nvSpPr>
+        <p:spPr/>
+        <p:txBody>
+          <a:bodyPr/>
+          <a:lstStyle/>
+          <a:p>
+            <a:r>
+              <a:rPr lang="en-US" dirty="0"/>
+              <a:t>Estimating and Confidence</a:t>
+            </a:r>
+          </a:p>
+        </p:txBody>
+      </p:sp>
+      <p:sp>
+        <p:nvSpPr>
+          <p:cNvPr id="3" name="Content Placeholder 2">
+            <a:extLst>
+              <a:ext uri="{FF2B5EF4-FFF2-40B4-BE49-F238E27FC236}">
+                <a16:creationId xmlns:a16="http://schemas.microsoft.com/office/drawing/2014/main" id="{844FD658-4B45-438D-FEE3-564CC5FD35AA}"/>
+              </a:ext>
+            </a:extLst>
+          </p:cNvPr>
+          <p:cNvSpPr>
+            <a:spLocks noGrp="1"/>
+          </p:cNvSpPr>
+          <p:nvPr>
+            <p:ph idx="1"/>
+          </p:nvPr>
+        </p:nvSpPr>
+        <p:spPr>
+          <a:xfrm>
+            <a:off x="1451579" y="1853754"/>
+            <a:ext cx="9603275" cy="4199727"/>
+          </a:xfrm>
+        </p:spPr>
+        <p:txBody>
+          <a:bodyPr/>
+          <a:lstStyle/>
+          <a:p>
+            <a:r>
+              <a:rPr lang="en-US" dirty="0"/>
+              <a:t>In picking analytical distribution, we state that the expected distribution is [that]. </a:t>
+            </a:r>
+          </a:p>
+          <a:p>
+            <a:r>
+              <a:rPr lang="en-US" dirty="0"/>
+              <a:t>In a perfect world, every sample from a population will have the same distribution. </a:t>
+            </a:r>
+          </a:p>
+          <a:p>
+            <a:pPr lvl="1"/>
+            <a:r>
+              <a:rPr lang="en-US" dirty="0"/>
+              <a:t>This won’t be true, but can be </a:t>
+            </a:r>
+            <a:r>
+              <a:rPr lang="en-US" i="1" dirty="0"/>
+              <a:t>mostly</a:t>
+            </a:r>
+            <a:r>
+              <a:rPr lang="en-US" dirty="0"/>
+              <a:t> true. </a:t>
+            </a:r>
+          </a:p>
+          <a:p>
+            <a:pPr lvl="1"/>
+            <a:r>
+              <a:rPr lang="en-US" dirty="0"/>
+              <a:t>So, if we were to take several samples from the analytical distribution, they should match.</a:t>
+            </a:r>
+          </a:p>
+          <a:p>
+            <a:r>
+              <a:rPr lang="en-US" dirty="0"/>
+              <a:t>If we take many samples (e.g. 1000), we can observe the stats of those samples. </a:t>
+            </a:r>
+          </a:p>
+          <a:p>
+            <a:pPr lvl="1"/>
+            <a:r>
+              <a:rPr lang="en-US" dirty="0"/>
+              <a:t>What range do (90%/95%/99%) fall in - +/- N, M times out of 20. </a:t>
+            </a:r>
+          </a:p>
+          <a:p>
+            <a:pPr lvl="1"/>
+            <a:r>
+              <a:rPr lang="en-US" dirty="0"/>
+              <a:t>E.g. we take election poll, run fake elections with those probabilities, and observe results. </a:t>
+            </a:r>
+          </a:p>
+          <a:p>
+            <a:pPr lvl="1"/>
+            <a:r>
+              <a:rPr lang="en-US" dirty="0"/>
+              <a:t>Candidate A polls at 52% +/- 2, 19 times out of 20. </a:t>
+            </a:r>
+          </a:p>
+          <a:p>
+            <a:pPr lvl="1"/>
+            <a:r>
+              <a:rPr lang="en-US" dirty="0"/>
+              <a:t>When creating data on this </a:t>
+            </a:r>
+            <a:r>
+              <a:rPr lang="en-US" dirty="0" err="1"/>
+              <a:t>dist</a:t>
+            </a:r>
+            <a:r>
+              <a:rPr lang="en-US" dirty="0"/>
+              <a:t>, 95% of tests fell within 50-54, the other 5% outside that. </a:t>
+            </a:r>
+          </a:p>
+        </p:txBody>
+      </p:sp>
+    </p:spTree>
+    <p:extLst>
+      <p:ext uri="{BB962C8B-B14F-4D97-AF65-F5344CB8AC3E}">
+        <p14:creationId xmlns:p14="http://schemas.microsoft.com/office/powerpoint/2010/main" val="3140353004"/>
+      </p:ext>
+    </p:extLst>
+  </p:cSld>
+  <p:clrMapOvr>
+    <a:masterClrMapping/>
+  </p:clrMapOvr>
+</p:sld>
+</file>
+
+<file path=ppt/slides/slide29.xml><?xml version="1.0" encoding="utf-8"?>
+<p:sld xmlns:a="http://schemas.openxmlformats.org/drawingml/2006/main" xmlns:r="http://schemas.openxmlformats.org/officeDocument/2006/relationships" xmlns:p="http://schemas.openxmlformats.org/presentationml/2006/main">
+  <p:cSld>
+    <p:spTree>
+      <p:nvGrpSpPr>
+        <p:cNvPr id="1" name=""/>
+        <p:cNvGrpSpPr/>
+        <p:nvPr/>
+      </p:nvGrpSpPr>
+      <p:grpSpPr>
+        <a:xfrm>
+          <a:off x="0" y="0"/>
+          <a:ext cx="0" cy="0"/>
+          <a:chOff x="0" y="0"/>
+          <a:chExt cx="0" cy="0"/>
+        </a:xfrm>
+      </p:grpSpPr>
+      <p:sp>
+        <p:nvSpPr>
+          <p:cNvPr id="2" name="Title 1">
+            <a:extLst>
+              <a:ext uri="{FF2B5EF4-FFF2-40B4-BE49-F238E27FC236}">
+                <a16:creationId xmlns:a16="http://schemas.microsoft.com/office/drawing/2014/main" id="{D3E1E6CD-4963-E8D0-2071-D9F595F7544F}"/>
+              </a:ext>
+            </a:extLst>
+          </p:cNvPr>
+          <p:cNvSpPr>
+            <a:spLocks noGrp="1"/>
+          </p:cNvSpPr>
+          <p:nvPr>
+            <p:ph type="title"/>
+          </p:nvPr>
+        </p:nvSpPr>
+        <p:spPr/>
+        <p:txBody>
+          <a:bodyPr/>
+          <a:lstStyle/>
+          <a:p>
+            <a:r>
+              <a:rPr lang="en-US" dirty="0"/>
+              <a:t>Accuracy and Stability</a:t>
+            </a:r>
+          </a:p>
+        </p:txBody>
+      </p:sp>
+      <p:sp>
+        <p:nvSpPr>
+          <p:cNvPr id="3" name="Content Placeholder 2">
+            <a:extLst>
+              <a:ext uri="{FF2B5EF4-FFF2-40B4-BE49-F238E27FC236}">
+                <a16:creationId xmlns:a16="http://schemas.microsoft.com/office/drawing/2014/main" id="{A24E110E-E939-D1F1-8ED2-60D66B8C3A25}"/>
+              </a:ext>
+            </a:extLst>
+          </p:cNvPr>
+          <p:cNvSpPr>
+            <a:spLocks noGrp="1"/>
+          </p:cNvSpPr>
+          <p:nvPr>
+            <p:ph idx="1"/>
+          </p:nvPr>
+        </p:nvSpPr>
+        <p:spPr>
+          <a:xfrm>
+            <a:off x="1451579" y="1930400"/>
+            <a:ext cx="9603275" cy="4123081"/>
+          </a:xfrm>
+        </p:spPr>
+        <p:txBody>
+          <a:bodyPr/>
+          <a:lstStyle/>
+          <a:p>
+            <a:r>
+              <a:rPr lang="en-US" dirty="0"/>
+              <a:t>Our estimates for a population can be pretty accurate with good data. </a:t>
+            </a:r>
+          </a:p>
+          <a:p>
+            <a:pPr lvl="1"/>
+            <a:r>
+              <a:rPr lang="en-US" dirty="0"/>
+              <a:t>Larger samples, more </a:t>
+            </a:r>
+            <a:r>
+              <a:rPr lang="en-US" dirty="0" err="1"/>
+              <a:t>dist</a:t>
+            </a:r>
+            <a:r>
+              <a:rPr lang="en-US" dirty="0"/>
+              <a:t>-like data, less variance all help accuracy. </a:t>
+            </a:r>
+          </a:p>
+          <a:p>
+            <a:r>
+              <a:rPr lang="en-US" dirty="0"/>
+              <a:t>Big application – statistics Canada and census. </a:t>
+            </a:r>
+          </a:p>
+          <a:p>
+            <a:pPr lvl="1"/>
+            <a:r>
+              <a:rPr lang="en-US" dirty="0"/>
+              <a:t>Take a low-detail collection of (almost) population data. </a:t>
+            </a:r>
+          </a:p>
+          <a:p>
+            <a:pPr lvl="1"/>
+            <a:r>
+              <a:rPr lang="en-US" dirty="0"/>
+              <a:t>Take a detailed collection of a random sample. </a:t>
+            </a:r>
+          </a:p>
+          <a:p>
+            <a:pPr lvl="1"/>
+            <a:r>
+              <a:rPr lang="en-US" dirty="0"/>
+              <a:t>Use sample data to generalize for different populations (regional, demographic, </a:t>
+            </a:r>
+            <a:r>
+              <a:rPr lang="en-US" dirty="0" err="1"/>
+              <a:t>etc</a:t>
+            </a:r>
+            <a:r>
+              <a:rPr lang="en-US" dirty="0"/>
+              <a:t>…). </a:t>
+            </a:r>
+          </a:p>
+          <a:p>
+            <a:pPr lvl="1"/>
+            <a:r>
+              <a:rPr lang="en-US" dirty="0"/>
+              <a:t>Estimate things like age cohorts, population change, </a:t>
+            </a:r>
+            <a:r>
+              <a:rPr lang="en-US" dirty="0" err="1"/>
+              <a:t>etc</a:t>
+            </a:r>
+            <a:r>
+              <a:rPr lang="en-US" dirty="0"/>
+              <a:t>… by generalizing. </a:t>
+            </a:r>
+          </a:p>
+          <a:p>
+            <a:pPr lvl="1"/>
+            <a:r>
+              <a:rPr lang="en-US" dirty="0"/>
+              <a:t>Based on experience, apply corrections to data for better projections (e.g. undercounting). </a:t>
+            </a:r>
+          </a:p>
+        </p:txBody>
+      </p:sp>
+    </p:spTree>
+    <p:extLst>
+      <p:ext uri="{BB962C8B-B14F-4D97-AF65-F5344CB8AC3E}">
+        <p14:creationId xmlns:p14="http://schemas.microsoft.com/office/powerpoint/2010/main" val="950710098"/>
       </p:ext>
     </p:extLst>
   </p:cSld>
@@ -4142,7 +6890,7 @@
           <p:cNvPr id="2" name="Title 1">
             <a:extLst>
               <a:ext uri="{FF2B5EF4-FFF2-40B4-BE49-F238E27FC236}">
-                <a16:creationId xmlns:a16="http://schemas.microsoft.com/office/drawing/2014/main" id="{975F99F5-5D45-A4E8-7071-A6F679513A66}"/>
+                <a16:creationId xmlns:a16="http://schemas.microsoft.com/office/drawing/2014/main" id="{90815388-214D-1823-95C6-B755F8E12B31}"/>
               </a:ext>
             </a:extLst>
           </p:cNvPr>
@@ -4160,7 +6908,7 @@
           <a:p>
             <a:r>
               <a:rPr lang="en-US" dirty="0"/>
-              <a:t>Population and Samples</a:t>
+              <a:t>Housekeeping</a:t>
             </a:r>
           </a:p>
         </p:txBody>
@@ -4170,7 +6918,121 @@
           <p:cNvPr id="3" name="Content Placeholder 2">
             <a:extLst>
               <a:ext uri="{FF2B5EF4-FFF2-40B4-BE49-F238E27FC236}">
-                <a16:creationId xmlns:a16="http://schemas.microsoft.com/office/drawing/2014/main" id="{656471A5-775B-DD25-737A-64390A30390B}"/>
+                <a16:creationId xmlns:a16="http://schemas.microsoft.com/office/drawing/2014/main" id="{D5780454-DD05-6B13-FD2D-0DA7C85BCAF3}"/>
+              </a:ext>
+            </a:extLst>
+          </p:cNvPr>
+          <p:cNvSpPr>
+            <a:spLocks noGrp="1"/>
+          </p:cNvSpPr>
+          <p:nvPr>
+            <p:ph idx="1"/>
+          </p:nvPr>
+        </p:nvSpPr>
+        <p:spPr/>
+        <p:txBody>
+          <a:bodyPr/>
+          <a:lstStyle/>
+          <a:p>
+            <a:r>
+              <a:rPr lang="en-US" dirty="0"/>
+              <a:t>Today:</a:t>
+            </a:r>
+          </a:p>
+          <a:p>
+            <a:pPr lvl="1"/>
+            <a:r>
+              <a:rPr lang="en-US" dirty="0"/>
+              <a:t>Notebook (012A) – I reordered a few things, so the numbers are different. </a:t>
+            </a:r>
+          </a:p>
+          <a:p>
+            <a:pPr lvl="1"/>
+            <a:r>
+              <a:rPr lang="en-US" dirty="0"/>
+              <a:t>Estimating populations from samples. </a:t>
+            </a:r>
+          </a:p>
+          <a:p>
+            <a:pPr lvl="1"/>
+            <a:r>
+              <a:rPr lang="en-US" dirty="0"/>
+              <a:t>Intro to inferential statistics. </a:t>
+            </a:r>
+          </a:p>
+          <a:p>
+            <a:pPr lvl="1"/>
+            <a:r>
+              <a:rPr lang="en-US" dirty="0"/>
+              <a:t>Types of errors from samples. </a:t>
+            </a:r>
+          </a:p>
+        </p:txBody>
+      </p:sp>
+    </p:spTree>
+    <p:extLst>
+      <p:ext uri="{BB962C8B-B14F-4D97-AF65-F5344CB8AC3E}">
+        <p14:creationId xmlns:p14="http://schemas.microsoft.com/office/powerpoint/2010/main" val="1184903680"/>
+      </p:ext>
+    </p:extLst>
+  </p:cSld>
+  <p:clrMapOvr>
+    <a:masterClrMapping/>
+  </p:clrMapOvr>
+</p:sld>
+</file>
+
+<file path=ppt/slides/slide30.xml><?xml version="1.0" encoding="utf-8"?>
+<p:sld xmlns:a="http://schemas.openxmlformats.org/drawingml/2006/main" xmlns:r="http://schemas.openxmlformats.org/officeDocument/2006/relationships" xmlns:p="http://schemas.openxmlformats.org/presentationml/2006/main">
+  <p:cSld>
+    <p:spTree>
+      <p:nvGrpSpPr>
+        <p:cNvPr id="1" name=""/>
+        <p:cNvGrpSpPr/>
+        <p:nvPr/>
+      </p:nvGrpSpPr>
+      <p:grpSpPr>
+        <a:xfrm>
+          <a:off x="0" y="0"/>
+          <a:ext cx="0" cy="0"/>
+          <a:chOff x="0" y="0"/>
+          <a:chExt cx="0" cy="0"/>
+        </a:xfrm>
+      </p:grpSpPr>
+      <p:sp>
+        <p:nvSpPr>
+          <p:cNvPr id="2" name="Title 1">
+            <a:extLst>
+              <a:ext uri="{FF2B5EF4-FFF2-40B4-BE49-F238E27FC236}">
+                <a16:creationId xmlns:a16="http://schemas.microsoft.com/office/drawing/2014/main" id="{AB1D98C9-3D1D-6DAD-73FA-9E1D9ACF37FD}"/>
+              </a:ext>
+            </a:extLst>
+          </p:cNvPr>
+          <p:cNvSpPr>
+            <a:spLocks noGrp="1"/>
+          </p:cNvSpPr>
+          <p:nvPr>
+            <p:ph type="title"/>
+          </p:nvPr>
+        </p:nvSpPr>
+        <p:spPr/>
+        <p:txBody>
+          <a:bodyPr/>
+          <a:lstStyle/>
+          <a:p>
+            <a:r>
+              <a:rPr lang="en-US" dirty="0"/>
+              <a:t>Simulations and Stats</a:t>
+            </a:r>
+          </a:p>
+        </p:txBody>
+      </p:sp>
+      <p:sp>
+        <p:nvSpPr>
+          <p:cNvPr id="3" name="Content Placeholder 2">
+            <a:extLst>
+              <a:ext uri="{FF2B5EF4-FFF2-40B4-BE49-F238E27FC236}">
+                <a16:creationId xmlns:a16="http://schemas.microsoft.com/office/drawing/2014/main" id="{DB6F3740-58E9-C77C-B2A8-FEF2D4203785}"/>
               </a:ext>
             </a:extLst>
           </p:cNvPr>
@@ -4183,8 +7045,8 @@
         </p:nvSpPr>
         <p:spPr>
           <a:xfrm>
-            <a:off x="1451579" y="2015732"/>
-            <a:ext cx="9603275" cy="4149541"/>
+            <a:off x="1451579" y="1853754"/>
+            <a:ext cx="10740421" cy="4199727"/>
           </a:xfrm>
         </p:spPr>
         <p:txBody>
@@ -4195,53 +7057,157 @@
           <a:p>
             <a:r>
               <a:rPr lang="en-US" dirty="0"/>
-              <a:t>Recall:</a:t>
-            </a:r>
-          </a:p>
-          <a:p>
-            <a:pPr lvl="1"/>
-            <a:r>
-              <a:rPr lang="en-US" dirty="0"/>
-              <a:t>Population – the entirety of whatever we are examining. </a:t>
-            </a:r>
-          </a:p>
-          <a:p>
-            <a:pPr lvl="1"/>
-            <a:r>
-              <a:rPr lang="en-US" dirty="0"/>
-              <a:t>Sample – some subset that we pull from the population for analysis. </a:t>
-            </a:r>
-          </a:p>
-          <a:p>
-            <a:r>
-              <a:rPr lang="en-US" dirty="0"/>
-              <a:t>We can’t generally get a population wide dataset. </a:t>
-            </a:r>
-          </a:p>
-          <a:p>
-            <a:pPr lvl="1"/>
-            <a:r>
-              <a:rPr lang="en-US" dirty="0"/>
-              <a:t>If the average height of our sample is 5’10”, we can’t just say that’s true for the population. </a:t>
-            </a:r>
-          </a:p>
-          <a:p>
-            <a:r>
-              <a:rPr lang="en-US" dirty="0"/>
-              <a:t>Our sample should mirror our population, but there is always some difference. </a:t>
-            </a:r>
-          </a:p>
-          <a:p>
-            <a:pPr lvl="1"/>
-            <a:r>
-              <a:rPr lang="en-US" dirty="0"/>
-              <a:t>This introduces some error – the sampling error. </a:t>
-            </a:r>
-          </a:p>
-          <a:p>
-            <a:r>
-              <a:rPr lang="en-US" b="1" dirty="0"/>
-              <a:t>Here, we will use our sample to make estimates of the population. </a:t>
+              <a:t>Note: this should come together as a concept more post hypothesis testing. </a:t>
+            </a:r>
+          </a:p>
+          <a:p>
+            <a:r>
+              <a:rPr lang="en-US" dirty="0"/>
+              <a:t>In math-y stats, tools like t-tests, normal test, </a:t>
+            </a:r>
+            <a:r>
+              <a:rPr lang="en-US" dirty="0" err="1"/>
+              <a:t>etc</a:t>
+            </a:r>
+            <a:r>
+              <a:rPr lang="en-US" dirty="0"/>
+              <a:t>… let us do analysis. </a:t>
+            </a:r>
+          </a:p>
+          <a:p>
+            <a:r>
+              <a:rPr lang="en-US" dirty="0"/>
+              <a:t>In ml stats, our simulations can do the same/similar things directly. </a:t>
+            </a:r>
+          </a:p>
+          <a:p>
+            <a:r>
+              <a:rPr lang="en-US" dirty="0"/>
+              <a:t>For example – voting predictions (binomial distributions):</a:t>
+            </a:r>
+          </a:p>
+          <a:p>
+            <a:pPr lvl="1"/>
+            <a:r>
+              <a:rPr lang="en-US" dirty="0"/>
+              <a:t>We have a sample of people (usually 500-1500), and their intended votes. </a:t>
+            </a:r>
+          </a:p>
+          <a:p>
+            <a:pPr lvl="1"/>
+            <a:r>
+              <a:rPr lang="en-US" dirty="0"/>
+              <a:t>Traditional – parametric assumptions, we can calculate CI with stats from sample and premade calcs. </a:t>
+            </a:r>
+          </a:p>
+          <a:p>
+            <a:pPr lvl="1"/>
+            <a:r>
+              <a:rPr lang="en-US" dirty="0"/>
+              <a:t>ML (us) – we can build a simulation based on the distribution, test it many times, and count. </a:t>
+            </a:r>
+          </a:p>
+          <a:p>
+            <a:r>
+              <a:rPr lang="en-US" dirty="0"/>
+              <a:t>The two do the same – math works but requires assumptions, simulations are flexible.</a:t>
+            </a:r>
+          </a:p>
+          <a:p>
+            <a:pPr lvl="1"/>
+            <a:r>
+              <a:rPr lang="en-US" dirty="0"/>
+              <a:t>Big reason why matching a </a:t>
+            </a:r>
+            <a:r>
+              <a:rPr lang="en-US" dirty="0" err="1"/>
+              <a:t>dist</a:t>
+            </a:r>
+            <a:r>
+              <a:rPr lang="en-US" dirty="0"/>
+              <a:t> and making data normal matters – need its tools. </a:t>
+            </a:r>
+          </a:p>
+        </p:txBody>
+      </p:sp>
+      <p:pic>
+        <p:nvPicPr>
+          <p:cNvPr id="7170" name="Picture 2" descr="Equation to calculate binominal two-sided upper confidence interval">
+            <a:extLst>
+              <a:ext uri="{FF2B5EF4-FFF2-40B4-BE49-F238E27FC236}">
+                <a16:creationId xmlns:a16="http://schemas.microsoft.com/office/drawing/2014/main" id="{D64657AC-9859-82BD-ABB2-D13856F11A58}"/>
+              </a:ext>
+            </a:extLst>
+          </p:cNvPr>
+          <p:cNvPicPr>
+            <a:picLocks noChangeAspect="1" noChangeArrowheads="1"/>
+          </p:cNvPicPr>
+          <p:nvPr/>
+        </p:nvPicPr>
+        <p:blipFill>
+          <a:blip r:embed="rId2">
+            <a:extLst>
+              <a:ext uri="{28A0092B-C50C-407E-A947-70E740481C1C}">
+                <a14:useLocalDpi xmlns:a14="http://schemas.microsoft.com/office/drawing/2010/main" val="0"/>
+              </a:ext>
+            </a:extLst>
+          </a:blip>
+          <a:srcRect/>
+          <a:stretch>
+            <a:fillRect/>
+          </a:stretch>
+        </p:blipFill>
+        <p:spPr bwMode="auto">
+          <a:xfrm>
+            <a:off x="8001000" y="0"/>
+            <a:ext cx="4191000" cy="1535709"/>
+          </a:xfrm>
+          <a:prstGeom prst="rect">
+            <a:avLst/>
+          </a:prstGeom>
+          <a:noFill/>
+          <a:extLst>
+            <a:ext uri="{909E8E84-426E-40DD-AFC4-6F175D3DCCD1}">
+              <a14:hiddenFill xmlns:a14="http://schemas.microsoft.com/office/drawing/2010/main">
+                <a:solidFill>
+                  <a:srgbClr val="FFFFFF"/>
+                </a:solidFill>
+              </a14:hiddenFill>
+            </a:ext>
+          </a:extLst>
+        </p:spPr>
+      </p:pic>
+      <p:sp>
+        <p:nvSpPr>
+          <p:cNvPr id="4" name="TextBox 3">
+            <a:extLst>
+              <a:ext uri="{FF2B5EF4-FFF2-40B4-BE49-F238E27FC236}">
+                <a16:creationId xmlns:a16="http://schemas.microsoft.com/office/drawing/2014/main" id="{91097C83-8C4D-BED8-3B43-951A972EE7D8}"/>
+              </a:ext>
+            </a:extLst>
+          </p:cNvPr>
+          <p:cNvSpPr txBox="1"/>
+          <p:nvPr/>
+        </p:nvSpPr>
+        <p:spPr>
+          <a:xfrm>
+            <a:off x="8825482" y="1535709"/>
+            <a:ext cx="3829878" cy="369332"/>
+          </a:xfrm>
+          <a:prstGeom prst="rect">
+            <a:avLst/>
+          </a:prstGeom>
+          <a:noFill/>
+        </p:spPr>
+        <p:txBody>
+          <a:bodyPr wrap="square" rtlCol="0">
+            <a:spAutoFit/>
+          </a:bodyPr>
+          <a:lstStyle/>
+          <a:p>
+            <a:r>
+              <a:rPr lang="en-US" dirty="0"/>
+              <a:t>A sample binomial CI calculation</a:t>
             </a:r>
           </a:p>
         </p:txBody>
@@ -4249,7 +7215,321 @@
     </p:spTree>
     <p:extLst>
       <p:ext uri="{BB962C8B-B14F-4D97-AF65-F5344CB8AC3E}">
-        <p14:creationId xmlns:p14="http://schemas.microsoft.com/office/powerpoint/2010/main" val="2180470633"/>
+        <p14:creationId xmlns:p14="http://schemas.microsoft.com/office/powerpoint/2010/main" val="2218290171"/>
+      </p:ext>
+    </p:extLst>
+  </p:cSld>
+  <p:clrMapOvr>
+    <a:masterClrMapping/>
+  </p:clrMapOvr>
+</p:sld>
+</file>
+
+<file path=ppt/slides/slide31.xml><?xml version="1.0" encoding="utf-8"?>
+<p:sld xmlns:a="http://schemas.openxmlformats.org/drawingml/2006/main" xmlns:r="http://schemas.openxmlformats.org/officeDocument/2006/relationships" xmlns:p="http://schemas.openxmlformats.org/presentationml/2006/main">
+  <p:cSld>
+    <p:spTree>
+      <p:nvGrpSpPr>
+        <p:cNvPr id="1" name=""/>
+        <p:cNvGrpSpPr/>
+        <p:nvPr/>
+      </p:nvGrpSpPr>
+      <p:grpSpPr>
+        <a:xfrm>
+          <a:off x="0" y="0"/>
+          <a:ext cx="0" cy="0"/>
+          <a:chOff x="0" y="0"/>
+          <a:chExt cx="0" cy="0"/>
+        </a:xfrm>
+      </p:grpSpPr>
+      <p:sp>
+        <p:nvSpPr>
+          <p:cNvPr id="2" name="Title 1">
+            <a:extLst>
+              <a:ext uri="{FF2B5EF4-FFF2-40B4-BE49-F238E27FC236}">
+                <a16:creationId xmlns:a16="http://schemas.microsoft.com/office/drawing/2014/main" id="{F1524498-433E-DCAB-9344-3EC48E0E5E1B}"/>
+              </a:ext>
+            </a:extLst>
+          </p:cNvPr>
+          <p:cNvSpPr>
+            <a:spLocks noGrp="1"/>
+          </p:cNvSpPr>
+          <p:nvPr>
+            <p:ph type="title"/>
+          </p:nvPr>
+        </p:nvSpPr>
+        <p:spPr/>
+        <p:txBody>
+          <a:bodyPr/>
+          <a:lstStyle/>
+          <a:p>
+            <a:r>
+              <a:rPr lang="en-US" dirty="0"/>
+              <a:t>Simulations Continued…</a:t>
+            </a:r>
+          </a:p>
+        </p:txBody>
+      </p:sp>
+      <p:sp>
+        <p:nvSpPr>
+          <p:cNvPr id="3" name="Content Placeholder 2">
+            <a:extLst>
+              <a:ext uri="{FF2B5EF4-FFF2-40B4-BE49-F238E27FC236}">
+                <a16:creationId xmlns:a16="http://schemas.microsoft.com/office/drawing/2014/main" id="{15789BB6-0B25-1181-7F94-42CB6146C6BA}"/>
+              </a:ext>
+            </a:extLst>
+          </p:cNvPr>
+          <p:cNvSpPr>
+            <a:spLocks noGrp="1"/>
+          </p:cNvSpPr>
+          <p:nvPr>
+            <p:ph idx="1"/>
+          </p:nvPr>
+        </p:nvSpPr>
+        <p:spPr>
+          <a:xfrm>
+            <a:off x="1451579" y="1853754"/>
+            <a:ext cx="9603275" cy="4199727"/>
+          </a:xfrm>
+        </p:spPr>
+        <p:txBody>
+          <a:bodyPr/>
+          <a:lstStyle/>
+          <a:p>
+            <a:r>
+              <a:rPr lang="en-US" dirty="0"/>
+              <a:t>With our trusty toolset, we could use any probability to simulate and predict. </a:t>
+            </a:r>
+          </a:p>
+          <a:p>
+            <a:pPr lvl="1"/>
+            <a:r>
+              <a:rPr lang="en-US" dirty="0"/>
+              <a:t>We have a probability of X happening or of having X value. </a:t>
+            </a:r>
+          </a:p>
+          <a:p>
+            <a:pPr lvl="1"/>
+            <a:r>
+              <a:rPr lang="en-US" dirty="0"/>
+              <a:t>We can build that probability into a model (analytical </a:t>
+            </a:r>
+            <a:r>
+              <a:rPr lang="en-US" dirty="0" err="1"/>
+              <a:t>dist</a:t>
+            </a:r>
+            <a:r>
+              <a:rPr lang="en-US" dirty="0"/>
+              <a:t> or it could be anything). </a:t>
+            </a:r>
+          </a:p>
+          <a:p>
+            <a:pPr lvl="1"/>
+            <a:r>
+              <a:rPr lang="en-US" dirty="0"/>
+              <a:t>Once we have the model, generate many sample distributions. </a:t>
+            </a:r>
+          </a:p>
+          <a:p>
+            <a:pPr lvl="1"/>
+            <a:r>
+              <a:rPr lang="en-US" dirty="0"/>
+              <a:t>Tabulate results into answer and confidence. </a:t>
+            </a:r>
+          </a:p>
+          <a:p>
+            <a:r>
+              <a:rPr lang="en-US" dirty="0"/>
+              <a:t>The only part that really changes is defining the probability distribution. </a:t>
+            </a:r>
+          </a:p>
+          <a:p>
+            <a:pPr lvl="1"/>
+            <a:r>
+              <a:rPr lang="en-US" dirty="0"/>
+              <a:t>Our judgement determines its accuracy – “what </a:t>
+            </a:r>
+            <a:r>
+              <a:rPr lang="en-US" dirty="0" err="1"/>
+              <a:t>dist</a:t>
+            </a:r>
+            <a:r>
+              <a:rPr lang="en-US" dirty="0"/>
+              <a:t> pattern does this data follow…”</a:t>
+            </a:r>
+          </a:p>
+          <a:p>
+            <a:pPr lvl="1"/>
+            <a:r>
+              <a:rPr lang="en-US" dirty="0"/>
+              <a:t>We are saying that model (anal. Dist.) </a:t>
+            </a:r>
+            <a:r>
+              <a:rPr lang="en-US" i="1" dirty="0"/>
+              <a:t>is</a:t>
+            </a:r>
+            <a:r>
+              <a:rPr lang="en-US" dirty="0"/>
+              <a:t> the shape of the data, so generated data follows. </a:t>
+            </a:r>
+          </a:p>
+          <a:p>
+            <a:r>
+              <a:rPr lang="en-US" dirty="0"/>
+              <a:t>Think of any other scenario….</a:t>
+            </a:r>
+          </a:p>
+        </p:txBody>
+      </p:sp>
+    </p:spTree>
+    <p:extLst>
+      <p:ext uri="{BB962C8B-B14F-4D97-AF65-F5344CB8AC3E}">
+        <p14:creationId xmlns:p14="http://schemas.microsoft.com/office/powerpoint/2010/main" val="4284744621"/>
+      </p:ext>
+    </p:extLst>
+  </p:cSld>
+  <p:clrMapOvr>
+    <a:masterClrMapping/>
+  </p:clrMapOvr>
+</p:sld>
+</file>
+
+<file path=ppt/slides/slide32.xml><?xml version="1.0" encoding="utf-8"?>
+<p:sld xmlns:a="http://schemas.openxmlformats.org/drawingml/2006/main" xmlns:r="http://schemas.openxmlformats.org/officeDocument/2006/relationships" xmlns:p="http://schemas.openxmlformats.org/presentationml/2006/main">
+  <p:cSld>
+    <p:spTree>
+      <p:nvGrpSpPr>
+        <p:cNvPr id="1" name=""/>
+        <p:cNvGrpSpPr/>
+        <p:nvPr/>
+      </p:nvGrpSpPr>
+      <p:grpSpPr>
+        <a:xfrm>
+          <a:off x="0" y="0"/>
+          <a:ext cx="0" cy="0"/>
+          <a:chOff x="0" y="0"/>
+          <a:chExt cx="0" cy="0"/>
+        </a:xfrm>
+      </p:grpSpPr>
+      <p:sp>
+        <p:nvSpPr>
+          <p:cNvPr id="2" name="Title 1">
+            <a:extLst>
+              <a:ext uri="{FF2B5EF4-FFF2-40B4-BE49-F238E27FC236}">
+                <a16:creationId xmlns:a16="http://schemas.microsoft.com/office/drawing/2014/main" id="{B68AA33D-C32C-99A9-885A-D68A074A884A}"/>
+              </a:ext>
+            </a:extLst>
+          </p:cNvPr>
+          <p:cNvSpPr>
+            <a:spLocks noGrp="1"/>
+          </p:cNvSpPr>
+          <p:nvPr>
+            <p:ph type="title"/>
+          </p:nvPr>
+        </p:nvSpPr>
+        <p:spPr/>
+        <p:txBody>
+          <a:bodyPr/>
+          <a:lstStyle/>
+          <a:p>
+            <a:r>
+              <a:rPr lang="en-US" dirty="0"/>
+              <a:t>Conclusion</a:t>
+            </a:r>
+          </a:p>
+        </p:txBody>
+      </p:sp>
+      <p:sp>
+        <p:nvSpPr>
+          <p:cNvPr id="3" name="Content Placeholder 2">
+            <a:extLst>
+              <a:ext uri="{FF2B5EF4-FFF2-40B4-BE49-F238E27FC236}">
+                <a16:creationId xmlns:a16="http://schemas.microsoft.com/office/drawing/2014/main" id="{A15151A3-87F3-C029-D1E1-3406A56AD3D9}"/>
+              </a:ext>
+            </a:extLst>
+          </p:cNvPr>
+          <p:cNvSpPr>
+            <a:spLocks noGrp="1"/>
+          </p:cNvSpPr>
+          <p:nvPr>
+            <p:ph idx="1"/>
+          </p:nvPr>
+        </p:nvSpPr>
+        <p:spPr>
+          <a:xfrm>
+            <a:off x="1451579" y="1853754"/>
+            <a:ext cx="9603275" cy="4199727"/>
+          </a:xfrm>
+        </p:spPr>
+        <p:txBody>
+          <a:bodyPr/>
+          <a:lstStyle/>
+          <a:p>
+            <a:r>
+              <a:rPr lang="en-US" dirty="0"/>
+              <a:t>We can use estimation to predict population stats with small samples. </a:t>
+            </a:r>
+          </a:p>
+          <a:p>
+            <a:r>
+              <a:rPr lang="en-US" dirty="0"/>
+              <a:t>We can use probability and errors to establish confidence in our prediction. </a:t>
+            </a:r>
+          </a:p>
+          <a:p>
+            <a:r>
+              <a:rPr lang="en-US" dirty="0"/>
+              <a:t>This is inferential statistics - making predictions of the unknown. </a:t>
+            </a:r>
+          </a:p>
+          <a:p>
+            <a:pPr lvl="1"/>
+            <a:r>
+              <a:rPr lang="en-US" dirty="0"/>
+              <a:t>Also the foundation for machine learning models. </a:t>
+            </a:r>
+          </a:p>
+          <a:p>
+            <a:pPr lvl="1"/>
+            <a:r>
+              <a:rPr lang="en-US" dirty="0"/>
+              <a:t>Our future ML models are kind of super complex versions of this. </a:t>
+            </a:r>
+          </a:p>
+          <a:p>
+            <a:r>
+              <a:rPr lang="en-US" dirty="0"/>
+              <a:t>Always depends on judgment. </a:t>
+            </a:r>
+          </a:p>
+          <a:p>
+            <a:pPr lvl="1"/>
+            <a:r>
+              <a:rPr lang="en-US" dirty="0"/>
+              <a:t>We need to match distributions, assert ‘good enough’, choose estimators, filter, </a:t>
+            </a:r>
+            <a:r>
+              <a:rPr lang="en-US" dirty="0" err="1"/>
+              <a:t>etc</a:t>
+            </a:r>
+            <a:r>
+              <a:rPr lang="en-US" dirty="0"/>
+              <a:t>…</a:t>
+            </a:r>
+          </a:p>
+          <a:p>
+            <a:pPr lvl="1"/>
+            <a:r>
+              <a:rPr lang="en-US" dirty="0"/>
+              <a:t>We don’t really care about matching stats, we care about accurate predicting. </a:t>
+            </a:r>
+          </a:p>
+        </p:txBody>
+      </p:sp>
+    </p:spTree>
+    <p:extLst>
+      <p:ext uri="{BB962C8B-B14F-4D97-AF65-F5344CB8AC3E}">
+        <p14:creationId xmlns:p14="http://schemas.microsoft.com/office/powerpoint/2010/main" val="4088599478"/>
       </p:ext>
     </p:extLst>
   </p:cSld>
@@ -4281,7 +7561,7 @@
           <p:cNvPr id="2" name="Title 1">
             <a:extLst>
               <a:ext uri="{FF2B5EF4-FFF2-40B4-BE49-F238E27FC236}">
-                <a16:creationId xmlns:a16="http://schemas.microsoft.com/office/drawing/2014/main" id="{C2BD65B1-822E-410F-63F4-3DF1E407FA09}"/>
+                <a16:creationId xmlns:a16="http://schemas.microsoft.com/office/drawing/2014/main" id="{E96098EB-A250-A874-A3B8-BC5C20DA40EA}"/>
               </a:ext>
             </a:extLst>
           </p:cNvPr>
@@ -4289,6 +7569,89 @@
             <a:spLocks noGrp="1"/>
           </p:cNvSpPr>
           <p:nvPr>
+            <p:ph type="ctrTitle"/>
+          </p:nvPr>
+        </p:nvSpPr>
+        <p:spPr/>
+        <p:txBody>
+          <a:bodyPr/>
+          <a:lstStyle/>
+          <a:p>
+            <a:r>
+              <a:rPr lang="en-US" dirty="0"/>
+              <a:t>Sampling and Estimation</a:t>
+            </a:r>
+          </a:p>
+        </p:txBody>
+      </p:sp>
+      <p:sp>
+        <p:nvSpPr>
+          <p:cNvPr id="3" name="Subtitle 2">
+            <a:extLst>
+              <a:ext uri="{FF2B5EF4-FFF2-40B4-BE49-F238E27FC236}">
+                <a16:creationId xmlns:a16="http://schemas.microsoft.com/office/drawing/2014/main" id="{4C9C422E-46E4-BD06-A346-ECE3FC96640D}"/>
+              </a:ext>
+            </a:extLst>
+          </p:cNvPr>
+          <p:cNvSpPr>
+            <a:spLocks noGrp="1"/>
+          </p:cNvSpPr>
+          <p:nvPr>
+            <p:ph type="subTitle" idx="1"/>
+          </p:nvPr>
+        </p:nvSpPr>
+        <p:spPr/>
+        <p:txBody>
+          <a:bodyPr/>
+          <a:lstStyle/>
+          <a:p>
+            <a:endParaRPr lang="en-US"/>
+          </a:p>
+        </p:txBody>
+      </p:sp>
+    </p:spTree>
+    <p:extLst>
+      <p:ext uri="{BB962C8B-B14F-4D97-AF65-F5344CB8AC3E}">
+        <p14:creationId xmlns:p14="http://schemas.microsoft.com/office/powerpoint/2010/main" val="3617321956"/>
+      </p:ext>
+    </p:extLst>
+  </p:cSld>
+  <p:clrMapOvr>
+    <a:masterClrMapping/>
+  </p:clrMapOvr>
+</p:sld>
+</file>
+
+<file path=ppt/slides/slide5.xml><?xml version="1.0" encoding="utf-8"?>
+<p:sld xmlns:a="http://schemas.openxmlformats.org/drawingml/2006/main" xmlns:r="http://schemas.openxmlformats.org/officeDocument/2006/relationships" xmlns:p="http://schemas.openxmlformats.org/presentationml/2006/main">
+  <p:cSld>
+    <p:spTree>
+      <p:nvGrpSpPr>
+        <p:cNvPr id="1" name=""/>
+        <p:cNvGrpSpPr/>
+        <p:nvPr/>
+      </p:nvGrpSpPr>
+      <p:grpSpPr>
+        <a:xfrm>
+          <a:off x="0" y="0"/>
+          <a:ext cx="0" cy="0"/>
+          <a:chOff x="0" y="0"/>
+          <a:chExt cx="0" cy="0"/>
+        </a:xfrm>
+      </p:grpSpPr>
+      <p:sp>
+        <p:nvSpPr>
+          <p:cNvPr id="2" name="Title 1">
+            <a:extLst>
+              <a:ext uri="{FF2B5EF4-FFF2-40B4-BE49-F238E27FC236}">
+                <a16:creationId xmlns:a16="http://schemas.microsoft.com/office/drawing/2014/main" id="{975F99F5-5D45-A4E8-7071-A6F679513A66}"/>
+              </a:ext>
+            </a:extLst>
+          </p:cNvPr>
+          <p:cNvSpPr>
+            <a:spLocks noGrp="1"/>
+          </p:cNvSpPr>
+          <p:nvPr>
             <p:ph type="title"/>
           </p:nvPr>
         </p:nvSpPr>
@@ -4299,7 +7662,7 @@
           <a:p>
             <a:r>
               <a:rPr lang="en-US" dirty="0"/>
-              <a:t>Matching Analytical Distributions</a:t>
+              <a:t>Population and Samples</a:t>
             </a:r>
           </a:p>
         </p:txBody>
@@ -4309,7 +7672,7 @@
           <p:cNvPr id="3" name="Content Placeholder 2">
             <a:extLst>
               <a:ext uri="{FF2B5EF4-FFF2-40B4-BE49-F238E27FC236}">
-                <a16:creationId xmlns:a16="http://schemas.microsoft.com/office/drawing/2014/main" id="{9F4CE85A-BD59-58E7-3526-AB0697D5172C}"/>
+                <a16:creationId xmlns:a16="http://schemas.microsoft.com/office/drawing/2014/main" id="{656471A5-775B-DD25-737A-64390A30390B}"/>
               </a:ext>
             </a:extLst>
           </p:cNvPr>
@@ -4323,12 +7686,302 @@
         <p:spPr>
           <a:xfrm>
             <a:off x="1451579" y="2015732"/>
-            <a:ext cx="9603275" cy="4037749"/>
+            <a:ext cx="9603275" cy="4149541"/>
           </a:xfrm>
         </p:spPr>
         <p:txBody>
-          <a:bodyPr/>
-          <a:lstStyle/>
+          <a:bodyPr>
+            <a:normAutofit/>
+          </a:bodyPr>
+          <a:lstStyle/>
+          <a:p>
+            <a:r>
+              <a:rPr lang="en-US" dirty="0"/>
+              <a:t>Recall:</a:t>
+            </a:r>
+          </a:p>
+          <a:p>
+            <a:pPr lvl="1"/>
+            <a:r>
+              <a:rPr lang="en-US" dirty="0"/>
+              <a:t>Population – the entirety of whatever we are examining. </a:t>
+            </a:r>
+          </a:p>
+          <a:p>
+            <a:pPr lvl="1"/>
+            <a:r>
+              <a:rPr lang="en-US" dirty="0"/>
+              <a:t>Sample – some subset that we pull from the population for analysis. </a:t>
+            </a:r>
+          </a:p>
+          <a:p>
+            <a:r>
+              <a:rPr lang="en-US" dirty="0"/>
+              <a:t>We can’t generally get a population wide dataset. </a:t>
+            </a:r>
+          </a:p>
+          <a:p>
+            <a:pPr lvl="1"/>
+            <a:r>
+              <a:rPr lang="en-US" dirty="0"/>
+              <a:t>If the average height of our sample is 5’10”, we can’t just say that’s true for the population. </a:t>
+            </a:r>
+          </a:p>
+          <a:p>
+            <a:r>
+              <a:rPr lang="en-US" dirty="0"/>
+              <a:t>Our sample should mirror our population, but there is always some difference. </a:t>
+            </a:r>
+          </a:p>
+          <a:p>
+            <a:pPr lvl="1"/>
+            <a:r>
+              <a:rPr lang="en-US" dirty="0"/>
+              <a:t>This introduces some error – the sampling error. </a:t>
+            </a:r>
+          </a:p>
+          <a:p>
+            <a:r>
+              <a:rPr lang="en-US" b="1" dirty="0"/>
+              <a:t>Here, we will use our sample to make estimates of the population. </a:t>
+            </a:r>
+          </a:p>
+        </p:txBody>
+      </p:sp>
+    </p:spTree>
+    <p:extLst>
+      <p:ext uri="{BB962C8B-B14F-4D97-AF65-F5344CB8AC3E}">
+        <p14:creationId xmlns:p14="http://schemas.microsoft.com/office/powerpoint/2010/main" val="2180470633"/>
+      </p:ext>
+    </p:extLst>
+  </p:cSld>
+  <p:clrMapOvr>
+    <a:masterClrMapping/>
+  </p:clrMapOvr>
+</p:sld>
+</file>
+
+<file path=ppt/slides/slide6.xml><?xml version="1.0" encoding="utf-8"?>
+<p:sld xmlns:a="http://schemas.openxmlformats.org/drawingml/2006/main" xmlns:r="http://schemas.openxmlformats.org/officeDocument/2006/relationships" xmlns:p="http://schemas.openxmlformats.org/presentationml/2006/main">
+  <p:cSld>
+    <p:spTree>
+      <p:nvGrpSpPr>
+        <p:cNvPr id="1" name=""/>
+        <p:cNvGrpSpPr/>
+        <p:nvPr/>
+      </p:nvGrpSpPr>
+      <p:grpSpPr>
+        <a:xfrm>
+          <a:off x="0" y="0"/>
+          <a:ext cx="0" cy="0"/>
+          <a:chOff x="0" y="0"/>
+          <a:chExt cx="0" cy="0"/>
+        </a:xfrm>
+      </p:grpSpPr>
+      <p:sp>
+        <p:nvSpPr>
+          <p:cNvPr id="2" name="Title 1">
+            <a:extLst>
+              <a:ext uri="{FF2B5EF4-FFF2-40B4-BE49-F238E27FC236}">
+                <a16:creationId xmlns:a16="http://schemas.microsoft.com/office/drawing/2014/main" id="{BACB2E33-8066-AC7C-137B-904CE0A2B462}"/>
+              </a:ext>
+            </a:extLst>
+          </p:cNvPr>
+          <p:cNvSpPr>
+            <a:spLocks noGrp="1"/>
+          </p:cNvSpPr>
+          <p:nvPr>
+            <p:ph type="title"/>
+          </p:nvPr>
+        </p:nvSpPr>
+        <p:spPr/>
+        <p:txBody>
+          <a:bodyPr/>
+          <a:lstStyle/>
+          <a:p>
+            <a:r>
+              <a:rPr lang="en-US" dirty="0"/>
+              <a:t>Sample Some stuff</a:t>
+            </a:r>
+          </a:p>
+        </p:txBody>
+      </p:sp>
+      <p:sp>
+        <p:nvSpPr>
+          <p:cNvPr id="3" name="Content Placeholder 2">
+            <a:extLst>
+              <a:ext uri="{FF2B5EF4-FFF2-40B4-BE49-F238E27FC236}">
+                <a16:creationId xmlns:a16="http://schemas.microsoft.com/office/drawing/2014/main" id="{FCE69AA4-3F8C-8C84-519B-8556F1B766E9}"/>
+              </a:ext>
+            </a:extLst>
+          </p:cNvPr>
+          <p:cNvSpPr>
+            <a:spLocks noGrp="1"/>
+          </p:cNvSpPr>
+          <p:nvPr>
+            <p:ph idx="1"/>
+          </p:nvPr>
+        </p:nvSpPr>
+        <p:spPr>
+          <a:xfrm>
+            <a:off x="1451579" y="1960776"/>
+            <a:ext cx="9603275" cy="4015818"/>
+          </a:xfrm>
+        </p:spPr>
+        <p:txBody>
+          <a:bodyPr/>
+          <a:lstStyle/>
+          <a:p>
+            <a:r>
+              <a:rPr lang="en-US" dirty="0"/>
+              <a:t>We frequently want to be able to use stats to draw conclusions or make predictions. </a:t>
+            </a:r>
+          </a:p>
+          <a:p>
+            <a:r>
+              <a:rPr lang="en-US" dirty="0"/>
+              <a:t>We may want to compare two distributions. </a:t>
+            </a:r>
+          </a:p>
+          <a:p>
+            <a:pPr lvl="1"/>
+            <a:r>
+              <a:rPr lang="en-US" dirty="0"/>
+              <a:t>Drug trials, societal wide comparisons, testing for normality, hypothesis tests. </a:t>
+            </a:r>
+            <a:r>
+              <a:rPr lang="en-US" dirty="0" err="1"/>
+              <a:t>etc</a:t>
+            </a:r>
+            <a:r>
+              <a:rPr lang="en-US" dirty="0"/>
+              <a:t>…</a:t>
+            </a:r>
+          </a:p>
+          <a:p>
+            <a:r>
+              <a:rPr lang="en-US" dirty="0"/>
+              <a:t>We may want to generalize from sample-&gt;population. </a:t>
+            </a:r>
+          </a:p>
+          <a:p>
+            <a:pPr lvl="1"/>
+            <a:r>
+              <a:rPr lang="en-US" dirty="0"/>
+              <a:t>How many schools vs old folks homes are needed? </a:t>
+            </a:r>
+          </a:p>
+          <a:p>
+            <a:r>
+              <a:rPr lang="en-US" dirty="0"/>
+              <a:t>These actions are probabilistic – we are calculating likelihoods. </a:t>
+            </a:r>
+          </a:p>
+          <a:p>
+            <a:pPr lvl="1"/>
+            <a:r>
+              <a:rPr lang="en-US" dirty="0"/>
+              <a:t>These things aren’t definitive, we get a probability something is true. </a:t>
+            </a:r>
+          </a:p>
+          <a:p>
+            <a:pPr lvl="1"/>
+            <a:r>
+              <a:rPr lang="en-US" dirty="0"/>
+              <a:t>We can also measure our certainty – if we predict it, can we trust that? </a:t>
+            </a:r>
+          </a:p>
+        </p:txBody>
+      </p:sp>
+    </p:spTree>
+    <p:extLst>
+      <p:ext uri="{BB962C8B-B14F-4D97-AF65-F5344CB8AC3E}">
+        <p14:creationId xmlns:p14="http://schemas.microsoft.com/office/powerpoint/2010/main" val="3958679323"/>
+      </p:ext>
+    </p:extLst>
+  </p:cSld>
+  <p:clrMapOvr>
+    <a:masterClrMapping/>
+  </p:clrMapOvr>
+</p:sld>
+</file>
+
+<file path=ppt/slides/slide7.xml><?xml version="1.0" encoding="utf-8"?>
+<p:sld xmlns:a="http://schemas.openxmlformats.org/drawingml/2006/main" xmlns:r="http://schemas.openxmlformats.org/officeDocument/2006/relationships" xmlns:p="http://schemas.openxmlformats.org/presentationml/2006/main">
+  <p:cSld>
+    <p:spTree>
+      <p:nvGrpSpPr>
+        <p:cNvPr id="1" name=""/>
+        <p:cNvGrpSpPr/>
+        <p:nvPr/>
+      </p:nvGrpSpPr>
+      <p:grpSpPr>
+        <a:xfrm>
+          <a:off x="0" y="0"/>
+          <a:ext cx="0" cy="0"/>
+          <a:chOff x="0" y="0"/>
+          <a:chExt cx="0" cy="0"/>
+        </a:xfrm>
+      </p:grpSpPr>
+      <p:sp>
+        <p:nvSpPr>
+          <p:cNvPr id="2" name="Title 1">
+            <a:extLst>
+              <a:ext uri="{FF2B5EF4-FFF2-40B4-BE49-F238E27FC236}">
+                <a16:creationId xmlns:a16="http://schemas.microsoft.com/office/drawing/2014/main" id="{C2BD65B1-822E-410F-63F4-3DF1E407FA09}"/>
+              </a:ext>
+            </a:extLst>
+          </p:cNvPr>
+          <p:cNvSpPr>
+            <a:spLocks noGrp="1"/>
+          </p:cNvSpPr>
+          <p:nvPr>
+            <p:ph type="title"/>
+          </p:nvPr>
+        </p:nvSpPr>
+        <p:spPr/>
+        <p:txBody>
+          <a:bodyPr/>
+          <a:lstStyle/>
+          <a:p>
+            <a:r>
+              <a:rPr lang="en-US" dirty="0"/>
+              <a:t>Matching Analytical Distributions</a:t>
+            </a:r>
+          </a:p>
+        </p:txBody>
+      </p:sp>
+      <p:sp>
+        <p:nvSpPr>
+          <p:cNvPr id="3" name="Content Placeholder 2">
+            <a:extLst>
+              <a:ext uri="{FF2B5EF4-FFF2-40B4-BE49-F238E27FC236}">
+                <a16:creationId xmlns:a16="http://schemas.microsoft.com/office/drawing/2014/main" id="{9F4CE85A-BD59-58E7-3526-AB0697D5172C}"/>
+              </a:ext>
+            </a:extLst>
+          </p:cNvPr>
+          <p:cNvSpPr>
+            <a:spLocks noGrp="1"/>
+          </p:cNvSpPr>
+          <p:nvPr>
+            <p:ph idx="1"/>
+          </p:nvPr>
+        </p:nvSpPr>
+        <p:spPr>
+          <a:xfrm>
+            <a:off x="1451579" y="1853754"/>
+            <a:ext cx="9603275" cy="4199727"/>
+          </a:xfrm>
+        </p:spPr>
+        <p:txBody>
+          <a:bodyPr/>
+          <a:lstStyle/>
+          <a:p>
+            <a:r>
+              <a:rPr lang="en-US" dirty="0"/>
+              <a:t>An analytical distribution is a model – how we expect a value to fall. </a:t>
+            </a:r>
+          </a:p>
           <a:p>
             <a:r>
               <a:rPr lang="en-US" dirty="0"/>
@@ -4379,13 +8032,8 @@
             <a:pPr lvl="1"/>
             <a:r>
               <a:rPr lang="en-US" dirty="0"/>
-              <a:t>We can always make an analytical model, but </a:t>
-            </a:r>
-            <a:r>
-              <a:rPr lang="en-US"/>
-              <a:t>how good is it? </a:t>
-            </a:r>
-            <a:endParaRPr lang="en-US" dirty="0"/>
+              <a:t>We can always make an analytical model, but how good is it? </a:t>
+            </a:r>
           </a:p>
         </p:txBody>
       </p:sp>
@@ -4402,7 +8050,7 @@
 </p:sld>
 </file>
 
-<file path=ppt/slides/slide5.xml><?xml version="1.0" encoding="utf-8"?>
+<file path=ppt/slides/slide8.xml><?xml version="1.0" encoding="utf-8"?>
 <p:sld xmlns:a="http://schemas.openxmlformats.org/drawingml/2006/main" xmlns:r="http://schemas.openxmlformats.org/officeDocument/2006/relationships" xmlns:p="http://schemas.openxmlformats.org/presentationml/2006/main">
   <p:cSld>
     <p:bg>
@@ -4901,421 +8549,6 @@
 </p:sld>
 </file>
 
-<file path=ppt/slides/slide6.xml><?xml version="1.0" encoding="utf-8"?>
-<p:sld xmlns:a="http://schemas.openxmlformats.org/drawingml/2006/main" xmlns:r="http://schemas.openxmlformats.org/officeDocument/2006/relationships" xmlns:p="http://schemas.openxmlformats.org/presentationml/2006/main">
-  <p:cSld>
-    <p:spTree>
-      <p:nvGrpSpPr>
-        <p:cNvPr id="1" name=""/>
-        <p:cNvGrpSpPr/>
-        <p:nvPr/>
-      </p:nvGrpSpPr>
-      <p:grpSpPr>
-        <a:xfrm>
-          <a:off x="0" y="0"/>
-          <a:ext cx="0" cy="0"/>
-          <a:chOff x="0" y="0"/>
-          <a:chExt cx="0" cy="0"/>
-        </a:xfrm>
-      </p:grpSpPr>
-      <p:sp>
-        <p:nvSpPr>
-          <p:cNvPr id="2" name="Title 1">
-            <a:extLst>
-              <a:ext uri="{FF2B5EF4-FFF2-40B4-BE49-F238E27FC236}">
-                <a16:creationId xmlns:a16="http://schemas.microsoft.com/office/drawing/2014/main" id="{5BBBCB09-330E-67CB-A7D1-AEAA682A7378}"/>
-              </a:ext>
-            </a:extLst>
-          </p:cNvPr>
-          <p:cNvSpPr>
-            <a:spLocks noGrp="1"/>
-          </p:cNvSpPr>
-          <p:nvPr>
-            <p:ph type="title"/>
-          </p:nvPr>
-        </p:nvSpPr>
-        <p:spPr/>
-        <p:txBody>
-          <a:bodyPr/>
-          <a:lstStyle/>
-          <a:p>
-            <a:r>
-              <a:rPr lang="en-US" dirty="0"/>
-              <a:t>Error Types</a:t>
-            </a:r>
-          </a:p>
-        </p:txBody>
-      </p:sp>
-      <p:sp>
-        <p:nvSpPr>
-          <p:cNvPr id="3" name="Content Placeholder 2">
-            <a:extLst>
-              <a:ext uri="{FF2B5EF4-FFF2-40B4-BE49-F238E27FC236}">
-                <a16:creationId xmlns:a16="http://schemas.microsoft.com/office/drawing/2014/main" id="{84DE798D-CC78-5128-6D64-8338981E6D7C}"/>
-              </a:ext>
-            </a:extLst>
-          </p:cNvPr>
-          <p:cNvSpPr>
-            <a:spLocks noGrp="1"/>
-          </p:cNvSpPr>
-          <p:nvPr>
-            <p:ph idx="1"/>
-          </p:nvPr>
-        </p:nvSpPr>
-        <p:spPr>
-          <a:xfrm>
-            <a:off x="1451579" y="1853754"/>
-            <a:ext cx="9603275" cy="4199727"/>
-          </a:xfrm>
-        </p:spPr>
-        <p:txBody>
-          <a:bodyPr>
-            <a:normAutofit fontScale="92500" lnSpcReduction="10000"/>
-          </a:bodyPr>
-          <a:lstStyle/>
-          <a:p>
-            <a:r>
-              <a:rPr lang="en-US" dirty="0"/>
-              <a:t>Sampling error:</a:t>
-            </a:r>
-          </a:p>
-          <a:p>
-            <a:pPr lvl="1"/>
-            <a:r>
-              <a:rPr lang="en-US" dirty="0"/>
-              <a:t>We are taking a sample of a population. It should be random and the stats for the sample should match the distribution, but there’s always some error. </a:t>
-            </a:r>
-          </a:p>
-          <a:p>
-            <a:pPr lvl="1"/>
-            <a:r>
-              <a:rPr lang="en-US" dirty="0"/>
-              <a:t>E.g. if you randomly sample heights, and you randomly get three 7ft people, that’s bad luck. </a:t>
-            </a:r>
-          </a:p>
-          <a:p>
-            <a:r>
-              <a:rPr lang="en-US" dirty="0"/>
-              <a:t>Sampling bias:</a:t>
-            </a:r>
-          </a:p>
-          <a:p>
-            <a:pPr lvl="1"/>
-            <a:r>
-              <a:rPr lang="en-US" dirty="0"/>
-              <a:t>Is the sample that we are taking representative of the population?</a:t>
-            </a:r>
-          </a:p>
-          <a:p>
-            <a:pPr lvl="1"/>
-            <a:r>
-              <a:rPr lang="en-US" dirty="0"/>
-              <a:t>Easiest to think of with polling – landlines may not represent the whole population. </a:t>
-            </a:r>
-          </a:p>
-          <a:p>
-            <a:r>
-              <a:rPr lang="en-US" dirty="0"/>
-              <a:t>Measurement error:</a:t>
-            </a:r>
-          </a:p>
-          <a:p>
-            <a:pPr lvl="1"/>
-            <a:r>
-              <a:rPr lang="en-US" dirty="0"/>
-              <a:t>How “off” is the actual measurement of the data? </a:t>
-            </a:r>
-          </a:p>
-          <a:p>
-            <a:pPr lvl="1"/>
-            <a:r>
-              <a:rPr lang="en-US" dirty="0"/>
-              <a:t>E.g. when measuring heights, a ruler has some error.</a:t>
-            </a:r>
-          </a:p>
-          <a:p>
-            <a:r>
-              <a:rPr lang="en-US" dirty="0"/>
-              <a:t>We can’t address the last two – they happen before we get the data. </a:t>
-            </a:r>
-          </a:p>
-        </p:txBody>
-      </p:sp>
-    </p:spTree>
-    <p:extLst>
-      <p:ext uri="{BB962C8B-B14F-4D97-AF65-F5344CB8AC3E}">
-        <p14:creationId xmlns:p14="http://schemas.microsoft.com/office/powerpoint/2010/main" val="1976797275"/>
-      </p:ext>
-    </p:extLst>
-  </p:cSld>
-  <p:clrMapOvr>
-    <a:masterClrMapping/>
-  </p:clrMapOvr>
-</p:sld>
-</file>
-
-<file path=ppt/slides/slide7.xml><?xml version="1.0" encoding="utf-8"?>
-<p:sld xmlns:a="http://schemas.openxmlformats.org/drawingml/2006/main" xmlns:r="http://schemas.openxmlformats.org/officeDocument/2006/relationships" xmlns:p="http://schemas.openxmlformats.org/presentationml/2006/main">
-  <p:cSld>
-    <p:spTree>
-      <p:nvGrpSpPr>
-        <p:cNvPr id="1" name=""/>
-        <p:cNvGrpSpPr/>
-        <p:nvPr/>
-      </p:nvGrpSpPr>
-      <p:grpSpPr>
-        <a:xfrm>
-          <a:off x="0" y="0"/>
-          <a:ext cx="0" cy="0"/>
-          <a:chOff x="0" y="0"/>
-          <a:chExt cx="0" cy="0"/>
-        </a:xfrm>
-      </p:grpSpPr>
-      <p:sp>
-        <p:nvSpPr>
-          <p:cNvPr id="2" name="Title 1">
-            <a:extLst>
-              <a:ext uri="{FF2B5EF4-FFF2-40B4-BE49-F238E27FC236}">
-                <a16:creationId xmlns:a16="http://schemas.microsoft.com/office/drawing/2014/main" id="{5A95FECA-0DE7-E666-AB37-57E9018B6DFC}"/>
-              </a:ext>
-            </a:extLst>
-          </p:cNvPr>
-          <p:cNvSpPr>
-            <a:spLocks noGrp="1"/>
-          </p:cNvSpPr>
-          <p:nvPr>
-            <p:ph type="title"/>
-          </p:nvPr>
-        </p:nvSpPr>
-        <p:spPr/>
-        <p:txBody>
-          <a:bodyPr/>
-          <a:lstStyle/>
-          <a:p>
-            <a:r>
-              <a:rPr lang="en-US" dirty="0"/>
-              <a:t>Estimation</a:t>
-            </a:r>
-          </a:p>
-        </p:txBody>
-      </p:sp>
-      <p:sp>
-        <p:nvSpPr>
-          <p:cNvPr id="3" name="Content Placeholder 2">
-            <a:extLst>
-              <a:ext uri="{FF2B5EF4-FFF2-40B4-BE49-F238E27FC236}">
-                <a16:creationId xmlns:a16="http://schemas.microsoft.com/office/drawing/2014/main" id="{B215A6CA-60D9-2612-A200-6FAA0E9D7B6C}"/>
-              </a:ext>
-            </a:extLst>
-          </p:cNvPr>
-          <p:cNvSpPr>
-            <a:spLocks noGrp="1"/>
-          </p:cNvSpPr>
-          <p:nvPr>
-            <p:ph idx="1"/>
-          </p:nvPr>
-        </p:nvSpPr>
-        <p:spPr>
-          <a:xfrm>
-            <a:off x="1451579" y="2015732"/>
-            <a:ext cx="9603275" cy="4037749"/>
-          </a:xfrm>
-        </p:spPr>
-        <p:txBody>
-          <a:bodyPr>
-            <a:normAutofit/>
-          </a:bodyPr>
-          <a:lstStyle/>
-          <a:p>
-            <a:r>
-              <a:rPr lang="en-US" dirty="0"/>
-              <a:t>We can use a sample to draw inferences about the population as a whole:</a:t>
-            </a:r>
-          </a:p>
-          <a:p>
-            <a:pPr lvl="1"/>
-            <a:r>
-              <a:rPr lang="en-US" dirty="0"/>
-              <a:t>This is what statisticians do with a census or pollsters with polls (soon-</a:t>
-            </a:r>
-            <a:r>
-              <a:rPr lang="en-US" dirty="0" err="1"/>
-              <a:t>ish</a:t>
-            </a:r>
-            <a:r>
-              <a:rPr lang="en-US" dirty="0"/>
-              <a:t>). </a:t>
-            </a:r>
-          </a:p>
-          <a:p>
-            <a:pPr lvl="1"/>
-            <a:r>
-              <a:rPr lang="en-US" dirty="0"/>
-              <a:t>This is called inferential statistics – using stats to predict. ML grows from this. </a:t>
-            </a:r>
-          </a:p>
-          <a:p>
-            <a:pPr lvl="1"/>
-            <a:endParaRPr lang="en-US" dirty="0"/>
-          </a:p>
-          <a:p>
-            <a:r>
-              <a:rPr lang="en-US" dirty="0"/>
-              <a:t>The process is:</a:t>
-            </a:r>
-          </a:p>
-          <a:p>
-            <a:pPr lvl="1"/>
-            <a:r>
-              <a:rPr lang="en-US" dirty="0"/>
-              <a:t>Match our sample to an analytical distribution. </a:t>
-            </a:r>
-          </a:p>
-          <a:p>
-            <a:pPr lvl="1"/>
-            <a:r>
-              <a:rPr lang="en-US" dirty="0"/>
-              <a:t>Generate random values that fit that distribution. </a:t>
-            </a:r>
-          </a:p>
-          <a:p>
-            <a:pPr lvl="1"/>
-            <a:r>
-              <a:rPr lang="en-US" dirty="0"/>
-              <a:t>Use the aggregates of those trails along with error measures to draw inferences about the population. </a:t>
-            </a:r>
-          </a:p>
-        </p:txBody>
-      </p:sp>
-    </p:spTree>
-    <p:extLst>
-      <p:ext uri="{BB962C8B-B14F-4D97-AF65-F5344CB8AC3E}">
-        <p14:creationId xmlns:p14="http://schemas.microsoft.com/office/powerpoint/2010/main" val="896942143"/>
-      </p:ext>
-    </p:extLst>
-  </p:cSld>
-  <p:clrMapOvr>
-    <a:masterClrMapping/>
-  </p:clrMapOvr>
-</p:sld>
-</file>
-
-<file path=ppt/slides/slide8.xml><?xml version="1.0" encoding="utf-8"?>
-<p:sld xmlns:a="http://schemas.openxmlformats.org/drawingml/2006/main" xmlns:r="http://schemas.openxmlformats.org/officeDocument/2006/relationships" xmlns:p="http://schemas.openxmlformats.org/presentationml/2006/main">
-  <p:cSld>
-    <p:spTree>
-      <p:nvGrpSpPr>
-        <p:cNvPr id="1" name=""/>
-        <p:cNvGrpSpPr/>
-        <p:nvPr/>
-      </p:nvGrpSpPr>
-      <p:grpSpPr>
-        <a:xfrm>
-          <a:off x="0" y="0"/>
-          <a:ext cx="0" cy="0"/>
-          <a:chOff x="0" y="0"/>
-          <a:chExt cx="0" cy="0"/>
-        </a:xfrm>
-      </p:grpSpPr>
-      <p:sp>
-        <p:nvSpPr>
-          <p:cNvPr id="2" name="Title 1">
-            <a:extLst>
-              <a:ext uri="{FF2B5EF4-FFF2-40B4-BE49-F238E27FC236}">
-                <a16:creationId xmlns:a16="http://schemas.microsoft.com/office/drawing/2014/main" id="{500CB30F-8FC5-BA2F-DDAE-26A52B671961}"/>
-              </a:ext>
-            </a:extLst>
-          </p:cNvPr>
-          <p:cNvSpPr>
-            <a:spLocks noGrp="1"/>
-          </p:cNvSpPr>
-          <p:nvPr>
-            <p:ph type="title"/>
-          </p:nvPr>
-        </p:nvSpPr>
-        <p:spPr/>
-        <p:txBody>
-          <a:bodyPr/>
-          <a:lstStyle/>
-          <a:p>
-            <a:r>
-              <a:rPr lang="en-US" dirty="0"/>
-              <a:t>Estimators</a:t>
-            </a:r>
-          </a:p>
-        </p:txBody>
-      </p:sp>
-      <p:sp>
-        <p:nvSpPr>
-          <p:cNvPr id="3" name="Content Placeholder 2">
-            <a:extLst>
-              <a:ext uri="{FF2B5EF4-FFF2-40B4-BE49-F238E27FC236}">
-                <a16:creationId xmlns:a16="http://schemas.microsoft.com/office/drawing/2014/main" id="{8099297A-60F8-D213-DA79-218C928CEC26}"/>
-              </a:ext>
-            </a:extLst>
-          </p:cNvPr>
-          <p:cNvSpPr>
-            <a:spLocks noGrp="1"/>
-          </p:cNvSpPr>
-          <p:nvPr>
-            <p:ph idx="1"/>
-          </p:nvPr>
-        </p:nvSpPr>
-        <p:spPr>
-          <a:xfrm>
-            <a:off x="1451579" y="2015732"/>
-            <a:ext cx="9603275" cy="4037749"/>
-          </a:xfrm>
-        </p:spPr>
-        <p:txBody>
-          <a:bodyPr/>
-          <a:lstStyle/>
-          <a:p>
-            <a:r>
-              <a:rPr lang="en-US" dirty="0"/>
-              <a:t>Estimators are a bigger thing in math-y stats than data analytics-y stats. </a:t>
-            </a:r>
-          </a:p>
-          <a:p>
-            <a:r>
-              <a:rPr lang="en-US" dirty="0"/>
-              <a:t>The estimator is basically the thing we use from the sample to estimate the population. </a:t>
-            </a:r>
-          </a:p>
-          <a:p>
-            <a:r>
-              <a:rPr lang="en-US" dirty="0"/>
-              <a:t>For normal distribution type of things, it’ll be the mean. </a:t>
-            </a:r>
-          </a:p>
-          <a:p>
-            <a:endParaRPr lang="en-US" dirty="0"/>
-          </a:p>
-          <a:p>
-            <a:r>
-              <a:rPr lang="en-US" dirty="0"/>
-              <a:t>In layman's terms, our estimators are what we use to create the analytical distributions from the empirical data. We want those to not introduce any error themselves. </a:t>
-            </a:r>
-          </a:p>
-          <a:p>
-            <a:pPr lvl="1"/>
-            <a:endParaRPr lang="en-US" dirty="0"/>
-          </a:p>
-        </p:txBody>
-      </p:sp>
-    </p:spTree>
-    <p:extLst>
-      <p:ext uri="{BB962C8B-B14F-4D97-AF65-F5344CB8AC3E}">
-        <p14:creationId xmlns:p14="http://schemas.microsoft.com/office/powerpoint/2010/main" val="2382552355"/>
-      </p:ext>
-    </p:extLst>
-  </p:cSld>
-  <p:clrMapOvr>
-    <a:masterClrMapping/>
-  </p:clrMapOvr>
-</p:sld>
-</file>
-
 <file path=ppt/slides/slide9.xml><?xml version="1.0" encoding="utf-8"?>
 <p:sld xmlns:a="http://schemas.openxmlformats.org/drawingml/2006/main" xmlns:r="http://schemas.openxmlformats.org/officeDocument/2006/relationships" xmlns:p="http://schemas.openxmlformats.org/presentationml/2006/main">
   <p:cSld>
@@ -5338,7 +8571,7 @@
           <p:cNvPr id="2" name="Title 1">
             <a:extLst>
               <a:ext uri="{FF2B5EF4-FFF2-40B4-BE49-F238E27FC236}">
-                <a16:creationId xmlns:a16="http://schemas.microsoft.com/office/drawing/2014/main" id="{520D80B7-4916-A592-E090-DF428874532D}"/>
+                <a16:creationId xmlns:a16="http://schemas.microsoft.com/office/drawing/2014/main" id="{5BBBCB09-330E-67CB-A7D1-AEAA682A7378}"/>
               </a:ext>
             </a:extLst>
           </p:cNvPr>
@@ -5356,7 +8589,7 @@
           <a:p>
             <a:r>
               <a:rPr lang="en-US" dirty="0"/>
-              <a:t>Trials</a:t>
+              <a:t>Error Types</a:t>
             </a:r>
           </a:p>
         </p:txBody>
@@ -5366,7 +8599,7 @@
           <p:cNvPr id="3" name="Content Placeholder 2">
             <a:extLst>
               <a:ext uri="{FF2B5EF4-FFF2-40B4-BE49-F238E27FC236}">
-                <a16:creationId xmlns:a16="http://schemas.microsoft.com/office/drawing/2014/main" id="{7C90C60B-00BE-4416-FDD0-956323852785}"/>
+                <a16:creationId xmlns:a16="http://schemas.microsoft.com/office/drawing/2014/main" id="{84DE798D-CC78-5128-6D64-8338981E6D7C}"/>
               </a:ext>
             </a:extLst>
           </p:cNvPr>
@@ -5380,73 +8613,86 @@
         <p:spPr>
           <a:xfrm>
             <a:off x="1451579" y="1853754"/>
-            <a:ext cx="9603275" cy="4335173"/>
+            <a:ext cx="9603275" cy="4199727"/>
           </a:xfrm>
         </p:spPr>
         <p:txBody>
-          <a:bodyPr/>
-          <a:lstStyle/>
-          <a:p>
-            <a:r>
-              <a:rPr lang="en-US" dirty="0"/>
-              <a:t>Once we have a matching distribution, we can make predictions via running trials. </a:t>
-            </a:r>
-          </a:p>
-          <a:p>
-            <a:r>
-              <a:rPr lang="en-US" dirty="0"/>
-              <a:t>Each trial has a few steps:</a:t>
-            </a:r>
-          </a:p>
-          <a:p>
-            <a:pPr lvl="1"/>
-            <a:r>
-              <a:rPr lang="en-US" dirty="0"/>
-              <a:t>Create an analytical distribution from the estimator(s). </a:t>
-            </a:r>
-          </a:p>
-          <a:p>
-            <a:pPr lvl="1"/>
-            <a:r>
-              <a:rPr lang="en-US" dirty="0"/>
-              <a:t>Generate a bunch of values from that distribution. </a:t>
-            </a:r>
-          </a:p>
-          <a:p>
-            <a:pPr lvl="1"/>
-            <a:r>
-              <a:rPr lang="en-US" dirty="0"/>
-              <a:t>Calculate the (usually) mean of those generated values. </a:t>
-            </a:r>
-          </a:p>
-          <a:p>
-            <a:pPr lvl="1"/>
-            <a:r>
-              <a:rPr lang="en-US" dirty="0"/>
-              <a:t>Create a CDF of all of the means. </a:t>
-            </a:r>
-          </a:p>
-          <a:p>
-            <a:r>
-              <a:rPr lang="en-US" dirty="0"/>
-              <a:t>In effect, we are predicting what we expect the mean to be, based on the values from the empirical data, then making a distribution of those means. </a:t>
-            </a:r>
-          </a:p>
-          <a:p>
-            <a:r>
-              <a:rPr lang="en-US" dirty="0"/>
-              <a:t>Our estimate is the mean of those means – but how accurate is it…</a:t>
-            </a:r>
-          </a:p>
-          <a:p>
-            <a:endParaRPr lang="en-US" dirty="0"/>
+          <a:bodyPr>
+            <a:normAutofit fontScale="92500" lnSpcReduction="10000"/>
+          </a:bodyPr>
+          <a:lstStyle/>
+          <a:p>
+            <a:r>
+              <a:rPr lang="en-US" dirty="0"/>
+              <a:t>Sampling error:</a:t>
+            </a:r>
+          </a:p>
+          <a:p>
+            <a:pPr lvl="1"/>
+            <a:r>
+              <a:rPr lang="en-US" dirty="0"/>
+              <a:t>We are taking a sample of a population. It should be random and the stats for the sample should match the distribution, but there’s always some error. </a:t>
+            </a:r>
+          </a:p>
+          <a:p>
+            <a:pPr lvl="1"/>
+            <a:r>
+              <a:rPr lang="en-US" dirty="0"/>
+              <a:t>E.g. if you randomly sample heights, and you randomly get three 7ft people, that’s bad luck. </a:t>
+            </a:r>
+          </a:p>
+          <a:p>
+            <a:r>
+              <a:rPr lang="en-US" dirty="0"/>
+              <a:t>Sampling bias:</a:t>
+            </a:r>
+          </a:p>
+          <a:p>
+            <a:pPr lvl="1"/>
+            <a:r>
+              <a:rPr lang="en-US" dirty="0"/>
+              <a:t>Is the sample that we are taking representative of the population?</a:t>
+            </a:r>
+          </a:p>
+          <a:p>
+            <a:pPr lvl="1"/>
+            <a:r>
+              <a:rPr lang="en-US" dirty="0"/>
+              <a:t>Easiest to think of with polling – landlines may not represent the whole population. </a:t>
+            </a:r>
+          </a:p>
+          <a:p>
+            <a:r>
+              <a:rPr lang="en-US" dirty="0"/>
+              <a:t>Measurement error:</a:t>
+            </a:r>
+          </a:p>
+          <a:p>
+            <a:pPr lvl="1"/>
+            <a:r>
+              <a:rPr lang="en-US" dirty="0"/>
+              <a:t>How “off” is the actual measurement of the data? </a:t>
+            </a:r>
+          </a:p>
+          <a:p>
+            <a:pPr lvl="1"/>
+            <a:r>
+              <a:rPr lang="en-US" dirty="0"/>
+              <a:t>E.g. when measuring heights, a ruler has some error.</a:t>
+            </a:r>
+          </a:p>
+          <a:p>
+            <a:r>
+              <a:rPr lang="en-US" dirty="0"/>
+              <a:t>We can’t address the last two – they happen before we get the data, we’d need to act earlier.</a:t>
+            </a:r>
           </a:p>
         </p:txBody>
       </p:sp>
     </p:spTree>
     <p:extLst>
       <p:ext uri="{BB962C8B-B14F-4D97-AF65-F5344CB8AC3E}">
-        <p14:creationId xmlns:p14="http://schemas.microsoft.com/office/powerpoint/2010/main" val="671170779"/>
+        <p14:creationId xmlns:p14="http://schemas.microsoft.com/office/powerpoint/2010/main" val="1976797275"/>
       </p:ext>
     </p:extLst>
   </p:cSld>

--- a/reference_material/slides/016_Sampling_Estimation.pptx
+++ b/reference_material/slides/016_Sampling_Estimation.pptx
@@ -17,26 +17,27 @@
     <p:sldId id="276" r:id="rId11"/>
     <p:sldId id="277" r:id="rId12"/>
     <p:sldId id="258" r:id="rId13"/>
-    <p:sldId id="259" r:id="rId14"/>
-    <p:sldId id="278" r:id="rId15"/>
-    <p:sldId id="279" r:id="rId16"/>
-    <p:sldId id="281" r:id="rId17"/>
-    <p:sldId id="280" r:id="rId18"/>
-    <p:sldId id="260" r:id="rId19"/>
-    <p:sldId id="270" r:id="rId20"/>
-    <p:sldId id="284" r:id="rId21"/>
-    <p:sldId id="285" r:id="rId22"/>
-    <p:sldId id="271" r:id="rId23"/>
-    <p:sldId id="261" r:id="rId24"/>
-    <p:sldId id="272" r:id="rId25"/>
-    <p:sldId id="262" r:id="rId26"/>
-    <p:sldId id="263" r:id="rId27"/>
-    <p:sldId id="273" r:id="rId28"/>
-    <p:sldId id="274" r:id="rId29"/>
-    <p:sldId id="282" r:id="rId30"/>
-    <p:sldId id="286" r:id="rId31"/>
-    <p:sldId id="287" r:id="rId32"/>
-    <p:sldId id="275" r:id="rId33"/>
+    <p:sldId id="288" r:id="rId14"/>
+    <p:sldId id="259" r:id="rId15"/>
+    <p:sldId id="278" r:id="rId16"/>
+    <p:sldId id="279" r:id="rId17"/>
+    <p:sldId id="281" r:id="rId18"/>
+    <p:sldId id="280" r:id="rId19"/>
+    <p:sldId id="260" r:id="rId20"/>
+    <p:sldId id="270" r:id="rId21"/>
+    <p:sldId id="284" r:id="rId22"/>
+    <p:sldId id="285" r:id="rId23"/>
+    <p:sldId id="271" r:id="rId24"/>
+    <p:sldId id="261" r:id="rId25"/>
+    <p:sldId id="272" r:id="rId26"/>
+    <p:sldId id="262" r:id="rId27"/>
+    <p:sldId id="263" r:id="rId28"/>
+    <p:sldId id="273" r:id="rId29"/>
+    <p:sldId id="274" r:id="rId30"/>
+    <p:sldId id="282" r:id="rId31"/>
+    <p:sldId id="286" r:id="rId32"/>
+    <p:sldId id="287" r:id="rId33"/>
+    <p:sldId id="275" r:id="rId34"/>
   </p:sldIdLst>
   <p:sldSz cx="12192000" cy="6858000"/>
   <p:notesSz cx="6858000" cy="9144000"/>
@@ -282,7 +283,7 @@
           <a:p>
             <a:fld id="{DD771BF5-A32E-1A45-9C2B-1802D67C77D5}" type="datetimeFigureOut">
               <a:rPr lang="en-US" smtClean="0"/>
-              <a:t>10/6/25</a:t>
+              <a:t>10/17/25</a:t>
             </a:fld>
             <a:endParaRPr lang="en-US"/>
           </a:p>
@@ -493,7 +494,7 @@
           <a:p>
             <a:fld id="{DD771BF5-A32E-1A45-9C2B-1802D67C77D5}" type="datetimeFigureOut">
               <a:rPr lang="en-US" smtClean="0"/>
-              <a:t>10/6/25</a:t>
+              <a:t>10/17/25</a:t>
             </a:fld>
             <a:endParaRPr lang="en-US"/>
           </a:p>
@@ -708,7 +709,7 @@
           <a:p>
             <a:fld id="{DD771BF5-A32E-1A45-9C2B-1802D67C77D5}" type="datetimeFigureOut">
               <a:rPr lang="en-US" smtClean="0"/>
-              <a:t>10/6/25</a:t>
+              <a:t>10/17/25</a:t>
             </a:fld>
             <a:endParaRPr lang="en-US"/>
           </a:p>
@@ -909,7 +910,7 @@
           <a:p>
             <a:fld id="{DD771BF5-A32E-1A45-9C2B-1802D67C77D5}" type="datetimeFigureOut">
               <a:rPr lang="en-US" smtClean="0"/>
-              <a:t>10/6/25</a:t>
+              <a:t>10/17/25</a:t>
             </a:fld>
             <a:endParaRPr lang="en-US"/>
           </a:p>
@@ -1188,7 +1189,7 @@
           <a:p>
             <a:fld id="{DD771BF5-A32E-1A45-9C2B-1802D67C77D5}" type="datetimeFigureOut">
               <a:rPr lang="en-US" smtClean="0"/>
-              <a:t>10/6/25</a:t>
+              <a:t>10/17/25</a:t>
             </a:fld>
             <a:endParaRPr lang="en-US"/>
           </a:p>
@@ -1456,7 +1457,7 @@
           <a:p>
             <a:fld id="{DD771BF5-A32E-1A45-9C2B-1802D67C77D5}" type="datetimeFigureOut">
               <a:rPr lang="en-US" smtClean="0"/>
-              <a:t>10/6/25</a:t>
+              <a:t>10/17/25</a:t>
             </a:fld>
             <a:endParaRPr lang="en-US"/>
           </a:p>
@@ -1872,7 +1873,7 @@
           <a:p>
             <a:fld id="{DD771BF5-A32E-1A45-9C2B-1802D67C77D5}" type="datetimeFigureOut">
               <a:rPr lang="en-US" smtClean="0"/>
-              <a:t>10/6/25</a:t>
+              <a:t>10/17/25</a:t>
             </a:fld>
             <a:endParaRPr lang="en-US"/>
           </a:p>
@@ -2021,7 +2022,7 @@
           <a:p>
             <a:fld id="{DD771BF5-A32E-1A45-9C2B-1802D67C77D5}" type="datetimeFigureOut">
               <a:rPr lang="en-US" smtClean="0"/>
-              <a:t>10/6/25</a:t>
+              <a:t>10/17/25</a:t>
             </a:fld>
             <a:endParaRPr lang="en-US"/>
           </a:p>
@@ -2147,7 +2148,7 @@
           <a:p>
             <a:fld id="{DD771BF5-A32E-1A45-9C2B-1802D67C77D5}" type="datetimeFigureOut">
               <a:rPr lang="en-US" smtClean="0"/>
-              <a:t>10/6/25</a:t>
+              <a:t>10/17/25</a:t>
             </a:fld>
             <a:endParaRPr lang="en-US"/>
           </a:p>
@@ -2398,7 +2399,7 @@
           <a:p>
             <a:fld id="{DD771BF5-A32E-1A45-9C2B-1802D67C77D5}" type="datetimeFigureOut">
               <a:rPr lang="en-US" smtClean="0"/>
-              <a:t>10/6/25</a:t>
+              <a:t>10/17/25</a:t>
             </a:fld>
             <a:endParaRPr lang="en-US"/>
           </a:p>
@@ -2843,7 +2844,7 @@
           <a:p>
             <a:fld id="{DD771BF5-A32E-1A45-9C2B-1802D67C77D5}" type="datetimeFigureOut">
               <a:rPr lang="en-US" smtClean="0"/>
-              <a:t>10/6/25</a:t>
+              <a:t>10/17/25</a:t>
             </a:fld>
             <a:endParaRPr lang="en-US"/>
           </a:p>
@@ -3010,6 +3011,13 @@
             <a:schemeClr val="lt1"/>
           </a:fontRef>
         </p:style>
+        <p:txBody>
+          <a:bodyPr/>
+          <a:lstStyle/>
+          <a:p>
+            <a:endParaRPr lang="en-US"/>
+          </a:p>
+        </p:txBody>
       </p:sp>
       <p:pic>
         <p:nvPicPr>
@@ -3170,7 +3178,7 @@
           <a:p>
             <a:fld id="{DD771BF5-A32E-1A45-9C2B-1802D67C77D5}" type="datetimeFigureOut">
               <a:rPr lang="en-US" smtClean="0"/>
-              <a:t>10/6/25</a:t>
+              <a:t>10/17/25</a:t>
             </a:fld>
             <a:endParaRPr lang="en-US"/>
           </a:p>
@@ -3756,6 +3764,12 @@
             </a:r>
           </a:p>
           <a:p>
+            <a:r>
+              <a:rPr lang="en-US" dirty="0"/>
+              <a:t>What do we know about the population and how sure are we? </a:t>
+            </a:r>
+          </a:p>
+          <a:p>
             <a:pPr lvl="1"/>
             <a:endParaRPr lang="en-US" dirty="0"/>
           </a:p>
@@ -4181,7 +4195,7 @@
           <p:cNvPr id="2" name="Title 1">
             <a:extLst>
               <a:ext uri="{FF2B5EF4-FFF2-40B4-BE49-F238E27FC236}">
-                <a16:creationId xmlns:a16="http://schemas.microsoft.com/office/drawing/2014/main" id="{500CB30F-8FC5-BA2F-DDAE-26A52B671961}"/>
+                <a16:creationId xmlns:a16="http://schemas.microsoft.com/office/drawing/2014/main" id="{C7AAC4B8-DE91-7AC5-0008-BAF9481B9A25}"/>
               </a:ext>
             </a:extLst>
           </p:cNvPr>
@@ -4199,7 +4213,7 @@
           <a:p>
             <a:r>
               <a:rPr lang="en-US" dirty="0"/>
-              <a:t>Estimators</a:t>
+              <a:t>In other words…</a:t>
             </a:r>
           </a:p>
         </p:txBody>
@@ -4209,7 +4223,7 @@
           <p:cNvPr id="3" name="Content Placeholder 2">
             <a:extLst>
               <a:ext uri="{FF2B5EF4-FFF2-40B4-BE49-F238E27FC236}">
-                <a16:creationId xmlns:a16="http://schemas.microsoft.com/office/drawing/2014/main" id="{8099297A-60F8-D213-DA79-218C928CEC26}"/>
+                <a16:creationId xmlns:a16="http://schemas.microsoft.com/office/drawing/2014/main" id="{D319FE0D-AEDA-AC41-4E61-5AFC17321629}"/>
               </a:ext>
             </a:extLst>
           </p:cNvPr>
@@ -4222,8 +4236,8 @@
         </p:nvSpPr>
         <p:spPr>
           <a:xfrm>
-            <a:off x="1451579" y="1932496"/>
-            <a:ext cx="9603275" cy="4120986"/>
+            <a:off x="1451579" y="2015732"/>
+            <a:ext cx="9603275" cy="4037749"/>
           </a:xfrm>
         </p:spPr>
         <p:txBody>
@@ -4232,34 +4246,60 @@
           <a:p>
             <a:r>
               <a:rPr lang="en-US" dirty="0"/>
-              <a:t>Estimators are what we capture from a sample to make a model. </a:t>
-            </a:r>
-          </a:p>
-          <a:p>
-            <a:r>
-              <a:rPr lang="en-US" dirty="0"/>
-              <a:t>Estimators are a bigger thing in math-y stats than data analytics-y stats. </a:t>
-            </a:r>
-          </a:p>
-          <a:p>
-            <a:r>
-              <a:rPr lang="en-US" dirty="0"/>
-              <a:t>The estimator is basically the thing we use from the sample to estimate the population. </a:t>
-            </a:r>
-          </a:p>
-          <a:p>
-            <a:r>
-              <a:rPr lang="en-US" dirty="0"/>
-              <a:t>For normal distribution type of things, it’ll be the mean and standard deviation. </a:t>
-            </a:r>
-          </a:p>
-          <a:p>
-            <a:endParaRPr lang="en-US" dirty="0"/>
-          </a:p>
-          <a:p>
-            <a:r>
-              <a:rPr lang="en-US" dirty="0"/>
-              <a:t>In layman's terms, our estimators are what we use to create the analytical distributions from the empirical data. We want those to not introduce any error themselves. </a:t>
+              <a:t>In the matching a distribution part we establish a model for data of this distribution. </a:t>
+            </a:r>
+          </a:p>
+          <a:p>
+            <a:pPr lvl="1"/>
+            <a:r>
+              <a:rPr lang="en-US" dirty="0"/>
+              <a:t>This is made from estimators drawn from the empirical data. </a:t>
+            </a:r>
+          </a:p>
+          <a:p>
+            <a:r>
+              <a:rPr lang="en-US" dirty="0"/>
+              <a:t>The model (anal. Dist.) is effectively an expectation for the population distribution. </a:t>
+            </a:r>
+          </a:p>
+          <a:p>
+            <a:r>
+              <a:rPr lang="en-US" dirty="0"/>
+              <a:t>In simulating things we:</a:t>
+            </a:r>
+          </a:p>
+          <a:p>
+            <a:pPr lvl="1"/>
+            <a:r>
+              <a:rPr lang="en-US" dirty="0"/>
+              <a:t>Generate a new random dataset from the model. </a:t>
+            </a:r>
+          </a:p>
+          <a:p>
+            <a:pPr lvl="1"/>
+            <a:r>
+              <a:rPr lang="en-US" dirty="0"/>
+              <a:t>Tabulate stats of that new dataset (usually the mean of the generated data). </a:t>
+            </a:r>
+          </a:p>
+          <a:p>
+            <a:pPr lvl="1"/>
+            <a:r>
+              <a:rPr lang="en-US" dirty="0"/>
+              <a:t>Evaluate the results of many trials. </a:t>
+            </a:r>
+          </a:p>
+          <a:p>
+            <a:r>
+              <a:rPr lang="en-US" dirty="0"/>
+              <a:t>A.k.a. If I took many (1000+) samples from my ‘population’, what would they look like? </a:t>
+            </a:r>
+          </a:p>
+          <a:p>
+            <a:pPr lvl="1"/>
+            <a:r>
+              <a:rPr lang="en-US" dirty="0"/>
+              <a:t>The population here is the model – analytical distribution. </a:t>
             </a:r>
           </a:p>
           <a:p>
@@ -4271,7 +4311,7 @@
     </p:spTree>
     <p:extLst>
       <p:ext uri="{BB962C8B-B14F-4D97-AF65-F5344CB8AC3E}">
-        <p14:creationId xmlns:p14="http://schemas.microsoft.com/office/powerpoint/2010/main" val="2382552355"/>
+        <p14:creationId xmlns:p14="http://schemas.microsoft.com/office/powerpoint/2010/main" val="4052614268"/>
       </p:ext>
     </p:extLst>
   </p:cSld>
@@ -4303,6 +4343,128 @@
           <p:cNvPr id="2" name="Title 1">
             <a:extLst>
               <a:ext uri="{FF2B5EF4-FFF2-40B4-BE49-F238E27FC236}">
+                <a16:creationId xmlns:a16="http://schemas.microsoft.com/office/drawing/2014/main" id="{500CB30F-8FC5-BA2F-DDAE-26A52B671961}"/>
+              </a:ext>
+            </a:extLst>
+          </p:cNvPr>
+          <p:cNvSpPr>
+            <a:spLocks noGrp="1"/>
+          </p:cNvSpPr>
+          <p:nvPr>
+            <p:ph type="title"/>
+          </p:nvPr>
+        </p:nvSpPr>
+        <p:spPr/>
+        <p:txBody>
+          <a:bodyPr/>
+          <a:lstStyle/>
+          <a:p>
+            <a:r>
+              <a:rPr lang="en-US" dirty="0"/>
+              <a:t>Estimators</a:t>
+            </a:r>
+          </a:p>
+        </p:txBody>
+      </p:sp>
+      <p:sp>
+        <p:nvSpPr>
+          <p:cNvPr id="3" name="Content Placeholder 2">
+            <a:extLst>
+              <a:ext uri="{FF2B5EF4-FFF2-40B4-BE49-F238E27FC236}">
+                <a16:creationId xmlns:a16="http://schemas.microsoft.com/office/drawing/2014/main" id="{8099297A-60F8-D213-DA79-218C928CEC26}"/>
+              </a:ext>
+            </a:extLst>
+          </p:cNvPr>
+          <p:cNvSpPr>
+            <a:spLocks noGrp="1"/>
+          </p:cNvSpPr>
+          <p:nvPr>
+            <p:ph idx="1"/>
+          </p:nvPr>
+        </p:nvSpPr>
+        <p:spPr>
+          <a:xfrm>
+            <a:off x="1451579" y="1932496"/>
+            <a:ext cx="9603275" cy="4120986"/>
+          </a:xfrm>
+        </p:spPr>
+        <p:txBody>
+          <a:bodyPr/>
+          <a:lstStyle/>
+          <a:p>
+            <a:r>
+              <a:rPr lang="en-US" dirty="0"/>
+              <a:t>Estimators are what we capture from a sample to make a model. </a:t>
+            </a:r>
+          </a:p>
+          <a:p>
+            <a:r>
+              <a:rPr lang="en-US" dirty="0"/>
+              <a:t>Estimators are a bigger thing in math-y stats than data analytics-y stats. </a:t>
+            </a:r>
+          </a:p>
+          <a:p>
+            <a:r>
+              <a:rPr lang="en-US" dirty="0"/>
+              <a:t>The estimator is basically the thing we use from the sample to estimate the population. </a:t>
+            </a:r>
+          </a:p>
+          <a:p>
+            <a:r>
+              <a:rPr lang="en-US" dirty="0"/>
+              <a:t>For normal distribution type of things, it’ll be the mean and standard deviation. </a:t>
+            </a:r>
+          </a:p>
+          <a:p>
+            <a:endParaRPr lang="en-US" dirty="0"/>
+          </a:p>
+          <a:p>
+            <a:r>
+              <a:rPr lang="en-US" dirty="0"/>
+              <a:t>In layman's terms, our estimators are what we use to create the analytical distributions from the empirical data. We want those to not introduce any error themselves. </a:t>
+            </a:r>
+          </a:p>
+          <a:p>
+            <a:pPr lvl="1"/>
+            <a:endParaRPr lang="en-US" dirty="0"/>
+          </a:p>
+        </p:txBody>
+      </p:sp>
+    </p:spTree>
+    <p:extLst>
+      <p:ext uri="{BB962C8B-B14F-4D97-AF65-F5344CB8AC3E}">
+        <p14:creationId xmlns:p14="http://schemas.microsoft.com/office/powerpoint/2010/main" val="2382552355"/>
+      </p:ext>
+    </p:extLst>
+  </p:cSld>
+  <p:clrMapOvr>
+    <a:masterClrMapping/>
+  </p:clrMapOvr>
+</p:sld>
+</file>
+
+<file path=ppt/slides/slide15.xml><?xml version="1.0" encoding="utf-8"?>
+<p:sld xmlns:a="http://schemas.openxmlformats.org/drawingml/2006/main" xmlns:r="http://schemas.openxmlformats.org/officeDocument/2006/relationships" xmlns:p="http://schemas.openxmlformats.org/presentationml/2006/main">
+  <p:cSld>
+    <p:spTree>
+      <p:nvGrpSpPr>
+        <p:cNvPr id="1" name=""/>
+        <p:cNvGrpSpPr/>
+        <p:nvPr/>
+      </p:nvGrpSpPr>
+      <p:grpSpPr>
+        <a:xfrm>
+          <a:off x="0" y="0"/>
+          <a:ext cx="0" cy="0"/>
+          <a:chOff x="0" y="0"/>
+          <a:chExt cx="0" cy="0"/>
+        </a:xfrm>
+      </p:grpSpPr>
+      <p:sp>
+        <p:nvSpPr>
+          <p:cNvPr id="2" name="Title 1">
+            <a:extLst>
+              <a:ext uri="{FF2B5EF4-FFF2-40B4-BE49-F238E27FC236}">
                 <a16:creationId xmlns:a16="http://schemas.microsoft.com/office/drawing/2014/main" id="{14667568-C0E5-5A5D-4C7A-884A2C2D6226}"/>
               </a:ext>
             </a:extLst>
@@ -4427,7 +4589,7 @@
 </p:sld>
 </file>
 
-<file path=ppt/slides/slide15.xml><?xml version="1.0" encoding="utf-8"?>
+<file path=ppt/slides/slide16.xml><?xml version="1.0" encoding="utf-8"?>
 <p:sld xmlns:a="http://schemas.openxmlformats.org/drawingml/2006/main" xmlns:r="http://schemas.openxmlformats.org/officeDocument/2006/relationships" xmlns:p="http://schemas.openxmlformats.org/presentationml/2006/main">
   <p:cSld>
     <p:spTree>
@@ -4592,130 +4754,6 @@
 </p:sld>
 </file>
 
-<file path=ppt/slides/slide16.xml><?xml version="1.0" encoding="utf-8"?>
-<p:sld xmlns:a="http://schemas.openxmlformats.org/drawingml/2006/main" xmlns:r="http://schemas.openxmlformats.org/officeDocument/2006/relationships" xmlns:p="http://schemas.openxmlformats.org/presentationml/2006/main">
-  <p:cSld>
-    <p:spTree>
-      <p:nvGrpSpPr>
-        <p:cNvPr id="1" name=""/>
-        <p:cNvGrpSpPr/>
-        <p:nvPr/>
-      </p:nvGrpSpPr>
-      <p:grpSpPr>
-        <a:xfrm>
-          <a:off x="0" y="0"/>
-          <a:ext cx="0" cy="0"/>
-          <a:chOff x="0" y="0"/>
-          <a:chExt cx="0" cy="0"/>
-        </a:xfrm>
-      </p:grpSpPr>
-      <p:sp>
-        <p:nvSpPr>
-          <p:cNvPr id="2" name="Title 1">
-            <a:extLst>
-              <a:ext uri="{FF2B5EF4-FFF2-40B4-BE49-F238E27FC236}">
-                <a16:creationId xmlns:a16="http://schemas.microsoft.com/office/drawing/2014/main" id="{9E68711B-B191-B1E6-28D0-48EF9703FCCC}"/>
-              </a:ext>
-            </a:extLst>
-          </p:cNvPr>
-          <p:cNvSpPr>
-            <a:spLocks noGrp="1"/>
-          </p:cNvSpPr>
-          <p:nvPr>
-            <p:ph type="title"/>
-          </p:nvPr>
-        </p:nvSpPr>
-        <p:spPr/>
-        <p:txBody>
-          <a:bodyPr/>
-          <a:lstStyle/>
-          <a:p>
-            <a:r>
-              <a:rPr lang="en-US" dirty="0"/>
-              <a:t>Odd Estimators</a:t>
-            </a:r>
-          </a:p>
-        </p:txBody>
-      </p:sp>
-      <p:sp>
-        <p:nvSpPr>
-          <p:cNvPr id="3" name="Content Placeholder 2">
-            <a:extLst>
-              <a:ext uri="{FF2B5EF4-FFF2-40B4-BE49-F238E27FC236}">
-                <a16:creationId xmlns:a16="http://schemas.microsoft.com/office/drawing/2014/main" id="{D18FEE9F-4DD2-9B15-D3AB-6EF8F0DCBF01}"/>
-              </a:ext>
-            </a:extLst>
-          </p:cNvPr>
-          <p:cNvSpPr>
-            <a:spLocks noGrp="1"/>
-          </p:cNvSpPr>
-          <p:nvPr>
-            <p:ph idx="1"/>
-          </p:nvPr>
-        </p:nvSpPr>
-        <p:spPr>
-          <a:xfrm>
-            <a:off x="1451579" y="1973943"/>
-            <a:ext cx="9603275" cy="4027713"/>
-          </a:xfrm>
-        </p:spPr>
-        <p:txBody>
-          <a:bodyPr/>
-          <a:lstStyle/>
-          <a:p>
-            <a:r>
-              <a:rPr lang="en-US" dirty="0"/>
-              <a:t>For the most part, our estimators are just mean and standard deviation. </a:t>
-            </a:r>
-          </a:p>
-          <a:p>
-            <a:r>
-              <a:rPr lang="en-US" dirty="0"/>
-              <a:t>There are scenarios where other estimators are used. </a:t>
-            </a:r>
-          </a:p>
-          <a:p>
-            <a:pPr lvl="1"/>
-            <a:r>
-              <a:rPr lang="en-US" dirty="0"/>
-              <a:t>In outlier/skew data, median may make a better estimator. </a:t>
-            </a:r>
-          </a:p>
-          <a:p>
-            <a:pPr lvl="1"/>
-            <a:r>
-              <a:rPr lang="en-US" dirty="0"/>
-              <a:t>Specific scenarios – there are baseball ones, but I don’t know the details. </a:t>
-            </a:r>
-          </a:p>
-          <a:p>
-            <a:pPr lvl="1"/>
-            <a:r>
-              <a:rPr lang="en-US" dirty="0"/>
-              <a:t>Standard deviation – see book. </a:t>
-            </a:r>
-          </a:p>
-          <a:p>
-            <a:r>
-              <a:rPr lang="en-US" dirty="0"/>
-              <a:t>All models are wrong! All we care about are accurate predictions! </a:t>
-            </a:r>
-          </a:p>
-        </p:txBody>
-      </p:sp>
-    </p:spTree>
-    <p:extLst>
-      <p:ext uri="{BB962C8B-B14F-4D97-AF65-F5344CB8AC3E}">
-        <p14:creationId xmlns:p14="http://schemas.microsoft.com/office/powerpoint/2010/main" val="3413050038"/>
-      </p:ext>
-    </p:extLst>
-  </p:cSld>
-  <p:clrMapOvr>
-    <a:masterClrMapping/>
-  </p:clrMapOvr>
-</p:sld>
-</file>
-
 <file path=ppt/slides/slide17.xml><?xml version="1.0" encoding="utf-8"?>
 <p:sld xmlns:a="http://schemas.openxmlformats.org/drawingml/2006/main" xmlns:r="http://schemas.openxmlformats.org/officeDocument/2006/relationships" xmlns:p="http://schemas.openxmlformats.org/presentationml/2006/main">
   <p:cSld>
@@ -4738,7 +4776,7 @@
           <p:cNvPr id="2" name="Title 1">
             <a:extLst>
               <a:ext uri="{FF2B5EF4-FFF2-40B4-BE49-F238E27FC236}">
-                <a16:creationId xmlns:a16="http://schemas.microsoft.com/office/drawing/2014/main" id="{42E6F632-66DB-FE96-F423-241473DEBDD8}"/>
+                <a16:creationId xmlns:a16="http://schemas.microsoft.com/office/drawing/2014/main" id="{9E68711B-B191-B1E6-28D0-48EF9703FCCC}"/>
               </a:ext>
             </a:extLst>
           </p:cNvPr>
@@ -4756,7 +4794,7 @@
           <a:p>
             <a:r>
               <a:rPr lang="en-US" dirty="0"/>
-              <a:t>Making predictions – Trial Runs</a:t>
+              <a:t>Odd Estimators</a:t>
             </a:r>
           </a:p>
         </p:txBody>
@@ -4766,7 +4804,7 @@
           <p:cNvPr id="3" name="Content Placeholder 2">
             <a:extLst>
               <a:ext uri="{FF2B5EF4-FFF2-40B4-BE49-F238E27FC236}">
-                <a16:creationId xmlns:a16="http://schemas.microsoft.com/office/drawing/2014/main" id="{6BFF96C8-5B50-8CA9-84ED-D71DF0ACD919}"/>
+                <a16:creationId xmlns:a16="http://schemas.microsoft.com/office/drawing/2014/main" id="{D18FEE9F-4DD2-9B15-D3AB-6EF8F0DCBF01}"/>
               </a:ext>
             </a:extLst>
           </p:cNvPr>
@@ -4777,19 +4815,60 @@
             <p:ph idx="1"/>
           </p:nvPr>
         </p:nvSpPr>
-        <p:spPr/>
-        <p:txBody>
-          <a:bodyPr/>
-          <a:lstStyle/>
-          <a:p>
-            <a:endParaRPr lang="en-US"/>
+        <p:spPr>
+          <a:xfrm>
+            <a:off x="1451579" y="1973943"/>
+            <a:ext cx="9603275" cy="4027713"/>
+          </a:xfrm>
+        </p:spPr>
+        <p:txBody>
+          <a:bodyPr/>
+          <a:lstStyle/>
+          <a:p>
+            <a:r>
+              <a:rPr lang="en-US" dirty="0"/>
+              <a:t>For the most part, our estimators are just mean and standard deviation. </a:t>
+            </a:r>
+          </a:p>
+          <a:p>
+            <a:r>
+              <a:rPr lang="en-US" dirty="0"/>
+              <a:t>There are scenarios where other estimators are used. </a:t>
+            </a:r>
+          </a:p>
+          <a:p>
+            <a:pPr lvl="1"/>
+            <a:r>
+              <a:rPr lang="en-US" dirty="0"/>
+              <a:t>In outlier/skew data, median may make a better estimator. </a:t>
+            </a:r>
+          </a:p>
+          <a:p>
+            <a:pPr lvl="1"/>
+            <a:r>
+              <a:rPr lang="en-US" dirty="0"/>
+              <a:t>Specific scenarios – there are baseball ones, but I don’t know the details. </a:t>
+            </a:r>
+          </a:p>
+          <a:p>
+            <a:pPr lvl="1"/>
+            <a:r>
+              <a:rPr lang="en-US" dirty="0"/>
+              <a:t>Standard deviation – see book. </a:t>
+            </a:r>
+          </a:p>
+          <a:p>
+            <a:r>
+              <a:rPr lang="en-US" dirty="0"/>
+              <a:t>All models are wrong! All we care about are accurate predictions! </a:t>
+            </a:r>
           </a:p>
         </p:txBody>
       </p:sp>
     </p:spTree>
     <p:extLst>
       <p:ext uri="{BB962C8B-B14F-4D97-AF65-F5344CB8AC3E}">
-        <p14:creationId xmlns:p14="http://schemas.microsoft.com/office/powerpoint/2010/main" val="3109955301"/>
+        <p14:creationId xmlns:p14="http://schemas.microsoft.com/office/powerpoint/2010/main" val="3413050038"/>
       </p:ext>
     </p:extLst>
   </p:cSld>
@@ -4821,7 +4900,7 @@
           <p:cNvPr id="2" name="Title 1">
             <a:extLst>
               <a:ext uri="{FF2B5EF4-FFF2-40B4-BE49-F238E27FC236}">
-                <a16:creationId xmlns:a16="http://schemas.microsoft.com/office/drawing/2014/main" id="{520D80B7-4916-A592-E090-DF428874532D}"/>
+                <a16:creationId xmlns:a16="http://schemas.microsoft.com/office/drawing/2014/main" id="{42E6F632-66DB-FE96-F423-241473DEBDD8}"/>
               </a:ext>
             </a:extLst>
           </p:cNvPr>
@@ -4839,7 +4918,7 @@
           <a:p>
             <a:r>
               <a:rPr lang="en-US" dirty="0"/>
-              <a:t>Trials</a:t>
+              <a:t>Making predictions – Trial Runs</a:t>
             </a:r>
           </a:p>
         </p:txBody>
@@ -4849,7 +4928,7 @@
           <p:cNvPr id="3" name="Content Placeholder 2">
             <a:extLst>
               <a:ext uri="{FF2B5EF4-FFF2-40B4-BE49-F238E27FC236}">
-                <a16:creationId xmlns:a16="http://schemas.microsoft.com/office/drawing/2014/main" id="{7C90C60B-00BE-4416-FDD0-956323852785}"/>
+                <a16:creationId xmlns:a16="http://schemas.microsoft.com/office/drawing/2014/main" id="{6BFF96C8-5B50-8CA9-84ED-D71DF0ACD919}"/>
               </a:ext>
             </a:extLst>
           </p:cNvPr>
@@ -4860,76 +4939,19 @@
             <p:ph idx="1"/>
           </p:nvPr>
         </p:nvSpPr>
-        <p:spPr>
-          <a:xfrm>
-            <a:off x="1451579" y="1853754"/>
-            <a:ext cx="9603275" cy="4335173"/>
-          </a:xfrm>
-        </p:spPr>
-        <p:txBody>
-          <a:bodyPr/>
-          <a:lstStyle/>
-          <a:p>
-            <a:r>
-              <a:rPr lang="en-US" dirty="0"/>
-              <a:t>Once we have a matching distribution, we can make predictions via running trials. </a:t>
-            </a:r>
-          </a:p>
-          <a:p>
-            <a:r>
-              <a:rPr lang="en-US" dirty="0"/>
-              <a:t>Each trial has a few steps:</a:t>
-            </a:r>
-          </a:p>
-          <a:p>
-            <a:pPr lvl="1"/>
-            <a:r>
-              <a:rPr lang="en-US" dirty="0"/>
-              <a:t>Create an analytical distribution from the estimator(s). </a:t>
-            </a:r>
-          </a:p>
-          <a:p>
-            <a:pPr lvl="1"/>
-            <a:r>
-              <a:rPr lang="en-US" dirty="0"/>
-              <a:t>Generate a bunch of values from that distribution. </a:t>
-            </a:r>
-          </a:p>
-          <a:p>
-            <a:pPr lvl="1"/>
-            <a:r>
-              <a:rPr lang="en-US" dirty="0"/>
-              <a:t>Calculate the (usually) mean of those generated values. </a:t>
-            </a:r>
-          </a:p>
-          <a:p>
-            <a:pPr lvl="1"/>
-            <a:r>
-              <a:rPr lang="en-US" dirty="0"/>
-              <a:t>Create a CDF of all of the means. </a:t>
-            </a:r>
-          </a:p>
-          <a:p>
-            <a:r>
-              <a:rPr lang="en-US" dirty="0"/>
-              <a:t>In effect, we are predicting what we expect the mean to be, based on the values from the empirical data, then making a distribution of those means. </a:t>
-            </a:r>
-          </a:p>
-          <a:p>
-            <a:r>
-              <a:rPr lang="en-US" dirty="0"/>
-              <a:t>Our estimate is the mean of those means – but how accurate is it…</a:t>
-            </a:r>
-          </a:p>
-          <a:p>
-            <a:endParaRPr lang="en-US" dirty="0"/>
+        <p:spPr/>
+        <p:txBody>
+          <a:bodyPr/>
+          <a:lstStyle/>
+          <a:p>
+            <a:endParaRPr lang="en-US"/>
           </a:p>
         </p:txBody>
       </p:sp>
     </p:spTree>
     <p:extLst>
       <p:ext uri="{BB962C8B-B14F-4D97-AF65-F5344CB8AC3E}">
-        <p14:creationId xmlns:p14="http://schemas.microsoft.com/office/powerpoint/2010/main" val="671170779"/>
+        <p14:creationId xmlns:p14="http://schemas.microsoft.com/office/powerpoint/2010/main" val="3109955301"/>
       </p:ext>
     </p:extLst>
   </p:cSld>
@@ -4961,7 +4983,7 @@
           <p:cNvPr id="2" name="Title 1">
             <a:extLst>
               <a:ext uri="{FF2B5EF4-FFF2-40B4-BE49-F238E27FC236}">
-                <a16:creationId xmlns:a16="http://schemas.microsoft.com/office/drawing/2014/main" id="{72E5AB18-4D6B-AC80-AF2F-89AAB41E2EBE}"/>
+                <a16:creationId xmlns:a16="http://schemas.microsoft.com/office/drawing/2014/main" id="{520D80B7-4916-A592-E090-DF428874532D}"/>
               </a:ext>
             </a:extLst>
           </p:cNvPr>
@@ -4979,7 +5001,7 @@
           <a:p>
             <a:r>
               <a:rPr lang="en-US" dirty="0"/>
-              <a:t>Example - Heights</a:t>
+              <a:t>Trials</a:t>
             </a:r>
           </a:p>
         </p:txBody>
@@ -4989,7 +5011,7 @@
           <p:cNvPr id="3" name="Content Placeholder 2">
             <a:extLst>
               <a:ext uri="{FF2B5EF4-FFF2-40B4-BE49-F238E27FC236}">
-                <a16:creationId xmlns:a16="http://schemas.microsoft.com/office/drawing/2014/main" id="{CE0DA599-88F9-ABCC-164C-CE88C9628BA3}"/>
+                <a16:creationId xmlns:a16="http://schemas.microsoft.com/office/drawing/2014/main" id="{7C90C60B-00BE-4416-FDD0-956323852785}"/>
               </a:ext>
             </a:extLst>
           </p:cNvPr>
@@ -5003,140 +5025,73 @@
         <p:spPr>
           <a:xfrm>
             <a:off x="1451579" y="1853754"/>
-            <a:ext cx="9603275" cy="4199727"/>
+            <a:ext cx="9603275" cy="4335173"/>
           </a:xfrm>
         </p:spPr>
         <p:txBody>
           <a:bodyPr/>
           <a:lstStyle/>
           <a:p>
-            <a:pPr marL="457200" indent="-457200">
-              <a:buFont typeface="+mj-lt"/>
-              <a:buAutoNum type="arabicPeriod"/>
-            </a:pPr>
-            <a:r>
-              <a:rPr lang="en-US" dirty="0"/>
-              <a:t>Capture sample of size N and calculate estimators (mean and std most likely). </a:t>
-            </a:r>
-          </a:p>
-          <a:p>
-            <a:pPr marL="457200" indent="-457200">
-              <a:buFont typeface="+mj-lt"/>
-              <a:buAutoNum type="arabicPeriod"/>
-            </a:pPr>
-            <a:r>
-              <a:rPr lang="en-US" dirty="0"/>
-              <a:t>Create analytical distribution using sample estimators. </a:t>
-            </a:r>
-          </a:p>
-          <a:p>
-            <a:pPr marL="457200" indent="-457200">
-              <a:buFont typeface="+mj-lt"/>
-              <a:buAutoNum type="arabicPeriod"/>
-            </a:pPr>
-            <a:r>
-              <a:rPr lang="en-US" dirty="0"/>
-              <a:t>Generate many (like 1000+) new distributions of size N from the analytical one. </a:t>
-            </a:r>
-          </a:p>
-          <a:p>
-            <a:pPr marL="914400" lvl="1" indent="-457200">
-              <a:buFont typeface="+mj-lt"/>
-              <a:buAutoNum type="arabicPeriod"/>
-            </a:pPr>
-            <a:r>
-              <a:rPr lang="en-US" dirty="0"/>
-              <a:t>Each should be </a:t>
-            </a:r>
-            <a:r>
-              <a:rPr lang="en-US" i="1" dirty="0"/>
-              <a:t>mostly</a:t>
-            </a:r>
-            <a:r>
-              <a:rPr lang="en-US" dirty="0"/>
-              <a:t> identical to the empirical data, but not perfectly. </a:t>
-            </a:r>
-          </a:p>
-          <a:p>
-            <a:pPr marL="457200" indent="-457200">
-              <a:buFont typeface="+mj-lt"/>
-              <a:buAutoNum type="arabicPeriod"/>
-            </a:pPr>
-            <a:r>
-              <a:rPr lang="en-US" dirty="0"/>
-              <a:t>For each of those new </a:t>
-            </a:r>
-            <a:r>
-              <a:rPr lang="en-US" dirty="0" err="1"/>
-              <a:t>dists</a:t>
-            </a:r>
-            <a:r>
-              <a:rPr lang="en-US" dirty="0"/>
-              <a:t>, calculate the mean. </a:t>
-            </a:r>
-          </a:p>
-          <a:p>
-            <a:pPr marL="457200" indent="-457200">
-              <a:buFont typeface="+mj-lt"/>
-              <a:buAutoNum type="arabicPeriod"/>
-            </a:pPr>
-            <a:r>
-              <a:rPr lang="en-US" dirty="0"/>
-              <a:t>Plot the distribution of the new means. (Note: diff from </a:t>
-            </a:r>
-            <a:r>
-              <a:rPr lang="en-US" dirty="0" err="1"/>
-              <a:t>orig</a:t>
-            </a:r>
-            <a:r>
-              <a:rPr lang="en-US" dirty="0"/>
-              <a:t> values)</a:t>
-            </a:r>
-          </a:p>
-          <a:p>
-            <a:pPr marL="914400" lvl="1" indent="-457200">
-              <a:buFont typeface="+mj-lt"/>
-              <a:buAutoNum type="arabicPeriod"/>
-            </a:pPr>
-            <a:r>
-              <a:rPr lang="en-US" dirty="0"/>
-              <a:t>If they vary little, the prediction is more trustworthy. </a:t>
-            </a:r>
-          </a:p>
-          <a:p>
-            <a:pPr marL="914400" lvl="1" indent="-457200">
-              <a:buFont typeface="+mj-lt"/>
-              <a:buAutoNum type="arabicPeriod"/>
-            </a:pPr>
-            <a:r>
-              <a:rPr lang="en-US" dirty="0"/>
-              <a:t>If they vary widely, the prediction is less trustworthy. </a:t>
-            </a:r>
-          </a:p>
-          <a:p>
-            <a:pPr marL="457200" indent="-457200">
-              <a:buFont typeface="+mj-lt"/>
-              <a:buAutoNum type="arabicPeriod"/>
-            </a:pPr>
-            <a:r>
-              <a:rPr lang="en-US" dirty="0"/>
-              <a:t>If the fit is good, each sample drawn from </a:t>
-            </a:r>
-            <a:r>
-              <a:rPr lang="en-US" dirty="0" err="1"/>
-              <a:t>dist</a:t>
-            </a:r>
-            <a:r>
-              <a:rPr lang="en-US" dirty="0"/>
-              <a:t> should match the population. </a:t>
-            </a:r>
+            <a:r>
+              <a:rPr lang="en-US" dirty="0"/>
+              <a:t>Once we have a matching distribution, we can make predictions via running trials. </a:t>
+            </a:r>
+          </a:p>
+          <a:p>
+            <a:r>
+              <a:rPr lang="en-US" dirty="0"/>
+              <a:t>Each trial has a few steps:</a:t>
+            </a:r>
+          </a:p>
+          <a:p>
+            <a:pPr lvl="1"/>
+            <a:r>
+              <a:rPr lang="en-US" dirty="0"/>
+              <a:t>Create an analytical distribution from the estimator(s). </a:t>
+            </a:r>
+          </a:p>
+          <a:p>
+            <a:pPr lvl="1"/>
+            <a:r>
+              <a:rPr lang="en-US" dirty="0"/>
+              <a:t>Generate a bunch of values from that distribution. </a:t>
+            </a:r>
+          </a:p>
+          <a:p>
+            <a:pPr lvl="1"/>
+            <a:r>
+              <a:rPr lang="en-US" dirty="0"/>
+              <a:t>Calculate the (usually) mean of those generated values. </a:t>
+            </a:r>
+          </a:p>
+          <a:p>
+            <a:pPr lvl="1"/>
+            <a:r>
+              <a:rPr lang="en-US" dirty="0"/>
+              <a:t>Create a CDF of all of the means. </a:t>
+            </a:r>
+          </a:p>
+          <a:p>
+            <a:r>
+              <a:rPr lang="en-US" dirty="0"/>
+              <a:t>In effect, we are predicting what we expect the mean to be, based on the values from the empirical data, then making a distribution of those means. </a:t>
+            </a:r>
+          </a:p>
+          <a:p>
+            <a:r>
+              <a:rPr lang="en-US" dirty="0"/>
+              <a:t>Our estimate is the mean of those means – but how accurate is it…</a:t>
+            </a:r>
+          </a:p>
+          <a:p>
+            <a:endParaRPr lang="en-US" dirty="0"/>
           </a:p>
         </p:txBody>
       </p:sp>
     </p:spTree>
     <p:extLst>
       <p:ext uri="{BB962C8B-B14F-4D97-AF65-F5344CB8AC3E}">
-        <p14:creationId xmlns:p14="http://schemas.microsoft.com/office/powerpoint/2010/main" val="1710872867"/>
+        <p14:creationId xmlns:p14="http://schemas.microsoft.com/office/powerpoint/2010/main" val="671170779"/>
       </p:ext>
     </p:extLst>
   </p:cSld>
@@ -5271,6 +5226,213 @@
 </file>
 
 <file path=ppt/slides/slide20.xml><?xml version="1.0" encoding="utf-8"?>
+<p:sld xmlns:a="http://schemas.openxmlformats.org/drawingml/2006/main" xmlns:r="http://schemas.openxmlformats.org/officeDocument/2006/relationships" xmlns:p="http://schemas.openxmlformats.org/presentationml/2006/main">
+  <p:cSld>
+    <p:spTree>
+      <p:nvGrpSpPr>
+        <p:cNvPr id="1" name=""/>
+        <p:cNvGrpSpPr/>
+        <p:nvPr/>
+      </p:nvGrpSpPr>
+      <p:grpSpPr>
+        <a:xfrm>
+          <a:off x="0" y="0"/>
+          <a:ext cx="0" cy="0"/>
+          <a:chOff x="0" y="0"/>
+          <a:chExt cx="0" cy="0"/>
+        </a:xfrm>
+      </p:grpSpPr>
+      <p:sp>
+        <p:nvSpPr>
+          <p:cNvPr id="2" name="Title 1">
+            <a:extLst>
+              <a:ext uri="{FF2B5EF4-FFF2-40B4-BE49-F238E27FC236}">
+                <a16:creationId xmlns:a16="http://schemas.microsoft.com/office/drawing/2014/main" id="{72E5AB18-4D6B-AC80-AF2F-89AAB41E2EBE}"/>
+              </a:ext>
+            </a:extLst>
+          </p:cNvPr>
+          <p:cNvSpPr>
+            <a:spLocks noGrp="1"/>
+          </p:cNvSpPr>
+          <p:nvPr>
+            <p:ph type="title"/>
+          </p:nvPr>
+        </p:nvSpPr>
+        <p:spPr/>
+        <p:txBody>
+          <a:bodyPr/>
+          <a:lstStyle/>
+          <a:p>
+            <a:r>
+              <a:rPr lang="en-US" dirty="0"/>
+              <a:t>Example - Heights</a:t>
+            </a:r>
+          </a:p>
+        </p:txBody>
+      </p:sp>
+      <p:sp>
+        <p:nvSpPr>
+          <p:cNvPr id="3" name="Content Placeholder 2">
+            <a:extLst>
+              <a:ext uri="{FF2B5EF4-FFF2-40B4-BE49-F238E27FC236}">
+                <a16:creationId xmlns:a16="http://schemas.microsoft.com/office/drawing/2014/main" id="{CE0DA599-88F9-ABCC-164C-CE88C9628BA3}"/>
+              </a:ext>
+            </a:extLst>
+          </p:cNvPr>
+          <p:cNvSpPr>
+            <a:spLocks noGrp="1"/>
+          </p:cNvSpPr>
+          <p:nvPr>
+            <p:ph idx="1"/>
+          </p:nvPr>
+        </p:nvSpPr>
+        <p:spPr>
+          <a:xfrm>
+            <a:off x="1451579" y="1853754"/>
+            <a:ext cx="9603275" cy="4199727"/>
+          </a:xfrm>
+        </p:spPr>
+        <p:txBody>
+          <a:bodyPr/>
+          <a:lstStyle/>
+          <a:p>
+            <a:pPr marL="457200" indent="-457200">
+              <a:buFont typeface="+mj-lt"/>
+              <a:buAutoNum type="arabicPeriod"/>
+            </a:pPr>
+            <a:r>
+              <a:rPr lang="en-US" dirty="0"/>
+              <a:t>Capture sample of size N and calculate estimators (mean and std most likely). </a:t>
+            </a:r>
+          </a:p>
+          <a:p>
+            <a:pPr marL="457200" indent="-457200">
+              <a:buFont typeface="+mj-lt"/>
+              <a:buAutoNum type="arabicPeriod"/>
+            </a:pPr>
+            <a:r>
+              <a:rPr lang="en-US" dirty="0"/>
+              <a:t>Create analytical distribution using sample estimators. </a:t>
+            </a:r>
+          </a:p>
+          <a:p>
+            <a:pPr marL="457200" indent="-457200">
+              <a:buFont typeface="+mj-lt"/>
+              <a:buAutoNum type="arabicPeriod"/>
+            </a:pPr>
+            <a:r>
+              <a:rPr lang="en-US" dirty="0"/>
+              <a:t>Generate many (like 1000+) new distributions of size N from the analytical one. </a:t>
+            </a:r>
+          </a:p>
+          <a:p>
+            <a:pPr marL="914400" lvl="1" indent="-457200">
+              <a:buFont typeface="+mj-lt"/>
+              <a:buAutoNum type="arabicPeriod"/>
+            </a:pPr>
+            <a:r>
+              <a:rPr lang="en-US" dirty="0"/>
+              <a:t>Each should be </a:t>
+            </a:r>
+            <a:r>
+              <a:rPr lang="en-US" i="1" dirty="0"/>
+              <a:t>mostly</a:t>
+            </a:r>
+            <a:r>
+              <a:rPr lang="en-US" dirty="0"/>
+              <a:t> identical to the empirical data, but not perfectly. </a:t>
+            </a:r>
+          </a:p>
+          <a:p>
+            <a:pPr marL="457200" indent="-457200">
+              <a:buFont typeface="+mj-lt"/>
+              <a:buAutoNum type="arabicPeriod"/>
+            </a:pPr>
+            <a:r>
+              <a:rPr lang="en-US" dirty="0"/>
+              <a:t>For each of those new </a:t>
+            </a:r>
+            <a:r>
+              <a:rPr lang="en-US" dirty="0" err="1"/>
+              <a:t>dists</a:t>
+            </a:r>
+            <a:r>
+              <a:rPr lang="en-US" dirty="0"/>
+              <a:t>, calculate the mean. </a:t>
+            </a:r>
+          </a:p>
+          <a:p>
+            <a:pPr marL="457200" indent="-457200">
+              <a:buFont typeface="+mj-lt"/>
+              <a:buAutoNum type="arabicPeriod"/>
+            </a:pPr>
+            <a:r>
+              <a:rPr lang="en-US" dirty="0"/>
+              <a:t>Plot the distribution of the new means. (Note: diff from </a:t>
+            </a:r>
+            <a:r>
+              <a:rPr lang="en-US" dirty="0" err="1"/>
+              <a:t>orig</a:t>
+            </a:r>
+            <a:r>
+              <a:rPr lang="en-US" dirty="0"/>
+              <a:t> values)</a:t>
+            </a:r>
+          </a:p>
+          <a:p>
+            <a:pPr marL="914400" lvl="1" indent="-457200">
+              <a:buFont typeface="+mj-lt"/>
+              <a:buAutoNum type="arabicPeriod"/>
+            </a:pPr>
+            <a:r>
+              <a:rPr lang="en-US" dirty="0"/>
+              <a:t>If they vary little, the prediction is more trustworthy. </a:t>
+            </a:r>
+          </a:p>
+          <a:p>
+            <a:pPr marL="914400" lvl="1" indent="-457200">
+              <a:buFont typeface="+mj-lt"/>
+              <a:buAutoNum type="arabicPeriod"/>
+            </a:pPr>
+            <a:r>
+              <a:rPr lang="en-US" dirty="0"/>
+              <a:t>If they vary widely, the prediction is less trustworthy. </a:t>
+            </a:r>
+          </a:p>
+          <a:p>
+            <a:pPr marL="457200" indent="-457200">
+              <a:buFont typeface="+mj-lt"/>
+              <a:buAutoNum type="arabicPeriod"/>
+            </a:pPr>
+            <a:r>
+              <a:rPr lang="en-US" dirty="0"/>
+              <a:t>If the fit is good, each sample drawn from </a:t>
+            </a:r>
+            <a:r>
+              <a:rPr lang="en-US" dirty="0" err="1"/>
+              <a:t>dist</a:t>
+            </a:r>
+            <a:r>
+              <a:rPr lang="en-US" dirty="0"/>
+              <a:t> should match the population. </a:t>
+            </a:r>
+          </a:p>
+        </p:txBody>
+      </p:sp>
+    </p:spTree>
+    <p:extLst>
+      <p:ext uri="{BB962C8B-B14F-4D97-AF65-F5344CB8AC3E}">
+        <p14:creationId xmlns:p14="http://schemas.microsoft.com/office/powerpoint/2010/main" val="1710872867"/>
+      </p:ext>
+    </p:extLst>
+  </p:cSld>
+  <p:clrMapOvr>
+    <a:masterClrMapping/>
+  </p:clrMapOvr>
+</p:sld>
+</file>
+
+<file path=ppt/slides/slide21.xml><?xml version="1.0" encoding="utf-8"?>
 <p:sld xmlns:a="http://schemas.openxmlformats.org/drawingml/2006/main" xmlns:r="http://schemas.openxmlformats.org/officeDocument/2006/relationships" xmlns:p="http://schemas.openxmlformats.org/presentationml/2006/main">
   <p:cSld>
     <p:spTree>
@@ -5467,7 +5629,7 @@
 </p:sld>
 </file>
 
-<file path=ppt/slides/slide21.xml><?xml version="1.0" encoding="utf-8"?>
+<file path=ppt/slides/slide22.xml><?xml version="1.0" encoding="utf-8"?>
 <p:sld xmlns:a="http://schemas.openxmlformats.org/drawingml/2006/main" xmlns:r="http://schemas.openxmlformats.org/officeDocument/2006/relationships" xmlns:p="http://schemas.openxmlformats.org/presentationml/2006/main">
   <p:cSld>
     <p:spTree>
@@ -5530,8 +5692,8 @@
         </p:nvSpPr>
         <p:spPr>
           <a:xfrm>
-            <a:off x="109330" y="1853754"/>
-            <a:ext cx="7245628" cy="4199727"/>
+            <a:off x="109330" y="2107096"/>
+            <a:ext cx="7245628" cy="3946385"/>
           </a:xfrm>
         </p:spPr>
         <p:txBody>
@@ -5640,7 +5802,7 @@
 </p:sld>
 </file>
 
-<file path=ppt/slides/slide22.xml><?xml version="1.0" encoding="utf-8"?>
+<file path=ppt/slides/slide23.xml><?xml version="1.0" encoding="utf-8"?>
 <p:sld xmlns:a="http://schemas.openxmlformats.org/drawingml/2006/main" xmlns:r="http://schemas.openxmlformats.org/officeDocument/2006/relationships" xmlns:p="http://schemas.openxmlformats.org/presentationml/2006/main">
   <p:cSld>
     <p:spTree>
@@ -5860,7 +6022,7 @@
 </p:sld>
 </file>
 
-<file path=ppt/slides/slide23.xml><?xml version="1.0" encoding="utf-8"?>
+<file path=ppt/slides/slide24.xml><?xml version="1.0" encoding="utf-8"?>
 <p:sld xmlns:a="http://schemas.openxmlformats.org/drawingml/2006/main" xmlns:r="http://schemas.openxmlformats.org/officeDocument/2006/relationships" xmlns:p="http://schemas.openxmlformats.org/presentationml/2006/main">
   <p:cSld>
     <p:spTree>
@@ -6061,7 +6223,7 @@
 </p:sld>
 </file>
 
-<file path=ppt/slides/slide24.xml><?xml version="1.0" encoding="utf-8"?>
+<file path=ppt/slides/slide25.xml><?xml version="1.0" encoding="utf-8"?>
 <p:sld xmlns:a="http://schemas.openxmlformats.org/drawingml/2006/main" xmlns:r="http://schemas.openxmlformats.org/officeDocument/2006/relationships" xmlns:p="http://schemas.openxmlformats.org/presentationml/2006/main" show="0">
   <p:cSld>
     <p:spTree>
@@ -6225,7 +6387,7 @@
 </p:sld>
 </file>
 
-<file path=ppt/slides/slide25.xml><?xml version="1.0" encoding="utf-8"?>
+<file path=ppt/slides/slide26.xml><?xml version="1.0" encoding="utf-8"?>
 <p:sld xmlns:a="http://schemas.openxmlformats.org/drawingml/2006/main" xmlns:r="http://schemas.openxmlformats.org/officeDocument/2006/relationships" xmlns:p="http://schemas.openxmlformats.org/presentationml/2006/main">
   <p:cSld>
     <p:spTree>
@@ -6285,7 +6447,7 @@
 </p:sld>
 </file>
 
-<file path=ppt/slides/slide26.xml><?xml version="1.0" encoding="utf-8"?>
+<file path=ppt/slides/slide27.xml><?xml version="1.0" encoding="utf-8"?>
 <p:sld xmlns:a="http://schemas.openxmlformats.org/drawingml/2006/main" xmlns:r="http://schemas.openxmlformats.org/officeDocument/2006/relationships" xmlns:p="http://schemas.openxmlformats.org/presentationml/2006/main">
   <p:cSld>
     <p:spTree>
@@ -6417,7 +6579,7 @@
 </p:sld>
 </file>
 
-<file path=ppt/slides/slide27.xml><?xml version="1.0" encoding="utf-8"?>
+<file path=ppt/slides/slide28.xml><?xml version="1.0" encoding="utf-8"?>
 <p:sld xmlns:a="http://schemas.openxmlformats.org/drawingml/2006/main" xmlns:r="http://schemas.openxmlformats.org/officeDocument/2006/relationships" xmlns:p="http://schemas.openxmlformats.org/presentationml/2006/main">
   <p:cSld>
     <p:spTree>
@@ -6544,7 +6706,7 @@
 </p:sld>
 </file>
 
-<file path=ppt/slides/slide28.xml><?xml version="1.0" encoding="utf-8"?>
+<file path=ppt/slides/slide29.xml><?xml version="1.0" encoding="utf-8"?>
 <p:sld xmlns:a="http://schemas.openxmlformats.org/drawingml/2006/main" xmlns:r="http://schemas.openxmlformats.org/officeDocument/2006/relationships" xmlns:p="http://schemas.openxmlformats.org/presentationml/2006/main" show="0">
   <p:cSld>
     <p:spTree>
@@ -6696,169 +6858,6 @@
     <p:extLst>
       <p:ext uri="{BB962C8B-B14F-4D97-AF65-F5344CB8AC3E}">
         <p14:creationId xmlns:p14="http://schemas.microsoft.com/office/powerpoint/2010/main" val="3140353004"/>
-      </p:ext>
-    </p:extLst>
-  </p:cSld>
-  <p:clrMapOvr>
-    <a:masterClrMapping/>
-  </p:clrMapOvr>
-</p:sld>
-</file>
-
-<file path=ppt/slides/slide29.xml><?xml version="1.0" encoding="utf-8"?>
-<p:sld xmlns:a="http://schemas.openxmlformats.org/drawingml/2006/main" xmlns:r="http://schemas.openxmlformats.org/officeDocument/2006/relationships" xmlns:p="http://schemas.openxmlformats.org/presentationml/2006/main">
-  <p:cSld>
-    <p:spTree>
-      <p:nvGrpSpPr>
-        <p:cNvPr id="1" name=""/>
-        <p:cNvGrpSpPr/>
-        <p:nvPr/>
-      </p:nvGrpSpPr>
-      <p:grpSpPr>
-        <a:xfrm>
-          <a:off x="0" y="0"/>
-          <a:ext cx="0" cy="0"/>
-          <a:chOff x="0" y="0"/>
-          <a:chExt cx="0" cy="0"/>
-        </a:xfrm>
-      </p:grpSpPr>
-      <p:sp>
-        <p:nvSpPr>
-          <p:cNvPr id="2" name="Title 1">
-            <a:extLst>
-              <a:ext uri="{FF2B5EF4-FFF2-40B4-BE49-F238E27FC236}">
-                <a16:creationId xmlns:a16="http://schemas.microsoft.com/office/drawing/2014/main" id="{D3E1E6CD-4963-E8D0-2071-D9F595F7544F}"/>
-              </a:ext>
-            </a:extLst>
-          </p:cNvPr>
-          <p:cNvSpPr>
-            <a:spLocks noGrp="1"/>
-          </p:cNvSpPr>
-          <p:nvPr>
-            <p:ph type="title"/>
-          </p:nvPr>
-        </p:nvSpPr>
-        <p:spPr/>
-        <p:txBody>
-          <a:bodyPr/>
-          <a:lstStyle/>
-          <a:p>
-            <a:r>
-              <a:rPr lang="en-US" dirty="0"/>
-              <a:t>Accuracy and Stability</a:t>
-            </a:r>
-          </a:p>
-        </p:txBody>
-      </p:sp>
-      <p:sp>
-        <p:nvSpPr>
-          <p:cNvPr id="3" name="Content Placeholder 2">
-            <a:extLst>
-              <a:ext uri="{FF2B5EF4-FFF2-40B4-BE49-F238E27FC236}">
-                <a16:creationId xmlns:a16="http://schemas.microsoft.com/office/drawing/2014/main" id="{A24E110E-E939-D1F1-8ED2-60D66B8C3A25}"/>
-              </a:ext>
-            </a:extLst>
-          </p:cNvPr>
-          <p:cNvSpPr>
-            <a:spLocks noGrp="1"/>
-          </p:cNvSpPr>
-          <p:nvPr>
-            <p:ph idx="1"/>
-          </p:nvPr>
-        </p:nvSpPr>
-        <p:spPr>
-          <a:xfrm>
-            <a:off x="1451579" y="1930400"/>
-            <a:ext cx="9603275" cy="4123081"/>
-          </a:xfrm>
-        </p:spPr>
-        <p:txBody>
-          <a:bodyPr/>
-          <a:lstStyle/>
-          <a:p>
-            <a:r>
-              <a:rPr lang="en-US" dirty="0"/>
-              <a:t>Our estimates for a population can be pretty accurate with good data. </a:t>
-            </a:r>
-          </a:p>
-          <a:p>
-            <a:pPr lvl="1"/>
-            <a:r>
-              <a:rPr lang="en-US" dirty="0"/>
-              <a:t>Larger samples, more </a:t>
-            </a:r>
-            <a:r>
-              <a:rPr lang="en-US" dirty="0" err="1"/>
-              <a:t>dist</a:t>
-            </a:r>
-            <a:r>
-              <a:rPr lang="en-US" dirty="0"/>
-              <a:t>-like data, less variance all help accuracy. </a:t>
-            </a:r>
-          </a:p>
-          <a:p>
-            <a:r>
-              <a:rPr lang="en-US" dirty="0"/>
-              <a:t>Big application – statistics Canada and census. </a:t>
-            </a:r>
-          </a:p>
-          <a:p>
-            <a:pPr lvl="1"/>
-            <a:r>
-              <a:rPr lang="en-US" dirty="0"/>
-              <a:t>Take a low-detail collection of (almost) population data. </a:t>
-            </a:r>
-          </a:p>
-          <a:p>
-            <a:pPr lvl="1"/>
-            <a:r>
-              <a:rPr lang="en-US" dirty="0"/>
-              <a:t>Take a detailed collection of a random sample. </a:t>
-            </a:r>
-          </a:p>
-          <a:p>
-            <a:pPr lvl="1"/>
-            <a:r>
-              <a:rPr lang="en-US" dirty="0"/>
-              <a:t>Use sample data to generalize for different populations (regional, demographic, </a:t>
-            </a:r>
-            <a:r>
-              <a:rPr lang="en-US" dirty="0" err="1"/>
-              <a:t>etc</a:t>
-            </a:r>
-            <a:r>
-              <a:rPr lang="en-US" dirty="0"/>
-              <a:t>…). </a:t>
-            </a:r>
-          </a:p>
-          <a:p>
-            <a:pPr lvl="1"/>
-            <a:r>
-              <a:rPr lang="en-US" dirty="0"/>
-              <a:t>Estimate things like age cohorts, population change, </a:t>
-            </a:r>
-            <a:r>
-              <a:rPr lang="en-US" dirty="0" err="1"/>
-              <a:t>etc</a:t>
-            </a:r>
-            <a:r>
-              <a:rPr lang="en-US" dirty="0"/>
-              <a:t>… by generalizing. </a:t>
-            </a:r>
-          </a:p>
-          <a:p>
-            <a:pPr lvl="1"/>
-            <a:r>
-              <a:rPr lang="en-US" dirty="0"/>
-              <a:t>Based on experience, apply corrections to data for better projections (e.g. undercounting). </a:t>
-            </a:r>
-          </a:p>
-        </p:txBody>
-      </p:sp>
-    </p:spTree>
-    <p:extLst>
-      <p:ext uri="{BB962C8B-B14F-4D97-AF65-F5344CB8AC3E}">
-        <p14:creationId xmlns:p14="http://schemas.microsoft.com/office/powerpoint/2010/main" val="950710098"/>
       </p:ext>
     </p:extLst>
   </p:cSld>
@@ -6936,14 +6935,7 @@
           <a:p>
             <a:r>
               <a:rPr lang="en-US" dirty="0"/>
-              <a:t>Today:</a:t>
-            </a:r>
-          </a:p>
-          <a:p>
-            <a:pPr lvl="1"/>
-            <a:r>
-              <a:rPr lang="en-US" dirty="0"/>
-              <a:t>Notebook (012A) – I reordered a few things, so the numbers are different. </a:t>
+              <a:t>Today (Workbook 14 and revisit 12A):</a:t>
             </a:r>
           </a:p>
           <a:p>
@@ -7004,6 +6996,169 @@
           <p:cNvPr id="2" name="Title 1">
             <a:extLst>
               <a:ext uri="{FF2B5EF4-FFF2-40B4-BE49-F238E27FC236}">
+                <a16:creationId xmlns:a16="http://schemas.microsoft.com/office/drawing/2014/main" id="{D3E1E6CD-4963-E8D0-2071-D9F595F7544F}"/>
+              </a:ext>
+            </a:extLst>
+          </p:cNvPr>
+          <p:cNvSpPr>
+            <a:spLocks noGrp="1"/>
+          </p:cNvSpPr>
+          <p:nvPr>
+            <p:ph type="title"/>
+          </p:nvPr>
+        </p:nvSpPr>
+        <p:spPr/>
+        <p:txBody>
+          <a:bodyPr/>
+          <a:lstStyle/>
+          <a:p>
+            <a:r>
+              <a:rPr lang="en-US" dirty="0"/>
+              <a:t>Accuracy and Stability</a:t>
+            </a:r>
+          </a:p>
+        </p:txBody>
+      </p:sp>
+      <p:sp>
+        <p:nvSpPr>
+          <p:cNvPr id="3" name="Content Placeholder 2">
+            <a:extLst>
+              <a:ext uri="{FF2B5EF4-FFF2-40B4-BE49-F238E27FC236}">
+                <a16:creationId xmlns:a16="http://schemas.microsoft.com/office/drawing/2014/main" id="{A24E110E-E939-D1F1-8ED2-60D66B8C3A25}"/>
+              </a:ext>
+            </a:extLst>
+          </p:cNvPr>
+          <p:cNvSpPr>
+            <a:spLocks noGrp="1"/>
+          </p:cNvSpPr>
+          <p:nvPr>
+            <p:ph idx="1"/>
+          </p:nvPr>
+        </p:nvSpPr>
+        <p:spPr>
+          <a:xfrm>
+            <a:off x="1451579" y="1930400"/>
+            <a:ext cx="9603275" cy="4123081"/>
+          </a:xfrm>
+        </p:spPr>
+        <p:txBody>
+          <a:bodyPr/>
+          <a:lstStyle/>
+          <a:p>
+            <a:r>
+              <a:rPr lang="en-US" dirty="0"/>
+              <a:t>Our estimates for a population can be pretty accurate with good data. </a:t>
+            </a:r>
+          </a:p>
+          <a:p>
+            <a:pPr lvl="1"/>
+            <a:r>
+              <a:rPr lang="en-US" dirty="0"/>
+              <a:t>Larger samples, more </a:t>
+            </a:r>
+            <a:r>
+              <a:rPr lang="en-US" dirty="0" err="1"/>
+              <a:t>dist</a:t>
+            </a:r>
+            <a:r>
+              <a:rPr lang="en-US" dirty="0"/>
+              <a:t>-like data, less variance all help accuracy. </a:t>
+            </a:r>
+          </a:p>
+          <a:p>
+            <a:r>
+              <a:rPr lang="en-US" dirty="0"/>
+              <a:t>Big application – statistics Canada and census. </a:t>
+            </a:r>
+          </a:p>
+          <a:p>
+            <a:pPr lvl="1"/>
+            <a:r>
+              <a:rPr lang="en-US" dirty="0"/>
+              <a:t>Take a low-detail collection of (almost) population data. </a:t>
+            </a:r>
+          </a:p>
+          <a:p>
+            <a:pPr lvl="1"/>
+            <a:r>
+              <a:rPr lang="en-US" dirty="0"/>
+              <a:t>Take a detailed collection of a random sample. </a:t>
+            </a:r>
+          </a:p>
+          <a:p>
+            <a:pPr lvl="1"/>
+            <a:r>
+              <a:rPr lang="en-US" dirty="0"/>
+              <a:t>Use sample data to generalize for different populations (regional, demographic, </a:t>
+            </a:r>
+            <a:r>
+              <a:rPr lang="en-US" dirty="0" err="1"/>
+              <a:t>etc</a:t>
+            </a:r>
+            <a:r>
+              <a:rPr lang="en-US" dirty="0"/>
+              <a:t>…). </a:t>
+            </a:r>
+          </a:p>
+          <a:p>
+            <a:pPr lvl="1"/>
+            <a:r>
+              <a:rPr lang="en-US" dirty="0"/>
+              <a:t>Estimate things like age cohorts, population change, </a:t>
+            </a:r>
+            <a:r>
+              <a:rPr lang="en-US" dirty="0" err="1"/>
+              <a:t>etc</a:t>
+            </a:r>
+            <a:r>
+              <a:rPr lang="en-US" dirty="0"/>
+              <a:t>… by generalizing. </a:t>
+            </a:r>
+          </a:p>
+          <a:p>
+            <a:pPr lvl="1"/>
+            <a:r>
+              <a:rPr lang="en-US" dirty="0"/>
+              <a:t>Based on experience, apply corrections to data for better projections (e.g. undercounting). </a:t>
+            </a:r>
+          </a:p>
+        </p:txBody>
+      </p:sp>
+    </p:spTree>
+    <p:extLst>
+      <p:ext uri="{BB962C8B-B14F-4D97-AF65-F5344CB8AC3E}">
+        <p14:creationId xmlns:p14="http://schemas.microsoft.com/office/powerpoint/2010/main" val="950710098"/>
+      </p:ext>
+    </p:extLst>
+  </p:cSld>
+  <p:clrMapOvr>
+    <a:masterClrMapping/>
+  </p:clrMapOvr>
+</p:sld>
+</file>
+
+<file path=ppt/slides/slide31.xml><?xml version="1.0" encoding="utf-8"?>
+<p:sld xmlns:a="http://schemas.openxmlformats.org/drawingml/2006/main" xmlns:r="http://schemas.openxmlformats.org/officeDocument/2006/relationships" xmlns:p="http://schemas.openxmlformats.org/presentationml/2006/main">
+  <p:cSld>
+    <p:spTree>
+      <p:nvGrpSpPr>
+        <p:cNvPr id="1" name=""/>
+        <p:cNvGrpSpPr/>
+        <p:nvPr/>
+      </p:nvGrpSpPr>
+      <p:grpSpPr>
+        <a:xfrm>
+          <a:off x="0" y="0"/>
+          <a:ext cx="0" cy="0"/>
+          <a:chOff x="0" y="0"/>
+          <a:chExt cx="0" cy="0"/>
+        </a:xfrm>
+      </p:grpSpPr>
+      <p:sp>
+        <p:nvSpPr>
+          <p:cNvPr id="2" name="Title 1">
+            <a:extLst>
+              <a:ext uri="{FF2B5EF4-FFF2-40B4-BE49-F238E27FC236}">
                 <a16:creationId xmlns:a16="http://schemas.microsoft.com/office/drawing/2014/main" id="{AB1D98C9-3D1D-6DAD-73FA-9E1D9ACF37FD}"/>
               </a:ext>
             </a:extLst>
@@ -7225,175 +7380,6 @@
 </p:sld>
 </file>
 
-<file path=ppt/slides/slide31.xml><?xml version="1.0" encoding="utf-8"?>
-<p:sld xmlns:a="http://schemas.openxmlformats.org/drawingml/2006/main" xmlns:r="http://schemas.openxmlformats.org/officeDocument/2006/relationships" xmlns:p="http://schemas.openxmlformats.org/presentationml/2006/main">
-  <p:cSld>
-    <p:spTree>
-      <p:nvGrpSpPr>
-        <p:cNvPr id="1" name=""/>
-        <p:cNvGrpSpPr/>
-        <p:nvPr/>
-      </p:nvGrpSpPr>
-      <p:grpSpPr>
-        <a:xfrm>
-          <a:off x="0" y="0"/>
-          <a:ext cx="0" cy="0"/>
-          <a:chOff x="0" y="0"/>
-          <a:chExt cx="0" cy="0"/>
-        </a:xfrm>
-      </p:grpSpPr>
-      <p:sp>
-        <p:nvSpPr>
-          <p:cNvPr id="2" name="Title 1">
-            <a:extLst>
-              <a:ext uri="{FF2B5EF4-FFF2-40B4-BE49-F238E27FC236}">
-                <a16:creationId xmlns:a16="http://schemas.microsoft.com/office/drawing/2014/main" id="{F1524498-433E-DCAB-9344-3EC48E0E5E1B}"/>
-              </a:ext>
-            </a:extLst>
-          </p:cNvPr>
-          <p:cNvSpPr>
-            <a:spLocks noGrp="1"/>
-          </p:cNvSpPr>
-          <p:nvPr>
-            <p:ph type="title"/>
-          </p:nvPr>
-        </p:nvSpPr>
-        <p:spPr/>
-        <p:txBody>
-          <a:bodyPr/>
-          <a:lstStyle/>
-          <a:p>
-            <a:r>
-              <a:rPr lang="en-US" dirty="0"/>
-              <a:t>Simulations Continued…</a:t>
-            </a:r>
-          </a:p>
-        </p:txBody>
-      </p:sp>
-      <p:sp>
-        <p:nvSpPr>
-          <p:cNvPr id="3" name="Content Placeholder 2">
-            <a:extLst>
-              <a:ext uri="{FF2B5EF4-FFF2-40B4-BE49-F238E27FC236}">
-                <a16:creationId xmlns:a16="http://schemas.microsoft.com/office/drawing/2014/main" id="{15789BB6-0B25-1181-7F94-42CB6146C6BA}"/>
-              </a:ext>
-            </a:extLst>
-          </p:cNvPr>
-          <p:cNvSpPr>
-            <a:spLocks noGrp="1"/>
-          </p:cNvSpPr>
-          <p:nvPr>
-            <p:ph idx="1"/>
-          </p:nvPr>
-        </p:nvSpPr>
-        <p:spPr>
-          <a:xfrm>
-            <a:off x="1451579" y="1853754"/>
-            <a:ext cx="9603275" cy="4199727"/>
-          </a:xfrm>
-        </p:spPr>
-        <p:txBody>
-          <a:bodyPr/>
-          <a:lstStyle/>
-          <a:p>
-            <a:r>
-              <a:rPr lang="en-US" dirty="0"/>
-              <a:t>With our trusty toolset, we could use any probability to simulate and predict. </a:t>
-            </a:r>
-          </a:p>
-          <a:p>
-            <a:pPr lvl="1"/>
-            <a:r>
-              <a:rPr lang="en-US" dirty="0"/>
-              <a:t>We have a probability of X happening or of having X value. </a:t>
-            </a:r>
-          </a:p>
-          <a:p>
-            <a:pPr lvl="1"/>
-            <a:r>
-              <a:rPr lang="en-US" dirty="0"/>
-              <a:t>We can build that probability into a model (analytical </a:t>
-            </a:r>
-            <a:r>
-              <a:rPr lang="en-US" dirty="0" err="1"/>
-              <a:t>dist</a:t>
-            </a:r>
-            <a:r>
-              <a:rPr lang="en-US" dirty="0"/>
-              <a:t> or it could be anything). </a:t>
-            </a:r>
-          </a:p>
-          <a:p>
-            <a:pPr lvl="1"/>
-            <a:r>
-              <a:rPr lang="en-US" dirty="0"/>
-              <a:t>Once we have the model, generate many sample distributions. </a:t>
-            </a:r>
-          </a:p>
-          <a:p>
-            <a:pPr lvl="1"/>
-            <a:r>
-              <a:rPr lang="en-US" dirty="0"/>
-              <a:t>Tabulate results into answer and confidence. </a:t>
-            </a:r>
-          </a:p>
-          <a:p>
-            <a:r>
-              <a:rPr lang="en-US" dirty="0"/>
-              <a:t>The only part that really changes is defining the probability distribution. </a:t>
-            </a:r>
-          </a:p>
-          <a:p>
-            <a:pPr lvl="1"/>
-            <a:r>
-              <a:rPr lang="en-US" dirty="0"/>
-              <a:t>Our judgement determines its accuracy – “what </a:t>
-            </a:r>
-            <a:r>
-              <a:rPr lang="en-US" dirty="0" err="1"/>
-              <a:t>dist</a:t>
-            </a:r>
-            <a:r>
-              <a:rPr lang="en-US" dirty="0"/>
-              <a:t> pattern does this data follow…”</a:t>
-            </a:r>
-          </a:p>
-          <a:p>
-            <a:pPr lvl="1"/>
-            <a:r>
-              <a:rPr lang="en-US" dirty="0"/>
-              <a:t>We are saying that model (anal. Dist.) </a:t>
-            </a:r>
-            <a:r>
-              <a:rPr lang="en-US" i="1" dirty="0"/>
-              <a:t>is</a:t>
-            </a:r>
-            <a:r>
-              <a:rPr lang="en-US" dirty="0"/>
-              <a:t> the shape of the data, so generated data follows. </a:t>
-            </a:r>
-          </a:p>
-          <a:p>
-            <a:r>
-              <a:rPr lang="en-US" dirty="0"/>
-              <a:t>Think of any other scenario….</a:t>
-            </a:r>
-          </a:p>
-        </p:txBody>
-      </p:sp>
-    </p:spTree>
-    <p:extLst>
-      <p:ext uri="{BB962C8B-B14F-4D97-AF65-F5344CB8AC3E}">
-        <p14:creationId xmlns:p14="http://schemas.microsoft.com/office/powerpoint/2010/main" val="4284744621"/>
-      </p:ext>
-    </p:extLst>
-  </p:cSld>
-  <p:clrMapOvr>
-    <a:masterClrMapping/>
-  </p:clrMapOvr>
-</p:sld>
-</file>
-
 <file path=ppt/slides/slide32.xml><?xml version="1.0" encoding="utf-8"?>
 <p:sld xmlns:a="http://schemas.openxmlformats.org/drawingml/2006/main" xmlns:r="http://schemas.openxmlformats.org/officeDocument/2006/relationships" xmlns:p="http://schemas.openxmlformats.org/presentationml/2006/main">
   <p:cSld>
@@ -7416,7 +7402,7 @@
           <p:cNvPr id="2" name="Title 1">
             <a:extLst>
               <a:ext uri="{FF2B5EF4-FFF2-40B4-BE49-F238E27FC236}">
-                <a16:creationId xmlns:a16="http://schemas.microsoft.com/office/drawing/2014/main" id="{B68AA33D-C32C-99A9-885A-D68A074A884A}"/>
+                <a16:creationId xmlns:a16="http://schemas.microsoft.com/office/drawing/2014/main" id="{F1524498-433E-DCAB-9344-3EC48E0E5E1B}"/>
               </a:ext>
             </a:extLst>
           </p:cNvPr>
@@ -7434,7 +7420,7 @@
           <a:p>
             <a:r>
               <a:rPr lang="en-US" dirty="0"/>
-              <a:t>Conclusion</a:t>
+              <a:t>Simulations Continued…</a:t>
             </a:r>
           </a:p>
         </p:txBody>
@@ -7444,7 +7430,7 @@
           <p:cNvPr id="3" name="Content Placeholder 2">
             <a:extLst>
               <a:ext uri="{FF2B5EF4-FFF2-40B4-BE49-F238E27FC236}">
-                <a16:creationId xmlns:a16="http://schemas.microsoft.com/office/drawing/2014/main" id="{A15151A3-87F3-C029-D1E1-3406A56AD3D9}"/>
+                <a16:creationId xmlns:a16="http://schemas.microsoft.com/office/drawing/2014/main" id="{15789BB6-0B25-1181-7F94-42CB6146C6BA}"/>
               </a:ext>
             </a:extLst>
           </p:cNvPr>
@@ -7467,6 +7453,175 @@
           <a:p>
             <a:r>
               <a:rPr lang="en-US" dirty="0"/>
+              <a:t>With our trusty toolset, we could use any probability to simulate and predict. </a:t>
+            </a:r>
+          </a:p>
+          <a:p>
+            <a:pPr lvl="1"/>
+            <a:r>
+              <a:rPr lang="en-US" dirty="0"/>
+              <a:t>We have a probability (could be anything) of X happening or of having X value. </a:t>
+            </a:r>
+          </a:p>
+          <a:p>
+            <a:pPr lvl="1"/>
+            <a:r>
+              <a:rPr lang="en-US" dirty="0"/>
+              <a:t>We can build that probability into a model (analytical </a:t>
+            </a:r>
+            <a:r>
+              <a:rPr lang="en-US" dirty="0" err="1"/>
+              <a:t>dist</a:t>
+            </a:r>
+            <a:r>
+              <a:rPr lang="en-US" dirty="0"/>
+              <a:t> or it could be anything). </a:t>
+            </a:r>
+          </a:p>
+          <a:p>
+            <a:pPr lvl="1"/>
+            <a:r>
+              <a:rPr lang="en-US" dirty="0"/>
+              <a:t>Once we have the model, generate many sample distributions. </a:t>
+            </a:r>
+          </a:p>
+          <a:p>
+            <a:pPr lvl="1"/>
+            <a:r>
+              <a:rPr lang="en-US" dirty="0"/>
+              <a:t>Tabulate results into answer and confidence. </a:t>
+            </a:r>
+          </a:p>
+          <a:p>
+            <a:r>
+              <a:rPr lang="en-US" dirty="0"/>
+              <a:t>The only part that really changes is defining the probability distribution. </a:t>
+            </a:r>
+          </a:p>
+          <a:p>
+            <a:pPr lvl="1"/>
+            <a:r>
+              <a:rPr lang="en-US" dirty="0"/>
+              <a:t>Our judgement determines its accuracy – “what </a:t>
+            </a:r>
+            <a:r>
+              <a:rPr lang="en-US" dirty="0" err="1"/>
+              <a:t>dist</a:t>
+            </a:r>
+            <a:r>
+              <a:rPr lang="en-US" dirty="0"/>
+              <a:t> pattern does this data follow…”</a:t>
+            </a:r>
+          </a:p>
+          <a:p>
+            <a:pPr lvl="1"/>
+            <a:r>
+              <a:rPr lang="en-US" dirty="0"/>
+              <a:t>We are saying that model (anal. Dist.) </a:t>
+            </a:r>
+            <a:r>
+              <a:rPr lang="en-US" i="1" dirty="0"/>
+              <a:t>is</a:t>
+            </a:r>
+            <a:r>
+              <a:rPr lang="en-US" dirty="0"/>
+              <a:t> the shape of the data, so generated data follows. </a:t>
+            </a:r>
+          </a:p>
+          <a:p>
+            <a:r>
+              <a:rPr lang="en-US" dirty="0"/>
+              <a:t>Think of any other scenario….</a:t>
+            </a:r>
+          </a:p>
+        </p:txBody>
+      </p:sp>
+    </p:spTree>
+    <p:extLst>
+      <p:ext uri="{BB962C8B-B14F-4D97-AF65-F5344CB8AC3E}">
+        <p14:creationId xmlns:p14="http://schemas.microsoft.com/office/powerpoint/2010/main" val="4284744621"/>
+      </p:ext>
+    </p:extLst>
+  </p:cSld>
+  <p:clrMapOvr>
+    <a:masterClrMapping/>
+  </p:clrMapOvr>
+</p:sld>
+</file>
+
+<file path=ppt/slides/slide33.xml><?xml version="1.0" encoding="utf-8"?>
+<p:sld xmlns:a="http://schemas.openxmlformats.org/drawingml/2006/main" xmlns:r="http://schemas.openxmlformats.org/officeDocument/2006/relationships" xmlns:p="http://schemas.openxmlformats.org/presentationml/2006/main">
+  <p:cSld>
+    <p:spTree>
+      <p:nvGrpSpPr>
+        <p:cNvPr id="1" name=""/>
+        <p:cNvGrpSpPr/>
+        <p:nvPr/>
+      </p:nvGrpSpPr>
+      <p:grpSpPr>
+        <a:xfrm>
+          <a:off x="0" y="0"/>
+          <a:ext cx="0" cy="0"/>
+          <a:chOff x="0" y="0"/>
+          <a:chExt cx="0" cy="0"/>
+        </a:xfrm>
+      </p:grpSpPr>
+      <p:sp>
+        <p:nvSpPr>
+          <p:cNvPr id="2" name="Title 1">
+            <a:extLst>
+              <a:ext uri="{FF2B5EF4-FFF2-40B4-BE49-F238E27FC236}">
+                <a16:creationId xmlns:a16="http://schemas.microsoft.com/office/drawing/2014/main" id="{B68AA33D-C32C-99A9-885A-D68A074A884A}"/>
+              </a:ext>
+            </a:extLst>
+          </p:cNvPr>
+          <p:cNvSpPr>
+            <a:spLocks noGrp="1"/>
+          </p:cNvSpPr>
+          <p:nvPr>
+            <p:ph type="title"/>
+          </p:nvPr>
+        </p:nvSpPr>
+        <p:spPr/>
+        <p:txBody>
+          <a:bodyPr/>
+          <a:lstStyle/>
+          <a:p>
+            <a:r>
+              <a:rPr lang="en-US" dirty="0"/>
+              <a:t>Conclusion</a:t>
+            </a:r>
+          </a:p>
+        </p:txBody>
+      </p:sp>
+      <p:sp>
+        <p:nvSpPr>
+          <p:cNvPr id="3" name="Content Placeholder 2">
+            <a:extLst>
+              <a:ext uri="{FF2B5EF4-FFF2-40B4-BE49-F238E27FC236}">
+                <a16:creationId xmlns:a16="http://schemas.microsoft.com/office/drawing/2014/main" id="{A15151A3-87F3-C029-D1E1-3406A56AD3D9}"/>
+              </a:ext>
+            </a:extLst>
+          </p:cNvPr>
+          <p:cNvSpPr>
+            <a:spLocks noGrp="1"/>
+          </p:cNvSpPr>
+          <p:nvPr>
+            <p:ph idx="1"/>
+          </p:nvPr>
+        </p:nvSpPr>
+        <p:spPr>
+          <a:xfrm>
+            <a:off x="1451579" y="1853754"/>
+            <a:ext cx="9603275" cy="4199727"/>
+          </a:xfrm>
+        </p:spPr>
+        <p:txBody>
+          <a:bodyPr/>
+          <a:lstStyle/>
+          <a:p>
+            <a:r>
+              <a:rPr lang="en-US" dirty="0"/>
               <a:t>We can use estimation to predict population stats with small samples. </a:t>
             </a:r>
           </a:p>
@@ -7523,6 +7678,17 @@
               <a:rPr lang="en-US" dirty="0"/>
               <a:t>We don’t really care about matching stats, we care about accurate predicting. </a:t>
             </a:r>
+          </a:p>
+          <a:p>
+            <a:r>
+              <a:rPr lang="en-US" dirty="0"/>
+              <a:t>Chapter 8, workbooks 12A and 14 have some similar exercises – should </a:t>
+            </a:r>
+            <a:r>
+              <a:rPr lang="en-US"/>
+              <a:t>be doable. </a:t>
+            </a:r>
+            <a:endParaRPr lang="en-US" dirty="0"/>
           </a:p>
         </p:txBody>
       </p:sp>
